--- a/course/modules/M01/L004/M01-L004-deck.pptx
+++ b/course/modules/M01/L004/M01-L004-deck.pptx
@@ -14,7 +14,6 @@
     <p:sldId id="262" r:id="rId13"/>
     <p:sldId id="263" r:id="rId14"/>
     <p:sldId id="264" r:id="rId15"/>
-    <p:sldId id="265" r:id="rId16"/>
   </p:sldIdLst>
   <p:sldSz cx="12191695" cy="6858000" type="screen4x3"/>
   <p:notesSz cx="6858000" cy="9144000"/>
@@ -3605,450 +3604,6 @@
 </p:sld>
 </file>
 
-<file path=ppt/slides/slide10.xml><?xml version="1.0" encoding="utf-8"?>
-<p:sld xmlns:a="http://schemas.openxmlformats.org/drawingml/2006/main" xmlns:p="http://schemas.openxmlformats.org/presentationml/2006/main" xmlns:r="http://schemas.openxmlformats.org/officeDocument/2006/relationships">
-  <p:cSld>
-    <p:bg>
-      <p:bgPr>
-        <a:solidFill>
-          <a:srgbClr val="F5F7F8"/>
-        </a:solidFill>
-        <a:effectLst/>
-      </p:bgPr>
-    </p:bg>
-    <p:spTree>
-      <p:nvGrpSpPr>
-        <p:cNvPr id="1" name=""/>
-        <p:cNvGrpSpPr/>
-        <p:nvPr/>
-      </p:nvGrpSpPr>
-      <p:grpSpPr/>
-      <p:sp>
-        <p:nvSpPr>
-          <p:cNvPr id="2" name="__pip_placeholder__"/>
-          <p:cNvSpPr/>
-          <p:nvPr/>
-        </p:nvSpPr>
-        <p:spPr>
-          <a:xfrm>
-            <a:off x="8351215" y="0"/>
-            <a:ext cx="3840480" cy="2880360"/>
-          </a:xfrm>
-          <a:prstGeom prst="rect">
-            <a:avLst/>
-          </a:prstGeom>
-          <a:solidFill>
-            <a:srgbClr val="DBE7EC">
-              <a:alpha val="30000"/>
-            </a:srgbClr>
-          </a:solidFill>
-          <a:ln w="19050">
-            <a:solidFill>
-              <a:srgbClr val="355C7D"/>
-            </a:solidFill>
-            <a:prstDash val="sysDash"/>
-          </a:ln>
-        </p:spPr>
-        <p:style>
-          <a:lnRef idx="1">
-            <a:schemeClr val="accent1"/>
-          </a:lnRef>
-          <a:fillRef idx="3">
-            <a:schemeClr val="accent1"/>
-          </a:fillRef>
-          <a:effectRef idx="2">
-            <a:schemeClr val="accent1"/>
-          </a:effectRef>
-          <a:fontRef idx="minor">
-            <a:schemeClr val="lt1"/>
-          </a:fontRef>
-        </p:style>
-        <p:txBody>
-          <a:bodyPr rtlCol="0" anchor="ctr" wrap="none"/>
-          <a:lstStyle/>
-          <a:p>
-            <a:pPr algn="ctr"/>
-            <a:r>
-              <a:rPr sz="1800" b="1">
-                <a:solidFill>
-                  <a:srgbClr val="355C7D"/>
-                </a:solidFill>
-                <a:latin typeface="Sarabun"/>
-              </a:rPr>
-              <a:t>Nine</a:t>
-            </a:r>
-          </a:p>
-        </p:txBody>
-      </p:sp>
-      <p:sp>
-        <p:nvSpPr>
-          <p:cNvPr id="3" name="Rectangle 2"/>
-          <p:cNvSpPr/>
-          <p:nvPr/>
-        </p:nvSpPr>
-        <p:spPr>
-          <a:xfrm>
-            <a:off x="0" y="0"/>
-            <a:ext cx="12191695" cy="63500"/>
-          </a:xfrm>
-          <a:prstGeom prst="rect">
-            <a:avLst/>
-          </a:prstGeom>
-          <a:solidFill>
-            <a:srgbClr val="355C7D"/>
-          </a:solidFill>
-          <a:ln>
-            <a:noFill/>
-          </a:ln>
-        </p:spPr>
-        <p:style>
-          <a:lnRef idx="1">
-            <a:schemeClr val="accent1"/>
-          </a:lnRef>
-          <a:fillRef idx="3">
-            <a:schemeClr val="accent1"/>
-          </a:fillRef>
-          <a:effectRef idx="2">
-            <a:schemeClr val="accent1"/>
-          </a:effectRef>
-          <a:fontRef idx="minor">
-            <a:schemeClr val="lt1"/>
-          </a:fontRef>
-        </p:style>
-        <p:txBody>
-          <a:bodyPr rtlCol="0" anchor="ctr"/>
-          <a:lstStyle/>
-          <a:p>
-            <a:pPr algn="ctr"/>
-          </a:p>
-        </p:txBody>
-      </p:sp>
-      <p:sp>
-        <p:nvSpPr>
-          <p:cNvPr id="4" name="TextBox 3"/>
-          <p:cNvSpPr txBox="1"/>
-          <p:nvPr/>
-        </p:nvSpPr>
-        <p:spPr>
-          <a:xfrm>
-            <a:off x="731520" y="256032"/>
-            <a:ext cx="7071055" cy="256032"/>
-          </a:xfrm>
-          <a:prstGeom prst="rect">
-            <a:avLst/>
-          </a:prstGeom>
-          <a:noFill/>
-        </p:spPr>
-        <p:txBody>
-          <a:bodyPr wrap="square" anchor="t">
-            <a:spAutoFit/>
-          </a:bodyPr>
-          <a:lstStyle/>
-          <a:p>
-            <a:pPr algn="l"/>
-            <a:r>
-              <a:rPr sz="1200" b="1" i="0" lang="en-US" altLang="en-US">
-                <a:solidFill>
-                  <a:srgbClr val="355C7D"/>
-                </a:solidFill>
-                <a:latin typeface="Sarabun"/>
-                <a:ea typeface="Sarabun"/>
-                <a:cs typeface="Sarabun"/>
-              </a:rPr>
-              <a:t>Closing</a:t>
-            </a:r>
-          </a:p>
-        </p:txBody>
-      </p:sp>
-      <p:sp>
-        <p:nvSpPr>
-          <p:cNvPr id="5" name="TextBox 4"/>
-          <p:cNvSpPr txBox="1"/>
-          <p:nvPr/>
-        </p:nvSpPr>
-        <p:spPr>
-          <a:xfrm>
-            <a:off x="731520" y="530352"/>
-            <a:ext cx="7071055" cy="640080"/>
-          </a:xfrm>
-          <a:prstGeom prst="rect">
-            <a:avLst/>
-          </a:prstGeom>
-          <a:noFill/>
-        </p:spPr>
-        <p:txBody>
-          <a:bodyPr wrap="square" anchor="t">
-            <a:spAutoFit/>
-          </a:bodyPr>
-          <a:lstStyle/>
-          <a:p>
-            <a:pPr algn="l"/>
-            <a:r>
-              <a:rPr sz="3600" b="1" i="0" lang="en-US" altLang="en-US">
-                <a:solidFill>
-                  <a:srgbClr val="24333D"/>
-                </a:solidFill>
-                <a:latin typeface="Sarabun"/>
-                <a:ea typeface="Sarabun"/>
-                <a:cs typeface="Sarabun"/>
-              </a:rPr>
-              <a:t>Closing</a:t>
-            </a:r>
-          </a:p>
-        </p:txBody>
-      </p:sp>
-      <p:sp>
-        <p:nvSpPr>
-          <p:cNvPr id="6" name="Rounded Rectangle 5"/>
-          <p:cNvSpPr/>
-          <p:nvPr/>
-        </p:nvSpPr>
-        <p:spPr>
-          <a:xfrm>
-            <a:off x="731520" y="1600200"/>
-            <a:ext cx="7071055" cy="1289304"/>
-          </a:xfrm>
-          <a:prstGeom prst="roundRect">
-            <a:avLst>
-              <a:gd name="adj" fmla="val 6000"/>
-            </a:avLst>
-          </a:prstGeom>
-          <a:solidFill>
-            <a:srgbClr val="FFFFFF"/>
-          </a:solidFill>
-          <a:ln>
-            <a:solidFill>
-              <a:srgbClr val="D7DEE3"/>
-            </a:solidFill>
-          </a:ln>
-        </p:spPr>
-        <p:style>
-          <a:lnRef idx="1">
-            <a:schemeClr val="accent1"/>
-          </a:lnRef>
-          <a:fillRef idx="3">
-            <a:schemeClr val="accent1"/>
-          </a:fillRef>
-          <a:effectRef idx="2">
-            <a:schemeClr val="accent1"/>
-          </a:effectRef>
-          <a:fontRef idx="minor">
-            <a:schemeClr val="lt1"/>
-          </a:fontRef>
-        </p:style>
-        <p:txBody>
-          <a:bodyPr rtlCol="0" anchor="ctr"/>
-          <a:lstStyle/>
-          <a:p>
-            <a:pPr algn="ctr"/>
-          </a:p>
-        </p:txBody>
-      </p:sp>
-      <p:sp>
-        <p:nvSpPr>
-          <p:cNvPr id="7" name="TextBox 6"/>
-          <p:cNvSpPr txBox="1"/>
-          <p:nvPr/>
-        </p:nvSpPr>
-        <p:spPr>
-          <a:xfrm>
-            <a:off x="932688" y="1746504"/>
-            <a:ext cx="6705295" cy="228600"/>
-          </a:xfrm>
-          <a:prstGeom prst="rect">
-            <a:avLst/>
-          </a:prstGeom>
-          <a:noFill/>
-        </p:spPr>
-        <p:txBody>
-          <a:bodyPr wrap="square" anchor="t">
-            <a:spAutoFit/>
-          </a:bodyPr>
-          <a:lstStyle/>
-          <a:p>
-            <a:pPr algn="l"/>
-            <a:r>
-              <a:rPr sz="1500" b="1" i="0" lang="en-US" altLang="en-US">
-                <a:solidFill>
-                  <a:srgbClr val="C96F4A"/>
-                </a:solidFill>
-                <a:latin typeface="Sarabun"/>
-                <a:ea typeface="Sarabun"/>
-                <a:cs typeface="Sarabun"/>
-              </a:rPr>
-              <a:t>Next steps</a:t>
-            </a:r>
-          </a:p>
-        </p:txBody>
-      </p:sp>
-      <p:sp>
-        <p:nvSpPr>
-          <p:cNvPr id="8" name="Oval 7"/>
-          <p:cNvSpPr/>
-          <p:nvPr/>
-        </p:nvSpPr>
-        <p:spPr>
-          <a:xfrm>
-            <a:off x="932688" y="2130552"/>
-            <a:ext cx="82296" cy="82296"/>
-          </a:xfrm>
-          <a:prstGeom prst="ellipse">
-            <a:avLst/>
-          </a:prstGeom>
-          <a:solidFill>
-            <a:srgbClr val="C96F4A"/>
-          </a:solidFill>
-          <a:ln>
-            <a:noFill/>
-          </a:ln>
-        </p:spPr>
-        <p:style>
-          <a:lnRef idx="1">
-            <a:schemeClr val="accent1"/>
-          </a:lnRef>
-          <a:fillRef idx="3">
-            <a:schemeClr val="accent1"/>
-          </a:fillRef>
-          <a:effectRef idx="2">
-            <a:schemeClr val="accent1"/>
-          </a:effectRef>
-          <a:fontRef idx="minor">
-            <a:schemeClr val="lt1"/>
-          </a:fontRef>
-        </p:style>
-        <p:txBody>
-          <a:bodyPr rtlCol="0" anchor="ctr"/>
-          <a:lstStyle/>
-          <a:p>
-            <a:pPr algn="ctr"/>
-          </a:p>
-        </p:txBody>
-      </p:sp>
-      <p:sp>
-        <p:nvSpPr>
-          <p:cNvPr id="9" name="TextBox 8"/>
-          <p:cNvSpPr txBox="1"/>
-          <p:nvPr/>
-        </p:nvSpPr>
-        <p:spPr>
-          <a:xfrm>
-            <a:off x="1078992" y="2039112"/>
-            <a:ext cx="6568135" cy="274320"/>
-          </a:xfrm>
-          <a:prstGeom prst="rect">
-            <a:avLst/>
-          </a:prstGeom>
-          <a:noFill/>
-        </p:spPr>
-        <p:txBody>
-          <a:bodyPr wrap="square" anchor="t">
-            <a:spAutoFit/>
-          </a:bodyPr>
-          <a:lstStyle/>
-          <a:p>
-            <a:pPr algn="l"/>
-            <a:r>
-              <a:rPr sz="1500" b="0" i="0" lang="en-US" altLang="en-US">
-                <a:solidFill>
-                  <a:srgbClr val="24333D"/>
-                </a:solidFill>
-                <a:latin typeface="Sarabun"/>
-                <a:ea typeface="Sarabun"/>
-                <a:cs typeface="Sarabun"/>
-              </a:rPr>
-              <a:t>By the end, you can hear, repeat, and produce Thai digits 0-10 in room-number, counting, and simple age exchanges.</a:t>
-            </a:r>
-          </a:p>
-        </p:txBody>
-      </p:sp>
-      <p:sp>
-        <p:nvSpPr>
-          <p:cNvPr id="10" name="Oval 9"/>
-          <p:cNvSpPr/>
-          <p:nvPr/>
-        </p:nvSpPr>
-        <p:spPr>
-          <a:xfrm>
-            <a:off x="932688" y="2441448"/>
-            <a:ext cx="82296" cy="82296"/>
-          </a:xfrm>
-          <a:prstGeom prst="ellipse">
-            <a:avLst/>
-          </a:prstGeom>
-          <a:solidFill>
-            <a:srgbClr val="C96F4A"/>
-          </a:solidFill>
-          <a:ln>
-            <a:noFill/>
-          </a:ln>
-        </p:spPr>
-        <p:style>
-          <a:lnRef idx="1">
-            <a:schemeClr val="accent1"/>
-          </a:lnRef>
-          <a:fillRef idx="3">
-            <a:schemeClr val="accent1"/>
-          </a:fillRef>
-          <a:effectRef idx="2">
-            <a:schemeClr val="accent1"/>
-          </a:effectRef>
-          <a:fontRef idx="minor">
-            <a:schemeClr val="lt1"/>
-          </a:fontRef>
-        </p:style>
-        <p:txBody>
-          <a:bodyPr rtlCol="0" anchor="ctr"/>
-          <a:lstStyle/>
-          <a:p>
-            <a:pPr algn="ctr"/>
-          </a:p>
-        </p:txBody>
-      </p:sp>
-      <p:sp>
-        <p:nvSpPr>
-          <p:cNvPr id="11" name="TextBox 10"/>
-          <p:cNvSpPr txBox="1"/>
-          <p:nvPr/>
-        </p:nvSpPr>
-        <p:spPr>
-          <a:xfrm>
-            <a:off x="1078992" y="2350008"/>
-            <a:ext cx="6568135" cy="274320"/>
-          </a:xfrm>
-          <a:prstGeom prst="rect">
-            <a:avLst/>
-          </a:prstGeom>
-          <a:noFill/>
-        </p:spPr>
-        <p:txBody>
-          <a:bodyPr wrap="square" anchor="t">
-            <a:spAutoFit/>
-          </a:bodyPr>
-          <a:lstStyle/>
-          <a:p>
-            <a:pPr algn="l"/>
-            <a:r>
-              <a:rPr sz="1500" b="0" i="0" lang="en-US" altLang="en-US">
-                <a:solidFill>
-                  <a:srgbClr val="24333D"/>
-                </a:solidFill>
-                <a:latin typeface="Sarabun"/>
-                <a:ea typeface="Sarabun"/>
-                <a:cs typeface="Sarabun"/>
-              </a:rPr>
-              <a:t>Next: First Contact and Courtesy continues.</a:t>
-            </a:r>
-          </a:p>
-        </p:txBody>
-      </p:sp>
-    </p:spTree>
-  </p:cSld>
-  <p:clrMapOvr>
-    <a:masterClrMapping/>
-  </p:clrMapOvr>
-</p:sld>
-</file>
-
 <file path=ppt/slides/slide2.xml><?xml version="1.0" encoding="utf-8"?>
 <p:sld xmlns:a="http://schemas.openxmlformats.org/drawingml/2006/main" xmlns:p="http://schemas.openxmlformats.org/presentationml/2006/main" xmlns:r="http://schemas.openxmlformats.org/officeDocument/2006/relationships">
   <p:cSld>
@@ -4920,7 +4475,7 @@
                 <a:ea typeface="Sarabun"/>
                 <a:cs typeface="Sarabun"/>
               </a:rPr>
-              <a:t>The first six digits: 0 to 5</a:t>
+              <a:t>Digits 0 to 5</a:t>
             </a:r>
           </a:p>
         </p:txBody>
@@ -4933,8 +4488,8 @@
         </p:nvSpPr>
         <p:spPr>
           <a:xfrm>
-            <a:off x="731520" y="1325880"/>
-            <a:ext cx="3889080" cy="1572768"/>
+            <a:off x="4832731" y="1325880"/>
+            <a:ext cx="2828422" cy="2240280"/>
           </a:xfrm>
           <a:prstGeom prst="roundRect">
             <a:avLst>
@@ -4972,144 +4527,40 @@
           </a:p>
         </p:txBody>
       </p:sp>
-      <p:sp>
-        <p:nvSpPr>
-          <p:cNvPr id="7" name="Rectangle 6"/>
+      <p:pic>
+        <p:nvPicPr>
+          <p:cNvPr id="7" name="Picture 6" descr="slide-03-digits-0-to-5-thai-number-chart.png"/>
+          <p:cNvPicPr>
+            <a:picLocks noChangeAspect="1"/>
+          </p:cNvPicPr>
+          <p:nvPr/>
+        </p:nvPicPr>
+        <p:blipFill>
+          <a:blip r:embed="rId2"/>
+          <a:stretch>
+            <a:fillRect/>
+          </a:stretch>
+        </p:blipFill>
+        <p:spPr>
+          <a:xfrm>
+            <a:off x="4997323" y="1490472"/>
+            <a:ext cx="2506648" cy="1901952"/>
+          </a:xfrm>
+          <a:prstGeom prst="rect">
+            <a:avLst/>
+          </a:prstGeom>
+        </p:spPr>
+      </p:pic>
+      <p:sp>
+        <p:nvSpPr>
+          <p:cNvPr id="8" name="Rounded Rectangle 7"/>
           <p:cNvSpPr/>
           <p:nvPr/>
         </p:nvSpPr>
         <p:spPr>
           <a:xfrm>
-            <a:off x="868680" y="1527048"/>
-            <a:ext cx="73152" cy="1143000"/>
-          </a:xfrm>
-          <a:prstGeom prst="rect">
-            <a:avLst/>
-          </a:prstGeom>
-          <a:solidFill>
-            <a:srgbClr val="355C7D"/>
-          </a:solidFill>
-          <a:ln>
-            <a:noFill/>
-          </a:ln>
-        </p:spPr>
-        <p:style>
-          <a:lnRef idx="1">
-            <a:schemeClr val="accent1"/>
-          </a:lnRef>
-          <a:fillRef idx="3">
-            <a:schemeClr val="accent1"/>
-          </a:fillRef>
-          <a:effectRef idx="2">
-            <a:schemeClr val="accent1"/>
-          </a:effectRef>
-          <a:fontRef idx="minor">
-            <a:schemeClr val="lt1"/>
-          </a:fontRef>
-        </p:style>
-        <p:txBody>
-          <a:bodyPr rtlCol="0" anchor="ctr"/>
-          <a:lstStyle/>
-          <a:p>
-            <a:pPr algn="ctr"/>
-          </a:p>
-        </p:txBody>
-      </p:sp>
-      <p:sp>
-        <p:nvSpPr>
-          <p:cNvPr id="8" name="TextBox 7"/>
-          <p:cNvSpPr txBox="1"/>
-          <p:nvPr/>
-        </p:nvSpPr>
-        <p:spPr>
-          <a:xfrm>
-            <a:off x="1078992" y="1435608"/>
-            <a:ext cx="3431880" cy="658368"/>
-          </a:xfrm>
-          <a:prstGeom prst="rect">
-            <a:avLst/>
-          </a:prstGeom>
-          <a:noFill/>
-        </p:spPr>
-        <p:txBody>
-          <a:bodyPr wrap="square" anchor="t">
-            <a:spAutoFit/>
-          </a:bodyPr>
-          <a:lstStyle/>
-          <a:p>
-            <a:pPr algn="l"/>
-            <a:r>
-              <a:rPr sz="3200" b="1" i="0" lang="th-TH" altLang="en-US">
-                <a:solidFill>
-                  <a:srgbClr val="24333D"/>
-                </a:solidFill>
-                <a:latin typeface="Sarabun"/>
-                <a:ea typeface="Sarabun"/>
-                <a:cs typeface="Sarabun"/>
-              </a:rPr>
-              <a:t>ศูนย์</a:t>
-            </a:r>
-            <a:r>
-              <a:rPr sz="1980" b="0" i="1" lang="en-US" altLang="en-US">
-                <a:solidFill>
-                  <a:srgbClr val="566873"/>
-                </a:solidFill>
-                <a:latin typeface="Sarabun"/>
-                <a:ea typeface="Sarabun"/>
-                <a:cs typeface="Sarabun"/>
-              </a:rPr>
-              <a:t> (sǔun)</a:t>
-            </a:r>
-          </a:p>
-        </p:txBody>
-      </p:sp>
-      <p:sp>
-        <p:nvSpPr>
-          <p:cNvPr id="9" name="TextBox 8"/>
-          <p:cNvSpPr txBox="1"/>
-          <p:nvPr/>
-        </p:nvSpPr>
-        <p:spPr>
-          <a:xfrm>
-            <a:off x="1078992" y="2203704"/>
-            <a:ext cx="3431880" cy="274320"/>
-          </a:xfrm>
-          <a:prstGeom prst="rect">
-            <a:avLst/>
-          </a:prstGeom>
-          <a:noFill/>
-        </p:spPr>
-        <p:txBody>
-          <a:bodyPr wrap="square" anchor="t">
-            <a:spAutoFit/>
-          </a:bodyPr>
-          <a:lstStyle/>
-          <a:p>
-            <a:pPr algn="l"/>
-            <a:r>
-              <a:rPr sz="1500" b="0" i="0" lang="en-US" altLang="en-US">
-                <a:solidFill>
-                  <a:srgbClr val="82909A"/>
-                </a:solidFill>
-                <a:latin typeface="Sarabun"/>
-                <a:ea typeface="Sarabun"/>
-                <a:cs typeface="Sarabun"/>
-              </a:rPr>
-              <a:t>zero</a:t>
-            </a:r>
-          </a:p>
-        </p:txBody>
-      </p:sp>
-      <p:sp>
-        <p:nvSpPr>
-          <p:cNvPr id="10" name="Rounded Rectangle 9"/>
-          <p:cNvSpPr/>
-          <p:nvPr/>
-        </p:nvSpPr>
-        <p:spPr>
-          <a:xfrm>
-            <a:off x="731520" y="3081528"/>
-            <a:ext cx="3889080" cy="1572768"/>
+            <a:off x="4832731" y="3703320"/>
+            <a:ext cx="2828422" cy="1289304"/>
           </a:xfrm>
           <a:prstGeom prst="roundRect">
             <a:avLst>
@@ -5149,20 +4600,57 @@
       </p:sp>
       <p:sp>
         <p:nvSpPr>
-          <p:cNvPr id="11" name="Rectangle 10"/>
+          <p:cNvPr id="9" name="TextBox 8"/>
+          <p:cNvSpPr txBox="1"/>
+          <p:nvPr/>
+        </p:nvSpPr>
+        <p:spPr>
+          <a:xfrm>
+            <a:off x="5033899" y="3849624"/>
+            <a:ext cx="2462662" cy="228600"/>
+          </a:xfrm>
+          <a:prstGeom prst="rect">
+            <a:avLst/>
+          </a:prstGeom>
+          <a:noFill/>
+        </p:spPr>
+        <p:txBody>
+          <a:bodyPr wrap="square" anchor="t">
+            <a:spAutoFit/>
+          </a:bodyPr>
+          <a:lstStyle/>
+          <a:p>
+            <a:pPr algn="l"/>
+            <a:r>
+              <a:rPr sz="1500" b="1" i="0" lang="en-US" altLang="en-US">
+                <a:solidFill>
+                  <a:srgbClr val="7A8F54"/>
+                </a:solidFill>
+                <a:latin typeface="Sarabun"/>
+                <a:ea typeface="Sarabun"/>
+                <a:cs typeface="Sarabun"/>
+              </a:rPr>
+              <a:t>Visual rationale</a:t>
+            </a:r>
+          </a:p>
+        </p:txBody>
+      </p:sp>
+      <p:sp>
+        <p:nvSpPr>
+          <p:cNvPr id="10" name="Oval 9"/>
           <p:cNvSpPr/>
           <p:nvPr/>
         </p:nvSpPr>
         <p:spPr>
           <a:xfrm>
-            <a:off x="868680" y="3282696"/>
-            <a:ext cx="73152" cy="1143000"/>
-          </a:xfrm>
-          <a:prstGeom prst="rect">
+            <a:off x="5033899" y="4233672"/>
+            <a:ext cx="82296" cy="82296"/>
+          </a:xfrm>
+          <a:prstGeom prst="ellipse">
             <a:avLst/>
           </a:prstGeom>
           <a:solidFill>
-            <a:srgbClr val="355C7D"/>
+            <a:srgbClr val="7A8F54"/>
           </a:solidFill>
           <a:ln>
             <a:noFill/>
@@ -5192,14 +4680,14 @@
       </p:sp>
       <p:sp>
         <p:nvSpPr>
-          <p:cNvPr id="12" name="TextBox 11"/>
+          <p:cNvPr id="11" name="TextBox 10"/>
           <p:cNvSpPr txBox="1"/>
           <p:nvPr/>
         </p:nvSpPr>
         <p:spPr>
           <a:xfrm>
-            <a:off x="1078992" y="3191256"/>
-            <a:ext cx="3431880" cy="658368"/>
+            <a:off x="5180203" y="4142232"/>
+            <a:ext cx="2325502" cy="274320"/>
           </a:xfrm>
           <a:prstGeom prst="rect">
             <a:avLst/>
@@ -5214,77 +4702,29 @@
           <a:p>
             <a:pPr algn="l"/>
             <a:r>
-              <a:rPr sz="3200" b="1" i="0" lang="th-TH" altLang="en-US">
-                <a:solidFill>
-                  <a:srgbClr val="24333D"/>
-                </a:solidFill>
-                <a:latin typeface="Sarabun"/>
-                <a:ea typeface="Sarabun"/>
-                <a:cs typeface="Sarabun"/>
-              </a:rPr>
-              <a:t>หนึ่ง</a:t>
-            </a:r>
-            <a:r>
-              <a:rPr sz="1980" b="0" i="1" lang="en-US" altLang="en-US">
-                <a:solidFill>
-                  <a:srgbClr val="566873"/>
-                </a:solidFill>
-                <a:latin typeface="Sarabun"/>
-                <a:ea typeface="Sarabun"/>
-                <a:cs typeface="Sarabun"/>
-              </a:rPr>
-              <a:t> (nùeng)</a:t>
-            </a:r>
-          </a:p>
-        </p:txBody>
-      </p:sp>
-      <p:sp>
-        <p:nvSpPr>
-          <p:cNvPr id="13" name="TextBox 12"/>
-          <p:cNvSpPr txBox="1"/>
-          <p:nvPr/>
-        </p:nvSpPr>
-        <p:spPr>
-          <a:xfrm>
-            <a:off x="1078992" y="3959352"/>
-            <a:ext cx="3431880" cy="274320"/>
-          </a:xfrm>
-          <a:prstGeom prst="rect">
-            <a:avLst/>
-          </a:prstGeom>
-          <a:noFill/>
-        </p:spPr>
-        <p:txBody>
-          <a:bodyPr wrap="square" anchor="t">
-            <a:spAutoFit/>
-          </a:bodyPr>
-          <a:lstStyle/>
-          <a:p>
-            <a:pPr algn="l"/>
-            <a:r>
               <a:rPr sz="1500" b="0" i="0" lang="en-US" altLang="en-US">
                 <a:solidFill>
-                  <a:srgbClr val="82909A"/>
-                </a:solidFill>
-                <a:latin typeface="Sarabun"/>
-                <a:ea typeface="Sarabun"/>
-                <a:cs typeface="Sarabun"/>
-              </a:rPr>
-              <a:t>one</a:t>
-            </a:r>
-          </a:p>
-        </p:txBody>
-      </p:sp>
-      <p:sp>
-        <p:nvSpPr>
-          <p:cNvPr id="14" name="Rounded Rectangle 13"/>
+                  <a:srgbClr val="24333D"/>
+                </a:solidFill>
+                <a:latin typeface="Sarabun"/>
+                <a:ea typeface="Sarabun"/>
+                <a:cs typeface="Sarabun"/>
+              </a:rPr>
+              <a:t>A simple 0-5 digit chart with Arabic numerals helps visual anchoring.</a:t>
+            </a:r>
+          </a:p>
+        </p:txBody>
+      </p:sp>
+      <p:sp>
+        <p:nvSpPr>
+          <p:cNvPr id="12" name="Rounded Rectangle 11"/>
           <p:cNvSpPr/>
           <p:nvPr/>
         </p:nvSpPr>
         <p:spPr>
           <a:xfrm>
-            <a:off x="731520" y="4837176"/>
-            <a:ext cx="3889080" cy="1572768"/>
+            <a:off x="731520" y="1325880"/>
+            <a:ext cx="3889080" cy="685800"/>
           </a:xfrm>
           <a:prstGeom prst="roundRect">
             <a:avLst>
@@ -5324,14 +4764,14 @@
       </p:sp>
       <p:sp>
         <p:nvSpPr>
-          <p:cNvPr id="15" name="Rectangle 14"/>
+          <p:cNvPr id="13" name="Rectangle 12"/>
           <p:cNvSpPr/>
           <p:nvPr/>
         </p:nvSpPr>
         <p:spPr>
           <a:xfrm>
-            <a:off x="868680" y="5038344"/>
-            <a:ext cx="73152" cy="1143000"/>
+            <a:off x="868680" y="1435608"/>
+            <a:ext cx="73152" cy="411480"/>
           </a:xfrm>
           <a:prstGeom prst="rect">
             <a:avLst/>
@@ -5367,14 +4807,14 @@
       </p:sp>
       <p:sp>
         <p:nvSpPr>
-          <p:cNvPr id="16" name="TextBox 15"/>
+          <p:cNvPr id="14" name="TextBox 13"/>
           <p:cNvSpPr txBox="1"/>
           <p:nvPr/>
         </p:nvSpPr>
         <p:spPr>
           <a:xfrm>
-            <a:off x="1078992" y="4946904"/>
-            <a:ext cx="3431880" cy="658368"/>
+            <a:off x="1078992" y="1399032"/>
+            <a:ext cx="3431880" cy="320040"/>
           </a:xfrm>
           <a:prstGeom prst="rect">
             <a:avLst/>
@@ -5389,18 +4829,18 @@
           <a:p>
             <a:pPr algn="l"/>
             <a:r>
-              <a:rPr sz="3200" b="1" i="0" lang="th-TH" altLang="en-US">
-                <a:solidFill>
-                  <a:srgbClr val="24333D"/>
-                </a:solidFill>
-                <a:latin typeface="Sarabun"/>
-                <a:ea typeface="Sarabun"/>
-                <a:cs typeface="Sarabun"/>
-              </a:rPr>
-              <a:t>สอง</a:t>
-            </a:r>
-            <a:r>
-              <a:rPr sz="1980" b="0" i="1" lang="en-US" altLang="en-US">
+              <a:rPr sz="2200" b="1" i="0" lang="th-TH" altLang="en-US">
+                <a:solidFill>
+                  <a:srgbClr val="24333D"/>
+                </a:solidFill>
+                <a:latin typeface="Sarabun"/>
+                <a:ea typeface="Sarabun"/>
+                <a:cs typeface="Sarabun"/>
+              </a:rPr>
+              <a:t>ศูนย์</a:t>
+            </a:r>
+            <a:r>
+              <a:rPr sz="1500" b="0" i="1" lang="en-US" altLang="en-US">
                 <a:solidFill>
                   <a:srgbClr val="566873"/>
                 </a:solidFill>
@@ -5408,21 +4848,21 @@
                 <a:ea typeface="Sarabun"/>
                 <a:cs typeface="Sarabun"/>
               </a:rPr>
-              <a:t> (sǎawng)</a:t>
-            </a:r>
-          </a:p>
-        </p:txBody>
-      </p:sp>
-      <p:sp>
-        <p:nvSpPr>
-          <p:cNvPr id="17" name="TextBox 16"/>
+              <a:t> (sǔun)</a:t>
+            </a:r>
+          </a:p>
+        </p:txBody>
+      </p:sp>
+      <p:sp>
+        <p:nvSpPr>
+          <p:cNvPr id="15" name="TextBox 14"/>
           <p:cNvSpPr txBox="1"/>
           <p:nvPr/>
         </p:nvSpPr>
         <p:spPr>
           <a:xfrm>
-            <a:off x="1078992" y="5715000"/>
-            <a:ext cx="3431880" cy="274320"/>
+            <a:off x="1078992" y="1709928"/>
+            <a:ext cx="3431880" cy="228600"/>
           </a:xfrm>
           <a:prstGeom prst="rect">
             <a:avLst/>
@@ -5437,7 +4877,7 @@
           <a:p>
             <a:pPr algn="l"/>
             <a:r>
-              <a:rPr sz="1500" b="0" i="0" lang="en-US" altLang="en-US">
+              <a:rPr sz="1300" b="0" i="0" lang="en-US" altLang="en-US">
                 <a:solidFill>
                   <a:srgbClr val="82909A"/>
                 </a:solidFill>
@@ -5445,21 +4885,21 @@
                 <a:ea typeface="Sarabun"/>
                 <a:cs typeface="Sarabun"/>
               </a:rPr>
-              <a:t>two</a:t>
-            </a:r>
-          </a:p>
-        </p:txBody>
-      </p:sp>
-      <p:sp>
-        <p:nvSpPr>
-          <p:cNvPr id="18" name="Rounded Rectangle 17"/>
+              <a:t>0 — zero</a:t>
+            </a:r>
+          </a:p>
+        </p:txBody>
+      </p:sp>
+      <p:sp>
+        <p:nvSpPr>
+          <p:cNvPr id="16" name="Rounded Rectangle 15"/>
           <p:cNvSpPr/>
           <p:nvPr/>
         </p:nvSpPr>
         <p:spPr>
           <a:xfrm>
-            <a:off x="731520" y="6592824"/>
-            <a:ext cx="3889080" cy="1572768"/>
+            <a:off x="731520" y="2130552"/>
+            <a:ext cx="3889080" cy="685800"/>
           </a:xfrm>
           <a:prstGeom prst="roundRect">
             <a:avLst>
@@ -5499,14 +4939,14 @@
       </p:sp>
       <p:sp>
         <p:nvSpPr>
-          <p:cNvPr id="19" name="Rectangle 18"/>
+          <p:cNvPr id="17" name="Rectangle 16"/>
           <p:cNvSpPr/>
           <p:nvPr/>
         </p:nvSpPr>
         <p:spPr>
           <a:xfrm>
-            <a:off x="868680" y="6793992"/>
-            <a:ext cx="73152" cy="1143000"/>
+            <a:off x="868680" y="2240280"/>
+            <a:ext cx="73152" cy="411480"/>
           </a:xfrm>
           <a:prstGeom prst="rect">
             <a:avLst/>
@@ -5542,14 +4982,14 @@
       </p:sp>
       <p:sp>
         <p:nvSpPr>
-          <p:cNvPr id="20" name="TextBox 19"/>
+          <p:cNvPr id="18" name="TextBox 17"/>
           <p:cNvSpPr txBox="1"/>
           <p:nvPr/>
         </p:nvSpPr>
         <p:spPr>
           <a:xfrm>
-            <a:off x="1078992" y="6702552"/>
-            <a:ext cx="3431880" cy="658368"/>
+            <a:off x="1078992" y="2203704"/>
+            <a:ext cx="3431880" cy="320040"/>
           </a:xfrm>
           <a:prstGeom prst="rect">
             <a:avLst/>
@@ -5564,18 +5004,18 @@
           <a:p>
             <a:pPr algn="l"/>
             <a:r>
-              <a:rPr sz="3200" b="1" i="0" lang="th-TH" altLang="en-US">
-                <a:solidFill>
-                  <a:srgbClr val="24333D"/>
-                </a:solidFill>
-                <a:latin typeface="Sarabun"/>
-                <a:ea typeface="Sarabun"/>
-                <a:cs typeface="Sarabun"/>
-              </a:rPr>
-              <a:t>สาม</a:t>
-            </a:r>
-            <a:r>
-              <a:rPr sz="1980" b="0" i="1" lang="en-US" altLang="en-US">
+              <a:rPr sz="2200" b="1" i="0" lang="th-TH" altLang="en-US">
+                <a:solidFill>
+                  <a:srgbClr val="24333D"/>
+                </a:solidFill>
+                <a:latin typeface="Sarabun"/>
+                <a:ea typeface="Sarabun"/>
+                <a:cs typeface="Sarabun"/>
+              </a:rPr>
+              <a:t>หนึ่ง</a:t>
+            </a:r>
+            <a:r>
+              <a:rPr sz="1500" b="0" i="1" lang="en-US" altLang="en-US">
                 <a:solidFill>
                   <a:srgbClr val="566873"/>
                 </a:solidFill>
@@ -5583,21 +5023,21 @@
                 <a:ea typeface="Sarabun"/>
                 <a:cs typeface="Sarabun"/>
               </a:rPr>
-              <a:t> (sǎam)</a:t>
-            </a:r>
-          </a:p>
-        </p:txBody>
-      </p:sp>
-      <p:sp>
-        <p:nvSpPr>
-          <p:cNvPr id="21" name="TextBox 20"/>
+              <a:t> (nùeng)</a:t>
+            </a:r>
+          </a:p>
+        </p:txBody>
+      </p:sp>
+      <p:sp>
+        <p:nvSpPr>
+          <p:cNvPr id="19" name="TextBox 18"/>
           <p:cNvSpPr txBox="1"/>
           <p:nvPr/>
         </p:nvSpPr>
         <p:spPr>
           <a:xfrm>
-            <a:off x="1078992" y="7470648"/>
-            <a:ext cx="3431880" cy="274320"/>
+            <a:off x="1078992" y="2514600"/>
+            <a:ext cx="3431880" cy="228600"/>
           </a:xfrm>
           <a:prstGeom prst="rect">
             <a:avLst/>
@@ -5612,7 +5052,7 @@
           <a:p>
             <a:pPr algn="l"/>
             <a:r>
-              <a:rPr sz="1500" b="0" i="0" lang="en-US" altLang="en-US">
+              <a:rPr sz="1300" b="0" i="0" lang="en-US" altLang="en-US">
                 <a:solidFill>
                   <a:srgbClr val="82909A"/>
                 </a:solidFill>
@@ -5620,21 +5060,21 @@
                 <a:ea typeface="Sarabun"/>
                 <a:cs typeface="Sarabun"/>
               </a:rPr>
-              <a:t>three</a:t>
-            </a:r>
-          </a:p>
-        </p:txBody>
-      </p:sp>
-      <p:sp>
-        <p:nvSpPr>
-          <p:cNvPr id="22" name="Rounded Rectangle 21"/>
+              <a:t>1 — one</a:t>
+            </a:r>
+          </a:p>
+        </p:txBody>
+      </p:sp>
+      <p:sp>
+        <p:nvSpPr>
+          <p:cNvPr id="20" name="Rounded Rectangle 19"/>
           <p:cNvSpPr/>
           <p:nvPr/>
         </p:nvSpPr>
         <p:spPr>
           <a:xfrm>
-            <a:off x="731520" y="8531352"/>
-            <a:ext cx="10058400" cy="1289304"/>
+            <a:off x="731520" y="2935224"/>
+            <a:ext cx="3889080" cy="685800"/>
           </a:xfrm>
           <a:prstGeom prst="roundRect">
             <a:avLst>
@@ -5674,14 +5114,57 @@
       </p:sp>
       <p:sp>
         <p:nvSpPr>
-          <p:cNvPr id="23" name="TextBox 22"/>
+          <p:cNvPr id="21" name="Rectangle 20"/>
+          <p:cNvSpPr/>
+          <p:nvPr/>
+        </p:nvSpPr>
+        <p:spPr>
+          <a:xfrm>
+            <a:off x="868680" y="3044952"/>
+            <a:ext cx="73152" cy="411480"/>
+          </a:xfrm>
+          <a:prstGeom prst="rect">
+            <a:avLst/>
+          </a:prstGeom>
+          <a:solidFill>
+            <a:srgbClr val="355C7D"/>
+          </a:solidFill>
+          <a:ln>
+            <a:noFill/>
+          </a:ln>
+        </p:spPr>
+        <p:style>
+          <a:lnRef idx="1">
+            <a:schemeClr val="accent1"/>
+          </a:lnRef>
+          <a:fillRef idx="3">
+            <a:schemeClr val="accent1"/>
+          </a:fillRef>
+          <a:effectRef idx="2">
+            <a:schemeClr val="accent1"/>
+          </a:effectRef>
+          <a:fontRef idx="minor">
+            <a:schemeClr val="lt1"/>
+          </a:fontRef>
+        </p:style>
+        <p:txBody>
+          <a:bodyPr rtlCol="0" anchor="ctr"/>
+          <a:lstStyle/>
+          <a:p>
+            <a:pPr algn="ctr"/>
+          </a:p>
+        </p:txBody>
+      </p:sp>
+      <p:sp>
+        <p:nvSpPr>
+          <p:cNvPr id="22" name="TextBox 21"/>
           <p:cNvSpPr txBox="1"/>
           <p:nvPr/>
         </p:nvSpPr>
         <p:spPr>
           <a:xfrm>
-            <a:off x="932688" y="8677656"/>
-            <a:ext cx="9692640" cy="228600"/>
+            <a:off x="1078992" y="3008376"/>
+            <a:ext cx="3431880" cy="320040"/>
           </a:xfrm>
           <a:prstGeom prst="rect">
             <a:avLst/>
@@ -5696,6 +5179,663 @@
           <a:p>
             <a:pPr algn="l"/>
             <a:r>
+              <a:rPr sz="2200" b="1" i="0" lang="th-TH" altLang="en-US">
+                <a:solidFill>
+                  <a:srgbClr val="24333D"/>
+                </a:solidFill>
+                <a:latin typeface="Sarabun"/>
+                <a:ea typeface="Sarabun"/>
+                <a:cs typeface="Sarabun"/>
+              </a:rPr>
+              <a:t>สอง</a:t>
+            </a:r>
+            <a:r>
+              <a:rPr sz="1500" b="0" i="1" lang="en-US" altLang="en-US">
+                <a:solidFill>
+                  <a:srgbClr val="566873"/>
+                </a:solidFill>
+                <a:latin typeface="Sarabun"/>
+                <a:ea typeface="Sarabun"/>
+                <a:cs typeface="Sarabun"/>
+              </a:rPr>
+              <a:t> (sǎawng)</a:t>
+            </a:r>
+          </a:p>
+        </p:txBody>
+      </p:sp>
+      <p:sp>
+        <p:nvSpPr>
+          <p:cNvPr id="23" name="TextBox 22"/>
+          <p:cNvSpPr txBox="1"/>
+          <p:nvPr/>
+        </p:nvSpPr>
+        <p:spPr>
+          <a:xfrm>
+            <a:off x="1078992" y="3319272"/>
+            <a:ext cx="3431880" cy="228600"/>
+          </a:xfrm>
+          <a:prstGeom prst="rect">
+            <a:avLst/>
+          </a:prstGeom>
+          <a:noFill/>
+        </p:spPr>
+        <p:txBody>
+          <a:bodyPr wrap="square" anchor="t">
+            <a:spAutoFit/>
+          </a:bodyPr>
+          <a:lstStyle/>
+          <a:p>
+            <a:pPr algn="l"/>
+            <a:r>
+              <a:rPr sz="1300" b="0" i="0" lang="en-US" altLang="en-US">
+                <a:solidFill>
+                  <a:srgbClr val="82909A"/>
+                </a:solidFill>
+                <a:latin typeface="Sarabun"/>
+                <a:ea typeface="Sarabun"/>
+                <a:cs typeface="Sarabun"/>
+              </a:rPr>
+              <a:t>2 — two</a:t>
+            </a:r>
+          </a:p>
+        </p:txBody>
+      </p:sp>
+      <p:sp>
+        <p:nvSpPr>
+          <p:cNvPr id="24" name="Rounded Rectangle 23"/>
+          <p:cNvSpPr/>
+          <p:nvPr/>
+        </p:nvSpPr>
+        <p:spPr>
+          <a:xfrm>
+            <a:off x="731520" y="3739896"/>
+            <a:ext cx="3889080" cy="685800"/>
+          </a:xfrm>
+          <a:prstGeom prst="roundRect">
+            <a:avLst>
+              <a:gd name="adj" fmla="val 6000"/>
+            </a:avLst>
+          </a:prstGeom>
+          <a:solidFill>
+            <a:srgbClr val="FFFFFF"/>
+          </a:solidFill>
+          <a:ln>
+            <a:solidFill>
+              <a:srgbClr val="D7DEE3"/>
+            </a:solidFill>
+          </a:ln>
+        </p:spPr>
+        <p:style>
+          <a:lnRef idx="1">
+            <a:schemeClr val="accent1"/>
+          </a:lnRef>
+          <a:fillRef idx="3">
+            <a:schemeClr val="accent1"/>
+          </a:fillRef>
+          <a:effectRef idx="2">
+            <a:schemeClr val="accent1"/>
+          </a:effectRef>
+          <a:fontRef idx="minor">
+            <a:schemeClr val="lt1"/>
+          </a:fontRef>
+        </p:style>
+        <p:txBody>
+          <a:bodyPr rtlCol="0" anchor="ctr"/>
+          <a:lstStyle/>
+          <a:p>
+            <a:pPr algn="ctr"/>
+          </a:p>
+        </p:txBody>
+      </p:sp>
+      <p:sp>
+        <p:nvSpPr>
+          <p:cNvPr id="25" name="Rectangle 24"/>
+          <p:cNvSpPr/>
+          <p:nvPr/>
+        </p:nvSpPr>
+        <p:spPr>
+          <a:xfrm>
+            <a:off x="868680" y="3849624"/>
+            <a:ext cx="73152" cy="411480"/>
+          </a:xfrm>
+          <a:prstGeom prst="rect">
+            <a:avLst/>
+          </a:prstGeom>
+          <a:solidFill>
+            <a:srgbClr val="355C7D"/>
+          </a:solidFill>
+          <a:ln>
+            <a:noFill/>
+          </a:ln>
+        </p:spPr>
+        <p:style>
+          <a:lnRef idx="1">
+            <a:schemeClr val="accent1"/>
+          </a:lnRef>
+          <a:fillRef idx="3">
+            <a:schemeClr val="accent1"/>
+          </a:fillRef>
+          <a:effectRef idx="2">
+            <a:schemeClr val="accent1"/>
+          </a:effectRef>
+          <a:fontRef idx="minor">
+            <a:schemeClr val="lt1"/>
+          </a:fontRef>
+        </p:style>
+        <p:txBody>
+          <a:bodyPr rtlCol="0" anchor="ctr"/>
+          <a:lstStyle/>
+          <a:p>
+            <a:pPr algn="ctr"/>
+          </a:p>
+        </p:txBody>
+      </p:sp>
+      <p:sp>
+        <p:nvSpPr>
+          <p:cNvPr id="26" name="TextBox 25"/>
+          <p:cNvSpPr txBox="1"/>
+          <p:nvPr/>
+        </p:nvSpPr>
+        <p:spPr>
+          <a:xfrm>
+            <a:off x="1078992" y="3813048"/>
+            <a:ext cx="3431880" cy="320040"/>
+          </a:xfrm>
+          <a:prstGeom prst="rect">
+            <a:avLst/>
+          </a:prstGeom>
+          <a:noFill/>
+        </p:spPr>
+        <p:txBody>
+          <a:bodyPr wrap="square" anchor="t">
+            <a:spAutoFit/>
+          </a:bodyPr>
+          <a:lstStyle/>
+          <a:p>
+            <a:pPr algn="l"/>
+            <a:r>
+              <a:rPr sz="2200" b="1" i="0" lang="th-TH" altLang="en-US">
+                <a:solidFill>
+                  <a:srgbClr val="24333D"/>
+                </a:solidFill>
+                <a:latin typeface="Sarabun"/>
+                <a:ea typeface="Sarabun"/>
+                <a:cs typeface="Sarabun"/>
+              </a:rPr>
+              <a:t>สาม</a:t>
+            </a:r>
+            <a:r>
+              <a:rPr sz="1500" b="0" i="1" lang="en-US" altLang="en-US">
+                <a:solidFill>
+                  <a:srgbClr val="566873"/>
+                </a:solidFill>
+                <a:latin typeface="Sarabun"/>
+                <a:ea typeface="Sarabun"/>
+                <a:cs typeface="Sarabun"/>
+              </a:rPr>
+              <a:t> (sǎam)</a:t>
+            </a:r>
+          </a:p>
+        </p:txBody>
+      </p:sp>
+      <p:sp>
+        <p:nvSpPr>
+          <p:cNvPr id="27" name="TextBox 26"/>
+          <p:cNvSpPr txBox="1"/>
+          <p:nvPr/>
+        </p:nvSpPr>
+        <p:spPr>
+          <a:xfrm>
+            <a:off x="1078992" y="4123944"/>
+            <a:ext cx="3431880" cy="228600"/>
+          </a:xfrm>
+          <a:prstGeom prst="rect">
+            <a:avLst/>
+          </a:prstGeom>
+          <a:noFill/>
+        </p:spPr>
+        <p:txBody>
+          <a:bodyPr wrap="square" anchor="t">
+            <a:spAutoFit/>
+          </a:bodyPr>
+          <a:lstStyle/>
+          <a:p>
+            <a:pPr algn="l"/>
+            <a:r>
+              <a:rPr sz="1300" b="0" i="0" lang="en-US" altLang="en-US">
+                <a:solidFill>
+                  <a:srgbClr val="82909A"/>
+                </a:solidFill>
+                <a:latin typeface="Sarabun"/>
+                <a:ea typeface="Sarabun"/>
+                <a:cs typeface="Sarabun"/>
+              </a:rPr>
+              <a:t>3 — three</a:t>
+            </a:r>
+          </a:p>
+        </p:txBody>
+      </p:sp>
+      <p:sp>
+        <p:nvSpPr>
+          <p:cNvPr id="28" name="Rounded Rectangle 27"/>
+          <p:cNvSpPr/>
+          <p:nvPr/>
+        </p:nvSpPr>
+        <p:spPr>
+          <a:xfrm>
+            <a:off x="731520" y="4544568"/>
+            <a:ext cx="3889080" cy="685800"/>
+          </a:xfrm>
+          <a:prstGeom prst="roundRect">
+            <a:avLst>
+              <a:gd name="adj" fmla="val 6000"/>
+            </a:avLst>
+          </a:prstGeom>
+          <a:solidFill>
+            <a:srgbClr val="FFFFFF"/>
+          </a:solidFill>
+          <a:ln>
+            <a:solidFill>
+              <a:srgbClr val="D7DEE3"/>
+            </a:solidFill>
+          </a:ln>
+        </p:spPr>
+        <p:style>
+          <a:lnRef idx="1">
+            <a:schemeClr val="accent1"/>
+          </a:lnRef>
+          <a:fillRef idx="3">
+            <a:schemeClr val="accent1"/>
+          </a:fillRef>
+          <a:effectRef idx="2">
+            <a:schemeClr val="accent1"/>
+          </a:effectRef>
+          <a:fontRef idx="minor">
+            <a:schemeClr val="lt1"/>
+          </a:fontRef>
+        </p:style>
+        <p:txBody>
+          <a:bodyPr rtlCol="0" anchor="ctr"/>
+          <a:lstStyle/>
+          <a:p>
+            <a:pPr algn="ctr"/>
+          </a:p>
+        </p:txBody>
+      </p:sp>
+      <p:sp>
+        <p:nvSpPr>
+          <p:cNvPr id="29" name="Rectangle 28"/>
+          <p:cNvSpPr/>
+          <p:nvPr/>
+        </p:nvSpPr>
+        <p:spPr>
+          <a:xfrm>
+            <a:off x="868680" y="4654296"/>
+            <a:ext cx="73152" cy="411480"/>
+          </a:xfrm>
+          <a:prstGeom prst="rect">
+            <a:avLst/>
+          </a:prstGeom>
+          <a:solidFill>
+            <a:srgbClr val="355C7D"/>
+          </a:solidFill>
+          <a:ln>
+            <a:noFill/>
+          </a:ln>
+        </p:spPr>
+        <p:style>
+          <a:lnRef idx="1">
+            <a:schemeClr val="accent1"/>
+          </a:lnRef>
+          <a:fillRef idx="3">
+            <a:schemeClr val="accent1"/>
+          </a:fillRef>
+          <a:effectRef idx="2">
+            <a:schemeClr val="accent1"/>
+          </a:effectRef>
+          <a:fontRef idx="minor">
+            <a:schemeClr val="lt1"/>
+          </a:fontRef>
+        </p:style>
+        <p:txBody>
+          <a:bodyPr rtlCol="0" anchor="ctr"/>
+          <a:lstStyle/>
+          <a:p>
+            <a:pPr algn="ctr"/>
+          </a:p>
+        </p:txBody>
+      </p:sp>
+      <p:sp>
+        <p:nvSpPr>
+          <p:cNvPr id="30" name="TextBox 29"/>
+          <p:cNvSpPr txBox="1"/>
+          <p:nvPr/>
+        </p:nvSpPr>
+        <p:spPr>
+          <a:xfrm>
+            <a:off x="1078992" y="4617720"/>
+            <a:ext cx="3431880" cy="320040"/>
+          </a:xfrm>
+          <a:prstGeom prst="rect">
+            <a:avLst/>
+          </a:prstGeom>
+          <a:noFill/>
+        </p:spPr>
+        <p:txBody>
+          <a:bodyPr wrap="square" anchor="t">
+            <a:spAutoFit/>
+          </a:bodyPr>
+          <a:lstStyle/>
+          <a:p>
+            <a:pPr algn="l"/>
+            <a:r>
+              <a:rPr sz="2200" b="1" i="0" lang="th-TH" altLang="en-US">
+                <a:solidFill>
+                  <a:srgbClr val="24333D"/>
+                </a:solidFill>
+                <a:latin typeface="Sarabun"/>
+                <a:ea typeface="Sarabun"/>
+                <a:cs typeface="Sarabun"/>
+              </a:rPr>
+              <a:t>สี่</a:t>
+            </a:r>
+            <a:r>
+              <a:rPr sz="1500" b="0" i="1" lang="en-US" altLang="en-US">
+                <a:solidFill>
+                  <a:srgbClr val="566873"/>
+                </a:solidFill>
+                <a:latin typeface="Sarabun"/>
+                <a:ea typeface="Sarabun"/>
+                <a:cs typeface="Sarabun"/>
+              </a:rPr>
+              <a:t> (sìi)</a:t>
+            </a:r>
+          </a:p>
+        </p:txBody>
+      </p:sp>
+      <p:sp>
+        <p:nvSpPr>
+          <p:cNvPr id="31" name="TextBox 30"/>
+          <p:cNvSpPr txBox="1"/>
+          <p:nvPr/>
+        </p:nvSpPr>
+        <p:spPr>
+          <a:xfrm>
+            <a:off x="1078992" y="4928616"/>
+            <a:ext cx="3431880" cy="228600"/>
+          </a:xfrm>
+          <a:prstGeom prst="rect">
+            <a:avLst/>
+          </a:prstGeom>
+          <a:noFill/>
+        </p:spPr>
+        <p:txBody>
+          <a:bodyPr wrap="square" anchor="t">
+            <a:spAutoFit/>
+          </a:bodyPr>
+          <a:lstStyle/>
+          <a:p>
+            <a:pPr algn="l"/>
+            <a:r>
+              <a:rPr sz="1300" b="0" i="0" lang="en-US" altLang="en-US">
+                <a:solidFill>
+                  <a:srgbClr val="82909A"/>
+                </a:solidFill>
+                <a:latin typeface="Sarabun"/>
+                <a:ea typeface="Sarabun"/>
+                <a:cs typeface="Sarabun"/>
+              </a:rPr>
+              <a:t>4 — four</a:t>
+            </a:r>
+          </a:p>
+        </p:txBody>
+      </p:sp>
+      <p:sp>
+        <p:nvSpPr>
+          <p:cNvPr id="32" name="Rounded Rectangle 31"/>
+          <p:cNvSpPr/>
+          <p:nvPr/>
+        </p:nvSpPr>
+        <p:spPr>
+          <a:xfrm>
+            <a:off x="731520" y="5349240"/>
+            <a:ext cx="3889080" cy="685800"/>
+          </a:xfrm>
+          <a:prstGeom prst="roundRect">
+            <a:avLst>
+              <a:gd name="adj" fmla="val 6000"/>
+            </a:avLst>
+          </a:prstGeom>
+          <a:solidFill>
+            <a:srgbClr val="FFFFFF"/>
+          </a:solidFill>
+          <a:ln>
+            <a:solidFill>
+              <a:srgbClr val="D7DEE3"/>
+            </a:solidFill>
+          </a:ln>
+        </p:spPr>
+        <p:style>
+          <a:lnRef idx="1">
+            <a:schemeClr val="accent1"/>
+          </a:lnRef>
+          <a:fillRef idx="3">
+            <a:schemeClr val="accent1"/>
+          </a:fillRef>
+          <a:effectRef idx="2">
+            <a:schemeClr val="accent1"/>
+          </a:effectRef>
+          <a:fontRef idx="minor">
+            <a:schemeClr val="lt1"/>
+          </a:fontRef>
+        </p:style>
+        <p:txBody>
+          <a:bodyPr rtlCol="0" anchor="ctr"/>
+          <a:lstStyle/>
+          <a:p>
+            <a:pPr algn="ctr"/>
+          </a:p>
+        </p:txBody>
+      </p:sp>
+      <p:sp>
+        <p:nvSpPr>
+          <p:cNvPr id="33" name="Rectangle 32"/>
+          <p:cNvSpPr/>
+          <p:nvPr/>
+        </p:nvSpPr>
+        <p:spPr>
+          <a:xfrm>
+            <a:off x="868680" y="5458968"/>
+            <a:ext cx="73152" cy="411480"/>
+          </a:xfrm>
+          <a:prstGeom prst="rect">
+            <a:avLst/>
+          </a:prstGeom>
+          <a:solidFill>
+            <a:srgbClr val="355C7D"/>
+          </a:solidFill>
+          <a:ln>
+            <a:noFill/>
+          </a:ln>
+        </p:spPr>
+        <p:style>
+          <a:lnRef idx="1">
+            <a:schemeClr val="accent1"/>
+          </a:lnRef>
+          <a:fillRef idx="3">
+            <a:schemeClr val="accent1"/>
+          </a:fillRef>
+          <a:effectRef idx="2">
+            <a:schemeClr val="accent1"/>
+          </a:effectRef>
+          <a:fontRef idx="minor">
+            <a:schemeClr val="lt1"/>
+          </a:fontRef>
+        </p:style>
+        <p:txBody>
+          <a:bodyPr rtlCol="0" anchor="ctr"/>
+          <a:lstStyle/>
+          <a:p>
+            <a:pPr algn="ctr"/>
+          </a:p>
+        </p:txBody>
+      </p:sp>
+      <p:sp>
+        <p:nvSpPr>
+          <p:cNvPr id="34" name="TextBox 33"/>
+          <p:cNvSpPr txBox="1"/>
+          <p:nvPr/>
+        </p:nvSpPr>
+        <p:spPr>
+          <a:xfrm>
+            <a:off x="1078992" y="5422392"/>
+            <a:ext cx="3431880" cy="320040"/>
+          </a:xfrm>
+          <a:prstGeom prst="rect">
+            <a:avLst/>
+          </a:prstGeom>
+          <a:noFill/>
+        </p:spPr>
+        <p:txBody>
+          <a:bodyPr wrap="square" anchor="t">
+            <a:spAutoFit/>
+          </a:bodyPr>
+          <a:lstStyle/>
+          <a:p>
+            <a:pPr algn="l"/>
+            <a:r>
+              <a:rPr sz="2200" b="1" i="0" lang="th-TH" altLang="en-US">
+                <a:solidFill>
+                  <a:srgbClr val="24333D"/>
+                </a:solidFill>
+                <a:latin typeface="Sarabun"/>
+                <a:ea typeface="Sarabun"/>
+                <a:cs typeface="Sarabun"/>
+              </a:rPr>
+              <a:t>ห้า</a:t>
+            </a:r>
+            <a:r>
+              <a:rPr sz="1500" b="0" i="1" lang="en-US" altLang="en-US">
+                <a:solidFill>
+                  <a:srgbClr val="566873"/>
+                </a:solidFill>
+                <a:latin typeface="Sarabun"/>
+                <a:ea typeface="Sarabun"/>
+                <a:cs typeface="Sarabun"/>
+              </a:rPr>
+              <a:t> (hâa)</a:t>
+            </a:r>
+          </a:p>
+        </p:txBody>
+      </p:sp>
+      <p:sp>
+        <p:nvSpPr>
+          <p:cNvPr id="35" name="TextBox 34"/>
+          <p:cNvSpPr txBox="1"/>
+          <p:nvPr/>
+        </p:nvSpPr>
+        <p:spPr>
+          <a:xfrm>
+            <a:off x="1078992" y="5733288"/>
+            <a:ext cx="3431880" cy="228600"/>
+          </a:xfrm>
+          <a:prstGeom prst="rect">
+            <a:avLst/>
+          </a:prstGeom>
+          <a:noFill/>
+        </p:spPr>
+        <p:txBody>
+          <a:bodyPr wrap="square" anchor="t">
+            <a:spAutoFit/>
+          </a:bodyPr>
+          <a:lstStyle/>
+          <a:p>
+            <a:pPr algn="l"/>
+            <a:r>
+              <a:rPr sz="1300" b="0" i="0" lang="en-US" altLang="en-US">
+                <a:solidFill>
+                  <a:srgbClr val="82909A"/>
+                </a:solidFill>
+                <a:latin typeface="Sarabun"/>
+                <a:ea typeface="Sarabun"/>
+                <a:cs typeface="Sarabun"/>
+              </a:rPr>
+              <a:t>5 — five</a:t>
+            </a:r>
+          </a:p>
+        </p:txBody>
+      </p:sp>
+      <p:sp>
+        <p:nvSpPr>
+          <p:cNvPr id="36" name="Rounded Rectangle 35"/>
+          <p:cNvSpPr/>
+          <p:nvPr/>
+        </p:nvSpPr>
+        <p:spPr>
+          <a:xfrm>
+            <a:off x="731520" y="6336792"/>
+            <a:ext cx="10058400" cy="1636776"/>
+          </a:xfrm>
+          <a:prstGeom prst="roundRect">
+            <a:avLst>
+              <a:gd name="adj" fmla="val 6000"/>
+            </a:avLst>
+          </a:prstGeom>
+          <a:solidFill>
+            <a:srgbClr val="FFFFFF"/>
+          </a:solidFill>
+          <a:ln>
+            <a:solidFill>
+              <a:srgbClr val="D7DEE3"/>
+            </a:solidFill>
+          </a:ln>
+        </p:spPr>
+        <p:style>
+          <a:lnRef idx="1">
+            <a:schemeClr val="accent1"/>
+          </a:lnRef>
+          <a:fillRef idx="3">
+            <a:schemeClr val="accent1"/>
+          </a:fillRef>
+          <a:effectRef idx="2">
+            <a:schemeClr val="accent1"/>
+          </a:effectRef>
+          <a:fontRef idx="minor">
+            <a:schemeClr val="lt1"/>
+          </a:fontRef>
+        </p:style>
+        <p:txBody>
+          <a:bodyPr rtlCol="0" anchor="ctr"/>
+          <a:lstStyle/>
+          <a:p>
+            <a:pPr algn="ctr"/>
+          </a:p>
+        </p:txBody>
+      </p:sp>
+      <p:sp>
+        <p:nvSpPr>
+          <p:cNvPr id="37" name="TextBox 36"/>
+          <p:cNvSpPr txBox="1"/>
+          <p:nvPr/>
+        </p:nvSpPr>
+        <p:spPr>
+          <a:xfrm>
+            <a:off x="932688" y="6483096"/>
+            <a:ext cx="9692640" cy="228600"/>
+          </a:xfrm>
+          <a:prstGeom prst="rect">
+            <a:avLst/>
+          </a:prstGeom>
+          <a:noFill/>
+        </p:spPr>
+        <p:txBody>
+          <a:bodyPr wrap="square" anchor="t">
+            <a:spAutoFit/>
+          </a:bodyPr>
+          <a:lstStyle/>
+          <a:p>
+            <a:pPr algn="l"/>
+            <a:r>
               <a:rPr sz="1500" b="1" i="0" lang="en-US" altLang="en-US">
                 <a:solidFill>
                   <a:srgbClr val="C96F4A"/>
@@ -5711,13 +5851,13 @@
       </p:sp>
       <p:sp>
         <p:nvSpPr>
-          <p:cNvPr id="24" name="Oval 23"/>
+          <p:cNvPr id="38" name="Oval 37"/>
           <p:cNvSpPr/>
           <p:nvPr/>
         </p:nvSpPr>
         <p:spPr>
           <a:xfrm>
-            <a:off x="932688" y="9061704"/>
+            <a:off x="932688" y="6867144"/>
             <a:ext cx="82296" cy="82296"/>
           </a:xfrm>
           <a:prstGeom prst="ellipse">
@@ -5754,13 +5894,13 @@
       </p:sp>
       <p:sp>
         <p:nvSpPr>
-          <p:cNvPr id="25" name="TextBox 24"/>
+          <p:cNvPr id="39" name="TextBox 38"/>
           <p:cNvSpPr txBox="1"/>
           <p:nvPr/>
         </p:nvSpPr>
         <p:spPr>
           <a:xfrm>
-            <a:off x="1078992" y="8970264"/>
+            <a:off x="1078992" y="6775704"/>
             <a:ext cx="9555480" cy="274320"/>
           </a:xfrm>
           <a:prstGeom prst="rect">
@@ -5784,7 +5924,7 @@
                 <a:ea typeface="Sarabun"/>
                 <a:cs typeface="Sarabun"/>
               </a:rPr>
-              <a:t>Listen and repeat three times: </a:t>
+              <a:t>Listen and repeat: </a:t>
             </a:r>
             <a:r>
               <a:rPr sz="1500" b="0" i="0" lang="th-TH" altLang="en-US">
@@ -5817,7 +5957,7 @@
                 <a:ea typeface="Sarabun"/>
                 <a:cs typeface="Sarabun"/>
               </a:rPr>
-              <a:t>-</a:t>
+              <a:t>, </a:t>
             </a:r>
             <a:r>
               <a:rPr sz="1500" b="0" i="0" lang="th-TH" altLang="en-US">
@@ -5850,7 +5990,7 @@
                 <a:ea typeface="Sarabun"/>
                 <a:cs typeface="Sarabun"/>
               </a:rPr>
-              <a:t>-</a:t>
+              <a:t>, </a:t>
             </a:r>
             <a:r>
               <a:rPr sz="1500" b="0" i="0" lang="th-TH" altLang="en-US">
@@ -5883,7 +6023,7 @@
                 <a:ea typeface="Sarabun"/>
                 <a:cs typeface="Sarabun"/>
               </a:rPr>
-              <a:t>-</a:t>
+              <a:t>, </a:t>
             </a:r>
             <a:r>
               <a:rPr sz="1500" b="0" i="0" lang="th-TH" altLang="en-US">
@@ -5916,7 +6056,7 @@
                 <a:ea typeface="Sarabun"/>
                 <a:cs typeface="Sarabun"/>
               </a:rPr>
-              <a:t>-</a:t>
+              <a:t>, </a:t>
             </a:r>
             <a:r>
               <a:rPr sz="1500" b="0" i="0" lang="th-TH" altLang="en-US">
@@ -5949,7 +6089,7 @@
                 <a:ea typeface="Sarabun"/>
                 <a:cs typeface="Sarabun"/>
               </a:rPr>
-              <a:t>-</a:t>
+              <a:t>, </a:t>
             </a:r>
             <a:r>
               <a:rPr sz="1500" b="0" i="0" lang="th-TH" altLang="en-US">
@@ -5982,218 +6122,20 @@
                 <a:ea typeface="Sarabun"/>
                 <a:cs typeface="Sarabun"/>
               </a:rPr>
-              <a:t>. Then say the same line backwards: </a:t>
-            </a:r>
-            <a:r>
-              <a:rPr sz="1500" b="0" i="0" lang="th-TH" altLang="en-US">
-                <a:solidFill>
-                  <a:srgbClr val="24333D"/>
-                </a:solidFill>
-                <a:latin typeface="Sarabun"/>
-                <a:ea typeface="Sarabun"/>
-                <a:cs typeface="Sarabun"/>
-              </a:rPr>
-              <a:t>ห้า</a:t>
-            </a:r>
-            <a:r>
-              <a:rPr sz="1500" b="0" i="1" lang="en-US" altLang="en-US">
-                <a:solidFill>
-                  <a:srgbClr val="566873"/>
-                </a:solidFill>
-                <a:latin typeface="Sarabun"/>
-                <a:ea typeface="Sarabun"/>
-                <a:cs typeface="Sarabun"/>
-              </a:rPr>
-              <a:t> (hâa)</a:t>
-            </a:r>
-            <a:r>
-              <a:rPr sz="1500" b="0" i="0" lang="en-US" altLang="en-US">
-                <a:solidFill>
-                  <a:srgbClr val="24333D"/>
-                </a:solidFill>
-                <a:latin typeface="Sarabun"/>
-                <a:ea typeface="Sarabun"/>
-                <a:cs typeface="Sarabun"/>
-              </a:rPr>
-              <a:t>-</a:t>
-            </a:r>
-            <a:r>
-              <a:rPr sz="1500" b="0" i="0" lang="th-TH" altLang="en-US">
-                <a:solidFill>
-                  <a:srgbClr val="24333D"/>
-                </a:solidFill>
-                <a:latin typeface="Sarabun"/>
-                <a:ea typeface="Sarabun"/>
-                <a:cs typeface="Sarabun"/>
-              </a:rPr>
-              <a:t>สี่</a:t>
-            </a:r>
-            <a:r>
-              <a:rPr sz="1500" b="0" i="1" lang="en-US" altLang="en-US">
-                <a:solidFill>
-                  <a:srgbClr val="566873"/>
-                </a:solidFill>
-                <a:latin typeface="Sarabun"/>
-                <a:ea typeface="Sarabun"/>
-                <a:cs typeface="Sarabun"/>
-              </a:rPr>
-              <a:t> (sìi)</a:t>
-            </a:r>
-            <a:r>
-              <a:rPr sz="1500" b="0" i="0" lang="en-US" altLang="en-US">
-                <a:solidFill>
-                  <a:srgbClr val="24333D"/>
-                </a:solidFill>
-                <a:latin typeface="Sarabun"/>
-                <a:ea typeface="Sarabun"/>
-                <a:cs typeface="Sarabun"/>
-              </a:rPr>
-              <a:t>-</a:t>
-            </a:r>
-            <a:r>
-              <a:rPr sz="1500" b="0" i="0" lang="th-TH" altLang="en-US">
-                <a:solidFill>
-                  <a:srgbClr val="24333D"/>
-                </a:solidFill>
-                <a:latin typeface="Sarabun"/>
-                <a:ea typeface="Sarabun"/>
-                <a:cs typeface="Sarabun"/>
-              </a:rPr>
-              <a:t>สาม</a:t>
-            </a:r>
-            <a:r>
-              <a:rPr sz="1500" b="0" i="1" lang="en-US" altLang="en-US">
-                <a:solidFill>
-                  <a:srgbClr val="566873"/>
-                </a:solidFill>
-                <a:latin typeface="Sarabun"/>
-                <a:ea typeface="Sarabun"/>
-                <a:cs typeface="Sarabun"/>
-              </a:rPr>
-              <a:t> (sǎam)</a:t>
-            </a:r>
-            <a:r>
-              <a:rPr sz="1500" b="0" i="0" lang="en-US" altLang="en-US">
-                <a:solidFill>
-                  <a:srgbClr val="24333D"/>
-                </a:solidFill>
-                <a:latin typeface="Sarabun"/>
-                <a:ea typeface="Sarabun"/>
-                <a:cs typeface="Sarabun"/>
-              </a:rPr>
-              <a:t>-</a:t>
-            </a:r>
-            <a:r>
-              <a:rPr sz="1500" b="0" i="0" lang="th-TH" altLang="en-US">
-                <a:solidFill>
-                  <a:srgbClr val="24333D"/>
-                </a:solidFill>
-                <a:latin typeface="Sarabun"/>
-                <a:ea typeface="Sarabun"/>
-                <a:cs typeface="Sarabun"/>
-              </a:rPr>
-              <a:t>สอง</a:t>
-            </a:r>
-            <a:r>
-              <a:rPr sz="1500" b="0" i="1" lang="en-US" altLang="en-US">
-                <a:solidFill>
-                  <a:srgbClr val="566873"/>
-                </a:solidFill>
-                <a:latin typeface="Sarabun"/>
-                <a:ea typeface="Sarabun"/>
-                <a:cs typeface="Sarabun"/>
-              </a:rPr>
-              <a:t> (sǎawng)</a:t>
-            </a:r>
-            <a:r>
-              <a:rPr sz="1500" b="0" i="0" lang="en-US" altLang="en-US">
-                <a:solidFill>
-                  <a:srgbClr val="24333D"/>
-                </a:solidFill>
-                <a:latin typeface="Sarabun"/>
-                <a:ea typeface="Sarabun"/>
-                <a:cs typeface="Sarabun"/>
-              </a:rPr>
-              <a:t>-</a:t>
-            </a:r>
-            <a:r>
-              <a:rPr sz="1500" b="0" i="0" lang="th-TH" altLang="en-US">
-                <a:solidFill>
-                  <a:srgbClr val="24333D"/>
-                </a:solidFill>
-                <a:latin typeface="Sarabun"/>
-                <a:ea typeface="Sarabun"/>
-                <a:cs typeface="Sarabun"/>
-              </a:rPr>
-              <a:t>หนึ่ง</a:t>
-            </a:r>
-            <a:r>
-              <a:rPr sz="1500" b="0" i="1" lang="en-US" altLang="en-US">
-                <a:solidFill>
-                  <a:srgbClr val="566873"/>
-                </a:solidFill>
-                <a:latin typeface="Sarabun"/>
-                <a:ea typeface="Sarabun"/>
-                <a:cs typeface="Sarabun"/>
-              </a:rPr>
-              <a:t> (nùeng)</a:t>
-            </a:r>
-            <a:r>
-              <a:rPr sz="1500" b="0" i="0" lang="en-US" altLang="en-US">
-                <a:solidFill>
-                  <a:srgbClr val="24333D"/>
-                </a:solidFill>
-                <a:latin typeface="Sarabun"/>
-                <a:ea typeface="Sarabun"/>
-                <a:cs typeface="Sarabun"/>
-              </a:rPr>
-              <a:t>-</a:t>
-            </a:r>
-            <a:r>
-              <a:rPr sz="1500" b="0" i="0" lang="th-TH" altLang="en-US">
-                <a:solidFill>
-                  <a:srgbClr val="24333D"/>
-                </a:solidFill>
-                <a:latin typeface="Sarabun"/>
-                <a:ea typeface="Sarabun"/>
-                <a:cs typeface="Sarabun"/>
-              </a:rPr>
-              <a:t>ศูนย์</a:t>
-            </a:r>
-            <a:r>
-              <a:rPr sz="1500" b="0" i="1" lang="en-US" altLang="en-US">
-                <a:solidFill>
-                  <a:srgbClr val="566873"/>
-                </a:solidFill>
-                <a:latin typeface="Sarabun"/>
-                <a:ea typeface="Sarabun"/>
-                <a:cs typeface="Sarabun"/>
-              </a:rPr>
-              <a:t> (sǔun)</a:t>
-            </a:r>
-            <a:r>
-              <a:rPr sz="1500" b="0" i="0" lang="en-US" altLang="en-US">
-                <a:solidFill>
-                  <a:srgbClr val="24333D"/>
-                </a:solidFill>
-                <a:latin typeface="Sarabun"/>
-                <a:ea typeface="Sarabun"/>
-                <a:cs typeface="Sarabun"/>
-              </a:rPr>
-              <a:t>.</a:t>
-            </a:r>
-          </a:p>
-        </p:txBody>
-      </p:sp>
-      <p:sp>
-        <p:nvSpPr>
-          <p:cNvPr id="26" name="Oval 25"/>
+              <a:t>. Now backwards.</a:t>
+            </a:r>
+          </a:p>
+        </p:txBody>
+      </p:sp>
+      <p:sp>
+        <p:nvSpPr>
+          <p:cNvPr id="40" name="Oval 39"/>
           <p:cNvSpPr/>
           <p:nvPr/>
         </p:nvSpPr>
         <p:spPr>
           <a:xfrm>
-            <a:off x="932688" y="9372600"/>
+            <a:off x="932688" y="7178040"/>
             <a:ext cx="82296" cy="82296"/>
           </a:xfrm>
           <a:prstGeom prst="ellipse">
@@ -6230,13 +6172,13 @@
       </p:sp>
       <p:sp>
         <p:nvSpPr>
-          <p:cNvPr id="27" name="TextBox 26"/>
+          <p:cNvPr id="41" name="TextBox 40"/>
           <p:cNvSpPr txBox="1"/>
           <p:nvPr/>
         </p:nvSpPr>
         <p:spPr>
           <a:xfrm>
-            <a:off x="1078992" y="9281160"/>
+            <a:off x="1078992" y="7086600"/>
             <a:ext cx="9555480" cy="274320"/>
           </a:xfrm>
           <a:prstGeom prst="rect">
@@ -6260,7 +6202,285 @@
                 <a:ea typeface="Sarabun"/>
                 <a:cs typeface="Sarabun"/>
               </a:rPr>
-              <a:t>Your turn: I say a digit in English. You say the Thai word aloud before I show the answer. Ready? Two. Four. Zero. Five. One. Three.</a:t>
+              <a:t>Pause-and-produce: I say a number in English. Say the Thai before I show it. Two. Four. Zero. Five.</a:t>
+            </a:r>
+          </a:p>
+        </p:txBody>
+      </p:sp>
+      <p:sp>
+        <p:nvSpPr>
+          <p:cNvPr id="42" name="Oval 41"/>
+          <p:cNvSpPr/>
+          <p:nvPr/>
+        </p:nvSpPr>
+        <p:spPr>
+          <a:xfrm>
+            <a:off x="932688" y="7488936"/>
+            <a:ext cx="82296" cy="82296"/>
+          </a:xfrm>
+          <a:prstGeom prst="ellipse">
+            <a:avLst/>
+          </a:prstGeom>
+          <a:solidFill>
+            <a:srgbClr val="C96F4A"/>
+          </a:solidFill>
+          <a:ln>
+            <a:noFill/>
+          </a:ln>
+        </p:spPr>
+        <p:style>
+          <a:lnRef idx="1">
+            <a:schemeClr val="accent1"/>
+          </a:lnRef>
+          <a:fillRef idx="3">
+            <a:schemeClr val="accent1"/>
+          </a:fillRef>
+          <a:effectRef idx="2">
+            <a:schemeClr val="accent1"/>
+          </a:effectRef>
+          <a:fontRef idx="minor">
+            <a:schemeClr val="lt1"/>
+          </a:fontRef>
+        </p:style>
+        <p:txBody>
+          <a:bodyPr rtlCol="0" anchor="ctr"/>
+          <a:lstStyle/>
+          <a:p>
+            <a:pPr algn="ctr"/>
+          </a:p>
+        </p:txBody>
+      </p:sp>
+      <p:sp>
+        <p:nvSpPr>
+          <p:cNvPr id="43" name="TextBox 42"/>
+          <p:cNvSpPr txBox="1"/>
+          <p:nvPr/>
+        </p:nvSpPr>
+        <p:spPr>
+          <a:xfrm>
+            <a:off x="1078992" y="7397496"/>
+            <a:ext cx="9555480" cy="274320"/>
+          </a:xfrm>
+          <a:prstGeom prst="rect">
+            <a:avLst/>
+          </a:prstGeom>
+          <a:noFill/>
+        </p:spPr>
+        <p:txBody>
+          <a:bodyPr wrap="square" anchor="t">
+            <a:spAutoFit/>
+          </a:bodyPr>
+          <a:lstStyle/>
+          <a:p>
+            <a:pPr algn="l"/>
+            <a:r>
+              <a:rPr sz="1500" b="0" i="0" lang="en-US" altLang="en-US">
+                <a:solidFill>
+                  <a:srgbClr val="24333D"/>
+                </a:solidFill>
+                <a:latin typeface="Sarabun"/>
+                <a:ea typeface="Sarabun"/>
+                <a:cs typeface="Sarabun"/>
+              </a:rPr>
+              <a:t>Room number drill: room 301? </a:t>
+            </a:r>
+            <a:r>
+              <a:rPr sz="1500" b="0" i="0" lang="th-TH" altLang="en-US">
+                <a:solidFill>
+                  <a:srgbClr val="24333D"/>
+                </a:solidFill>
+                <a:latin typeface="Sarabun"/>
+                <a:ea typeface="Sarabun"/>
+                <a:cs typeface="Sarabun"/>
+              </a:rPr>
+              <a:t>สาม</a:t>
+            </a:r>
+            <a:r>
+              <a:rPr sz="1500" b="0" i="1" lang="en-US" altLang="en-US">
+                <a:solidFill>
+                  <a:srgbClr val="566873"/>
+                </a:solidFill>
+                <a:latin typeface="Sarabun"/>
+                <a:ea typeface="Sarabun"/>
+                <a:cs typeface="Sarabun"/>
+              </a:rPr>
+              <a:t> (sǎam)</a:t>
+            </a:r>
+            <a:r>
+              <a:rPr sz="1500" b="0" i="0" lang="en-US" altLang="en-US">
+                <a:solidFill>
+                  <a:srgbClr val="24333D"/>
+                </a:solidFill>
+                <a:latin typeface="Sarabun"/>
+                <a:ea typeface="Sarabun"/>
+                <a:cs typeface="Sarabun"/>
+              </a:rPr>
+              <a:t>-</a:t>
+            </a:r>
+            <a:r>
+              <a:rPr sz="1500" b="0" i="0" lang="th-TH" altLang="en-US">
+                <a:solidFill>
+                  <a:srgbClr val="24333D"/>
+                </a:solidFill>
+                <a:latin typeface="Sarabun"/>
+                <a:ea typeface="Sarabun"/>
+                <a:cs typeface="Sarabun"/>
+              </a:rPr>
+              <a:t>ศูนย์</a:t>
+            </a:r>
+            <a:r>
+              <a:rPr sz="1500" b="0" i="1" lang="en-US" altLang="en-US">
+                <a:solidFill>
+                  <a:srgbClr val="566873"/>
+                </a:solidFill>
+                <a:latin typeface="Sarabun"/>
+                <a:ea typeface="Sarabun"/>
+                <a:cs typeface="Sarabun"/>
+              </a:rPr>
+              <a:t> (sǔun)</a:t>
+            </a:r>
+            <a:r>
+              <a:rPr sz="1500" b="0" i="0" lang="en-US" altLang="en-US">
+                <a:solidFill>
+                  <a:srgbClr val="24333D"/>
+                </a:solidFill>
+                <a:latin typeface="Sarabun"/>
+                <a:ea typeface="Sarabun"/>
+                <a:cs typeface="Sarabun"/>
+              </a:rPr>
+              <a:t>-</a:t>
+            </a:r>
+            <a:r>
+              <a:rPr sz="1500" b="0" i="0" lang="th-TH" altLang="en-US">
+                <a:solidFill>
+                  <a:srgbClr val="24333D"/>
+                </a:solidFill>
+                <a:latin typeface="Sarabun"/>
+                <a:ea typeface="Sarabun"/>
+                <a:cs typeface="Sarabun"/>
+              </a:rPr>
+              <a:t>หนึ่ง</a:t>
+            </a:r>
+            <a:r>
+              <a:rPr sz="1500" b="0" i="1" lang="en-US" altLang="en-US">
+                <a:solidFill>
+                  <a:srgbClr val="566873"/>
+                </a:solidFill>
+                <a:latin typeface="Sarabun"/>
+                <a:ea typeface="Sarabun"/>
+                <a:cs typeface="Sarabun"/>
+              </a:rPr>
+              <a:t> (nùeng)</a:t>
+            </a:r>
+            <a:r>
+              <a:rPr sz="1500" b="0" i="0" lang="en-US" altLang="en-US">
+                <a:solidFill>
+                  <a:srgbClr val="24333D"/>
+                </a:solidFill>
+                <a:latin typeface="Sarabun"/>
+                <a:ea typeface="Sarabun"/>
+                <a:cs typeface="Sarabun"/>
+              </a:rPr>
+              <a:t>. Room 205? </a:t>
+            </a:r>
+            <a:r>
+              <a:rPr sz="1500" b="0" i="0" lang="th-TH" altLang="en-US">
+                <a:solidFill>
+                  <a:srgbClr val="24333D"/>
+                </a:solidFill>
+                <a:latin typeface="Sarabun"/>
+                <a:ea typeface="Sarabun"/>
+                <a:cs typeface="Sarabun"/>
+              </a:rPr>
+              <a:t>สอง</a:t>
+            </a:r>
+            <a:r>
+              <a:rPr sz="1500" b="0" i="1" lang="en-US" altLang="en-US">
+                <a:solidFill>
+                  <a:srgbClr val="566873"/>
+                </a:solidFill>
+                <a:latin typeface="Sarabun"/>
+                <a:ea typeface="Sarabun"/>
+                <a:cs typeface="Sarabun"/>
+              </a:rPr>
+              <a:t> (sǎawng)</a:t>
+            </a:r>
+            <a:r>
+              <a:rPr sz="1500" b="0" i="0" lang="en-US" altLang="en-US">
+                <a:solidFill>
+                  <a:srgbClr val="24333D"/>
+                </a:solidFill>
+                <a:latin typeface="Sarabun"/>
+                <a:ea typeface="Sarabun"/>
+                <a:cs typeface="Sarabun"/>
+              </a:rPr>
+              <a:t>-</a:t>
+            </a:r>
+            <a:r>
+              <a:rPr sz="1500" b="0" i="0" lang="th-TH" altLang="en-US">
+                <a:solidFill>
+                  <a:srgbClr val="24333D"/>
+                </a:solidFill>
+                <a:latin typeface="Sarabun"/>
+                <a:ea typeface="Sarabun"/>
+                <a:cs typeface="Sarabun"/>
+              </a:rPr>
+              <a:t>ศูนย์</a:t>
+            </a:r>
+            <a:r>
+              <a:rPr sz="1500" b="0" i="1" lang="en-US" altLang="en-US">
+                <a:solidFill>
+                  <a:srgbClr val="566873"/>
+                </a:solidFill>
+                <a:latin typeface="Sarabun"/>
+                <a:ea typeface="Sarabun"/>
+                <a:cs typeface="Sarabun"/>
+              </a:rPr>
+              <a:t> (sǔun)</a:t>
+            </a:r>
+            <a:r>
+              <a:rPr sz="1500" b="0" i="0" lang="en-US" altLang="en-US">
+                <a:solidFill>
+                  <a:srgbClr val="24333D"/>
+                </a:solidFill>
+                <a:latin typeface="Sarabun"/>
+                <a:ea typeface="Sarabun"/>
+                <a:cs typeface="Sarabun"/>
+              </a:rPr>
+              <a:t>-</a:t>
+            </a:r>
+            <a:r>
+              <a:rPr sz="1500" b="0" i="0" lang="th-TH" altLang="en-US">
+                <a:solidFill>
+                  <a:srgbClr val="24333D"/>
+                </a:solidFill>
+                <a:latin typeface="Sarabun"/>
+                <a:ea typeface="Sarabun"/>
+                <a:cs typeface="Sarabun"/>
+              </a:rPr>
+              <a:t>ห้า</a:t>
+            </a:r>
+            <a:r>
+              <a:rPr sz="1500" b="0" i="1" lang="en-US" altLang="en-US">
+                <a:solidFill>
+                  <a:srgbClr val="566873"/>
+                </a:solidFill>
+                <a:latin typeface="Sarabun"/>
+                <a:ea typeface="Sarabun"/>
+                <a:cs typeface="Sarabun"/>
+              </a:rPr>
+              <a:t> (hâa)</a:t>
+            </a:r>
+            <a:r>
+              <a:rPr sz="1500" b="0" i="0" lang="en-US" altLang="en-US">
+                <a:solidFill>
+                  <a:srgbClr val="24333D"/>
+                </a:solidFill>
+                <a:latin typeface="Sarabun"/>
+                <a:ea typeface="Sarabun"/>
+                <a:cs typeface="Sarabun"/>
+              </a:rPr>
+              <a:t>. Your turn.</a:t>
             </a:r>
           </a:p>
         </p:txBody>
@@ -6460,7 +6680,7 @@
                 <a:ea typeface="Sarabun"/>
                 <a:cs typeface="Sarabun"/>
               </a:rPr>
-              <a:t>Finish the set: 6 to 10</a:t>
+              <a:t>Digits 6 to 10</a:t>
             </a:r>
           </a:p>
         </p:txBody>
@@ -6474,7 +6694,7 @@
         <p:spPr>
           <a:xfrm>
             <a:off x="731520" y="1325880"/>
-            <a:ext cx="3889080" cy="1572768"/>
+            <a:ext cx="3889080" cy="685800"/>
           </a:xfrm>
           <a:prstGeom prst="roundRect">
             <a:avLst>
@@ -6520,8 +6740,8 @@
         </p:nvSpPr>
         <p:spPr>
           <a:xfrm>
-            <a:off x="868680" y="1527048"/>
-            <a:ext cx="73152" cy="1143000"/>
+            <a:off x="868680" y="1435608"/>
+            <a:ext cx="73152" cy="411480"/>
           </a:xfrm>
           <a:prstGeom prst="rect">
             <a:avLst/>
@@ -6563,8 +6783,8 @@
         </p:nvSpPr>
         <p:spPr>
           <a:xfrm>
-            <a:off x="1078992" y="1435608"/>
-            <a:ext cx="3431880" cy="658368"/>
+            <a:off x="1078992" y="1399032"/>
+            <a:ext cx="3431880" cy="320040"/>
           </a:xfrm>
           <a:prstGeom prst="rect">
             <a:avLst/>
@@ -6579,7 +6799,7 @@
           <a:p>
             <a:pPr algn="l"/>
             <a:r>
-              <a:rPr sz="3200" b="1" i="0" lang="th-TH" altLang="en-US">
+              <a:rPr sz="2200" b="1" i="0" lang="th-TH" altLang="en-US">
                 <a:solidFill>
                   <a:srgbClr val="24333D"/>
                 </a:solidFill>
@@ -6590,7 +6810,7 @@
               <a:t>หก</a:t>
             </a:r>
             <a:r>
-              <a:rPr sz="1980" b="0" i="1" lang="en-US" altLang="en-US">
+              <a:rPr sz="1500" b="0" i="1" lang="en-US" altLang="en-US">
                 <a:solidFill>
                   <a:srgbClr val="566873"/>
                 </a:solidFill>
@@ -6611,8 +6831,8 @@
         </p:nvSpPr>
         <p:spPr>
           <a:xfrm>
-            <a:off x="1078992" y="2203704"/>
-            <a:ext cx="3431880" cy="274320"/>
+            <a:off x="1078992" y="1709928"/>
+            <a:ext cx="3431880" cy="228600"/>
           </a:xfrm>
           <a:prstGeom prst="rect">
             <a:avLst/>
@@ -6627,7 +6847,7 @@
           <a:p>
             <a:pPr algn="l"/>
             <a:r>
-              <a:rPr sz="1500" b="0" i="0" lang="en-US" altLang="en-US">
+              <a:rPr sz="1300" b="0" i="0" lang="en-US" altLang="en-US">
                 <a:solidFill>
                   <a:srgbClr val="82909A"/>
                 </a:solidFill>
@@ -6635,7 +6855,7 @@
                 <a:ea typeface="Sarabun"/>
                 <a:cs typeface="Sarabun"/>
               </a:rPr>
-              <a:t>six</a:t>
+              <a:t>6 — six</a:t>
             </a:r>
           </a:p>
         </p:txBody>
@@ -6648,8 +6868,8 @@
         </p:nvSpPr>
         <p:spPr>
           <a:xfrm>
-            <a:off x="731520" y="3081528"/>
-            <a:ext cx="3889080" cy="1572768"/>
+            <a:off x="731520" y="2130552"/>
+            <a:ext cx="3889080" cy="685800"/>
           </a:xfrm>
           <a:prstGeom prst="roundRect">
             <a:avLst>
@@ -6695,8 +6915,8 @@
         </p:nvSpPr>
         <p:spPr>
           <a:xfrm>
-            <a:off x="868680" y="3282696"/>
-            <a:ext cx="73152" cy="1143000"/>
+            <a:off x="868680" y="2240280"/>
+            <a:ext cx="73152" cy="411480"/>
           </a:xfrm>
           <a:prstGeom prst="rect">
             <a:avLst/>
@@ -6738,8 +6958,8 @@
         </p:nvSpPr>
         <p:spPr>
           <a:xfrm>
-            <a:off x="1078992" y="3191256"/>
-            <a:ext cx="3431880" cy="658368"/>
+            <a:off x="1078992" y="2203704"/>
+            <a:ext cx="3431880" cy="320040"/>
           </a:xfrm>
           <a:prstGeom prst="rect">
             <a:avLst/>
@@ -6754,7 +6974,7 @@
           <a:p>
             <a:pPr algn="l"/>
             <a:r>
-              <a:rPr sz="3200" b="1" i="0" lang="th-TH" altLang="en-US">
+              <a:rPr sz="2200" b="1" i="0" lang="th-TH" altLang="en-US">
                 <a:solidFill>
                   <a:srgbClr val="24333D"/>
                 </a:solidFill>
@@ -6765,7 +6985,7 @@
               <a:t>เจ็ด</a:t>
             </a:r>
             <a:r>
-              <a:rPr sz="1980" b="0" i="1" lang="en-US" altLang="en-US">
+              <a:rPr sz="1500" b="0" i="1" lang="en-US" altLang="en-US">
                 <a:solidFill>
                   <a:srgbClr val="566873"/>
                 </a:solidFill>
@@ -6786,8 +7006,8 @@
         </p:nvSpPr>
         <p:spPr>
           <a:xfrm>
-            <a:off x="1078992" y="3959352"/>
-            <a:ext cx="3431880" cy="274320"/>
+            <a:off x="1078992" y="2514600"/>
+            <a:ext cx="3431880" cy="228600"/>
           </a:xfrm>
           <a:prstGeom prst="rect">
             <a:avLst/>
@@ -6802,7 +7022,7 @@
           <a:p>
             <a:pPr algn="l"/>
             <a:r>
-              <a:rPr sz="1500" b="0" i="0" lang="en-US" altLang="en-US">
+              <a:rPr sz="1300" b="0" i="0" lang="en-US" altLang="en-US">
                 <a:solidFill>
                   <a:srgbClr val="82909A"/>
                 </a:solidFill>
@@ -6810,7 +7030,7 @@
                 <a:ea typeface="Sarabun"/>
                 <a:cs typeface="Sarabun"/>
               </a:rPr>
-              <a:t>seven</a:t>
+              <a:t>7 — seven</a:t>
             </a:r>
           </a:p>
         </p:txBody>
@@ -6823,8 +7043,8 @@
         </p:nvSpPr>
         <p:spPr>
           <a:xfrm>
-            <a:off x="731520" y="4837176"/>
-            <a:ext cx="3889080" cy="1572768"/>
+            <a:off x="731520" y="2935224"/>
+            <a:ext cx="3889080" cy="685800"/>
           </a:xfrm>
           <a:prstGeom prst="roundRect">
             <a:avLst>
@@ -6870,8 +7090,8 @@
         </p:nvSpPr>
         <p:spPr>
           <a:xfrm>
-            <a:off x="868680" y="5038344"/>
-            <a:ext cx="73152" cy="1143000"/>
+            <a:off x="868680" y="3044952"/>
+            <a:ext cx="73152" cy="411480"/>
           </a:xfrm>
           <a:prstGeom prst="rect">
             <a:avLst/>
@@ -6913,8 +7133,8 @@
         </p:nvSpPr>
         <p:spPr>
           <a:xfrm>
-            <a:off x="1078992" y="4946904"/>
-            <a:ext cx="3431880" cy="658368"/>
+            <a:off x="1078992" y="3008376"/>
+            <a:ext cx="3431880" cy="320040"/>
           </a:xfrm>
           <a:prstGeom prst="rect">
             <a:avLst/>
@@ -6929,7 +7149,7 @@
           <a:p>
             <a:pPr algn="l"/>
             <a:r>
-              <a:rPr sz="3200" b="1" i="0" lang="th-TH" altLang="en-US">
+              <a:rPr sz="2200" b="1" i="0" lang="th-TH" altLang="en-US">
                 <a:solidFill>
                   <a:srgbClr val="24333D"/>
                 </a:solidFill>
@@ -6940,7 +7160,7 @@
               <a:t>แปด</a:t>
             </a:r>
             <a:r>
-              <a:rPr sz="1980" b="0" i="1" lang="en-US" altLang="en-US">
+              <a:rPr sz="1500" b="0" i="1" lang="en-US" altLang="en-US">
                 <a:solidFill>
                   <a:srgbClr val="566873"/>
                 </a:solidFill>
@@ -6961,8 +7181,8 @@
         </p:nvSpPr>
         <p:spPr>
           <a:xfrm>
-            <a:off x="1078992" y="5715000"/>
-            <a:ext cx="3431880" cy="274320"/>
+            <a:off x="1078992" y="3319272"/>
+            <a:ext cx="3431880" cy="228600"/>
           </a:xfrm>
           <a:prstGeom prst="rect">
             <a:avLst/>
@@ -6977,7 +7197,7 @@
           <a:p>
             <a:pPr algn="l"/>
             <a:r>
-              <a:rPr sz="1500" b="0" i="0" lang="en-US" altLang="en-US">
+              <a:rPr sz="1300" b="0" i="0" lang="en-US" altLang="en-US">
                 <a:solidFill>
                   <a:srgbClr val="82909A"/>
                 </a:solidFill>
@@ -6985,7 +7205,7 @@
                 <a:ea typeface="Sarabun"/>
                 <a:cs typeface="Sarabun"/>
               </a:rPr>
-              <a:t>eight</a:t>
+              <a:t>8 — eight</a:t>
             </a:r>
           </a:p>
         </p:txBody>
@@ -6998,8 +7218,8 @@
         </p:nvSpPr>
         <p:spPr>
           <a:xfrm>
-            <a:off x="731520" y="6592824"/>
-            <a:ext cx="3889080" cy="1572768"/>
+            <a:off x="731520" y="3739896"/>
+            <a:ext cx="3889080" cy="685800"/>
           </a:xfrm>
           <a:prstGeom prst="roundRect">
             <a:avLst>
@@ -7045,8 +7265,8 @@
         </p:nvSpPr>
         <p:spPr>
           <a:xfrm>
-            <a:off x="868680" y="6793992"/>
-            <a:ext cx="73152" cy="1143000"/>
+            <a:off x="868680" y="3849624"/>
+            <a:ext cx="73152" cy="411480"/>
           </a:xfrm>
           <a:prstGeom prst="rect">
             <a:avLst/>
@@ -7088,8 +7308,8 @@
         </p:nvSpPr>
         <p:spPr>
           <a:xfrm>
-            <a:off x="1078992" y="6702552"/>
-            <a:ext cx="3431880" cy="658368"/>
+            <a:off x="1078992" y="3813048"/>
+            <a:ext cx="3431880" cy="320040"/>
           </a:xfrm>
           <a:prstGeom prst="rect">
             <a:avLst/>
@@ -7104,7 +7324,7 @@
           <a:p>
             <a:pPr algn="l"/>
             <a:r>
-              <a:rPr sz="3200" b="1" i="0" lang="th-TH" altLang="en-US">
+              <a:rPr sz="2200" b="1" i="0" lang="th-TH" altLang="en-US">
                 <a:solidFill>
                   <a:srgbClr val="24333D"/>
                 </a:solidFill>
@@ -7115,7 +7335,7 @@
               <a:t>เก้า</a:t>
             </a:r>
             <a:r>
-              <a:rPr sz="1980" b="0" i="1" lang="en-US" altLang="en-US">
+              <a:rPr sz="1500" b="0" i="1" lang="en-US" altLang="en-US">
                 <a:solidFill>
                   <a:srgbClr val="566873"/>
                 </a:solidFill>
@@ -7136,8 +7356,8 @@
         </p:nvSpPr>
         <p:spPr>
           <a:xfrm>
-            <a:off x="1078992" y="7470648"/>
-            <a:ext cx="3431880" cy="274320"/>
+            <a:off x="1078992" y="4123944"/>
+            <a:ext cx="3431880" cy="228600"/>
           </a:xfrm>
           <a:prstGeom prst="rect">
             <a:avLst/>
@@ -7152,7 +7372,7 @@
           <a:p>
             <a:pPr algn="l"/>
             <a:r>
-              <a:rPr sz="1500" b="0" i="0" lang="en-US" altLang="en-US">
+              <a:rPr sz="1300" b="0" i="0" lang="en-US" altLang="en-US">
                 <a:solidFill>
                   <a:srgbClr val="82909A"/>
                 </a:solidFill>
@@ -7160,7 +7380,7 @@
                 <a:ea typeface="Sarabun"/>
                 <a:cs typeface="Sarabun"/>
               </a:rPr>
-              <a:t>nine</a:t>
+              <a:t>9 — nine</a:t>
             </a:r>
           </a:p>
         </p:txBody>
@@ -7173,8 +7393,8 @@
         </p:nvSpPr>
         <p:spPr>
           <a:xfrm>
-            <a:off x="731520" y="8531352"/>
-            <a:ext cx="10058400" cy="1636776"/>
+            <a:off x="731520" y="4544568"/>
+            <a:ext cx="3889080" cy="685800"/>
           </a:xfrm>
           <a:prstGeom prst="roundRect">
             <a:avLst>
@@ -7214,14 +7434,57 @@
       </p:sp>
       <p:sp>
         <p:nvSpPr>
-          <p:cNvPr id="23" name="TextBox 22"/>
+          <p:cNvPr id="23" name="Rectangle 22"/>
+          <p:cNvSpPr/>
+          <p:nvPr/>
+        </p:nvSpPr>
+        <p:spPr>
+          <a:xfrm>
+            <a:off x="868680" y="4654296"/>
+            <a:ext cx="73152" cy="411480"/>
+          </a:xfrm>
+          <a:prstGeom prst="rect">
+            <a:avLst/>
+          </a:prstGeom>
+          <a:solidFill>
+            <a:srgbClr val="355C7D"/>
+          </a:solidFill>
+          <a:ln>
+            <a:noFill/>
+          </a:ln>
+        </p:spPr>
+        <p:style>
+          <a:lnRef idx="1">
+            <a:schemeClr val="accent1"/>
+          </a:lnRef>
+          <a:fillRef idx="3">
+            <a:schemeClr val="accent1"/>
+          </a:fillRef>
+          <a:effectRef idx="2">
+            <a:schemeClr val="accent1"/>
+          </a:effectRef>
+          <a:fontRef idx="minor">
+            <a:schemeClr val="lt1"/>
+          </a:fontRef>
+        </p:style>
+        <p:txBody>
+          <a:bodyPr rtlCol="0" anchor="ctr"/>
+          <a:lstStyle/>
+          <a:p>
+            <a:pPr algn="ctr"/>
+          </a:p>
+        </p:txBody>
+      </p:sp>
+      <p:sp>
+        <p:nvSpPr>
+          <p:cNvPr id="24" name="TextBox 23"/>
           <p:cNvSpPr txBox="1"/>
           <p:nvPr/>
         </p:nvSpPr>
         <p:spPr>
           <a:xfrm>
-            <a:off x="932688" y="8677656"/>
-            <a:ext cx="9692640" cy="228600"/>
+            <a:off x="1078992" y="4617720"/>
+            <a:ext cx="3431880" cy="320040"/>
           </a:xfrm>
           <a:prstGeom prst="rect">
             <a:avLst/>
@@ -7236,6 +7499,138 @@
           <a:p>
             <a:pPr algn="l"/>
             <a:r>
+              <a:rPr sz="2200" b="1" i="0" lang="th-TH" altLang="en-US">
+                <a:solidFill>
+                  <a:srgbClr val="24333D"/>
+                </a:solidFill>
+                <a:latin typeface="Sarabun"/>
+                <a:ea typeface="Sarabun"/>
+                <a:cs typeface="Sarabun"/>
+              </a:rPr>
+              <a:t>สิบ</a:t>
+            </a:r>
+            <a:r>
+              <a:rPr sz="1500" b="0" i="1" lang="en-US" altLang="en-US">
+                <a:solidFill>
+                  <a:srgbClr val="566873"/>
+                </a:solidFill>
+                <a:latin typeface="Sarabun"/>
+                <a:ea typeface="Sarabun"/>
+                <a:cs typeface="Sarabun"/>
+              </a:rPr>
+              <a:t> (sìp)</a:t>
+            </a:r>
+          </a:p>
+        </p:txBody>
+      </p:sp>
+      <p:sp>
+        <p:nvSpPr>
+          <p:cNvPr id="25" name="TextBox 24"/>
+          <p:cNvSpPr txBox="1"/>
+          <p:nvPr/>
+        </p:nvSpPr>
+        <p:spPr>
+          <a:xfrm>
+            <a:off x="1078992" y="4928616"/>
+            <a:ext cx="3431880" cy="228600"/>
+          </a:xfrm>
+          <a:prstGeom prst="rect">
+            <a:avLst/>
+          </a:prstGeom>
+          <a:noFill/>
+        </p:spPr>
+        <p:txBody>
+          <a:bodyPr wrap="square" anchor="t">
+            <a:spAutoFit/>
+          </a:bodyPr>
+          <a:lstStyle/>
+          <a:p>
+            <a:pPr algn="l"/>
+            <a:r>
+              <a:rPr sz="1300" b="0" i="0" lang="en-US" altLang="en-US">
+                <a:solidFill>
+                  <a:srgbClr val="82909A"/>
+                </a:solidFill>
+                <a:latin typeface="Sarabun"/>
+                <a:ea typeface="Sarabun"/>
+                <a:cs typeface="Sarabun"/>
+              </a:rPr>
+              <a:t>10 — ten</a:t>
+            </a:r>
+          </a:p>
+        </p:txBody>
+      </p:sp>
+      <p:sp>
+        <p:nvSpPr>
+          <p:cNvPr id="26" name="Rounded Rectangle 25"/>
+          <p:cNvSpPr/>
+          <p:nvPr/>
+        </p:nvSpPr>
+        <p:spPr>
+          <a:xfrm>
+            <a:off x="731520" y="5532120"/>
+            <a:ext cx="10058400" cy="1636776"/>
+          </a:xfrm>
+          <a:prstGeom prst="roundRect">
+            <a:avLst>
+              <a:gd name="adj" fmla="val 6000"/>
+            </a:avLst>
+          </a:prstGeom>
+          <a:solidFill>
+            <a:srgbClr val="FFFFFF"/>
+          </a:solidFill>
+          <a:ln>
+            <a:solidFill>
+              <a:srgbClr val="D7DEE3"/>
+            </a:solidFill>
+          </a:ln>
+        </p:spPr>
+        <p:style>
+          <a:lnRef idx="1">
+            <a:schemeClr val="accent1"/>
+          </a:lnRef>
+          <a:fillRef idx="3">
+            <a:schemeClr val="accent1"/>
+          </a:fillRef>
+          <a:effectRef idx="2">
+            <a:schemeClr val="accent1"/>
+          </a:effectRef>
+          <a:fontRef idx="minor">
+            <a:schemeClr val="lt1"/>
+          </a:fontRef>
+        </p:style>
+        <p:txBody>
+          <a:bodyPr rtlCol="0" anchor="ctr"/>
+          <a:lstStyle/>
+          <a:p>
+            <a:pPr algn="ctr"/>
+          </a:p>
+        </p:txBody>
+      </p:sp>
+      <p:sp>
+        <p:nvSpPr>
+          <p:cNvPr id="27" name="TextBox 26"/>
+          <p:cNvSpPr txBox="1"/>
+          <p:nvPr/>
+        </p:nvSpPr>
+        <p:spPr>
+          <a:xfrm>
+            <a:off x="932688" y="5678424"/>
+            <a:ext cx="9692640" cy="228600"/>
+          </a:xfrm>
+          <a:prstGeom prst="rect">
+            <a:avLst/>
+          </a:prstGeom>
+          <a:noFill/>
+        </p:spPr>
+        <p:txBody>
+          <a:bodyPr wrap="square" anchor="t">
+            <a:spAutoFit/>
+          </a:bodyPr>
+          <a:lstStyle/>
+          <a:p>
+            <a:pPr algn="l"/>
+            <a:r>
               <a:rPr sz="1500" b="1" i="0" lang="en-US" altLang="en-US">
                 <a:solidFill>
                   <a:srgbClr val="C96F4A"/>
@@ -7251,13 +7646,13 @@
       </p:sp>
       <p:sp>
         <p:nvSpPr>
-          <p:cNvPr id="24" name="Oval 23"/>
+          <p:cNvPr id="28" name="Oval 27"/>
           <p:cNvSpPr/>
           <p:nvPr/>
         </p:nvSpPr>
         <p:spPr>
           <a:xfrm>
-            <a:off x="932688" y="9061704"/>
+            <a:off x="932688" y="6062472"/>
             <a:ext cx="82296" cy="82296"/>
           </a:xfrm>
           <a:prstGeom prst="ellipse">
@@ -7294,13 +7689,13 @@
       </p:sp>
       <p:sp>
         <p:nvSpPr>
-          <p:cNvPr id="25" name="TextBox 24"/>
+          <p:cNvPr id="29" name="TextBox 28"/>
           <p:cNvSpPr txBox="1"/>
           <p:nvPr/>
         </p:nvSpPr>
         <p:spPr>
           <a:xfrm>
-            <a:off x="1078992" y="8970264"/>
+            <a:off x="1078992" y="5971032"/>
             <a:ext cx="9555480" cy="274320"/>
           </a:xfrm>
           <a:prstGeom prst="rect">
@@ -7324,7 +7719,7 @@
                 <a:ea typeface="Sarabun"/>
                 <a:cs typeface="Sarabun"/>
               </a:rPr>
-              <a:t>Clap drill: clap once per digit from </a:t>
+              <a:t>Listen and repeat: </a:t>
             </a:r>
             <a:r>
               <a:rPr sz="1500" b="0" i="0" lang="th-TH" altLang="en-US">
@@ -7357,7 +7752,7 @@
                 <a:ea typeface="Sarabun"/>
                 <a:cs typeface="Sarabun"/>
               </a:rPr>
-              <a:t> to </a:t>
+              <a:t>, </a:t>
             </a:r>
             <a:r>
               <a:rPr sz="1500" b="0" i="0" lang="th-TH" altLang="en-US">
@@ -7368,6 +7763,105 @@
                 <a:ea typeface="Sarabun"/>
                 <a:cs typeface="Sarabun"/>
               </a:rPr>
+              <a:t>เจ็ด</a:t>
+            </a:r>
+            <a:r>
+              <a:rPr sz="1500" b="0" i="1" lang="en-US" altLang="en-US">
+                <a:solidFill>
+                  <a:srgbClr val="566873"/>
+                </a:solidFill>
+                <a:latin typeface="Sarabun"/>
+                <a:ea typeface="Sarabun"/>
+                <a:cs typeface="Sarabun"/>
+              </a:rPr>
+              <a:t> (jèt)</a:t>
+            </a:r>
+            <a:r>
+              <a:rPr sz="1500" b="0" i="0" lang="en-US" altLang="en-US">
+                <a:solidFill>
+                  <a:srgbClr val="24333D"/>
+                </a:solidFill>
+                <a:latin typeface="Sarabun"/>
+                <a:ea typeface="Sarabun"/>
+                <a:cs typeface="Sarabun"/>
+              </a:rPr>
+              <a:t>, </a:t>
+            </a:r>
+            <a:r>
+              <a:rPr sz="1500" b="0" i="0" lang="th-TH" altLang="en-US">
+                <a:solidFill>
+                  <a:srgbClr val="24333D"/>
+                </a:solidFill>
+                <a:latin typeface="Sarabun"/>
+                <a:ea typeface="Sarabun"/>
+                <a:cs typeface="Sarabun"/>
+              </a:rPr>
+              <a:t>แปด</a:t>
+            </a:r>
+            <a:r>
+              <a:rPr sz="1500" b="0" i="1" lang="en-US" altLang="en-US">
+                <a:solidFill>
+                  <a:srgbClr val="566873"/>
+                </a:solidFill>
+                <a:latin typeface="Sarabun"/>
+                <a:ea typeface="Sarabun"/>
+                <a:cs typeface="Sarabun"/>
+              </a:rPr>
+              <a:t> (bpàet)</a:t>
+            </a:r>
+            <a:r>
+              <a:rPr sz="1500" b="0" i="0" lang="en-US" altLang="en-US">
+                <a:solidFill>
+                  <a:srgbClr val="24333D"/>
+                </a:solidFill>
+                <a:latin typeface="Sarabun"/>
+                <a:ea typeface="Sarabun"/>
+                <a:cs typeface="Sarabun"/>
+              </a:rPr>
+              <a:t>, </a:t>
+            </a:r>
+            <a:r>
+              <a:rPr sz="1500" b="0" i="0" lang="th-TH" altLang="en-US">
+                <a:solidFill>
+                  <a:srgbClr val="24333D"/>
+                </a:solidFill>
+                <a:latin typeface="Sarabun"/>
+                <a:ea typeface="Sarabun"/>
+                <a:cs typeface="Sarabun"/>
+              </a:rPr>
+              <a:t>เก้า</a:t>
+            </a:r>
+            <a:r>
+              <a:rPr sz="1500" b="0" i="1" lang="en-US" altLang="en-US">
+                <a:solidFill>
+                  <a:srgbClr val="566873"/>
+                </a:solidFill>
+                <a:latin typeface="Sarabun"/>
+                <a:ea typeface="Sarabun"/>
+                <a:cs typeface="Sarabun"/>
+              </a:rPr>
+              <a:t> (gâo)</a:t>
+            </a:r>
+            <a:r>
+              <a:rPr sz="1500" b="0" i="0" lang="en-US" altLang="en-US">
+                <a:solidFill>
+                  <a:srgbClr val="24333D"/>
+                </a:solidFill>
+                <a:latin typeface="Sarabun"/>
+                <a:ea typeface="Sarabun"/>
+                <a:cs typeface="Sarabun"/>
+              </a:rPr>
+              <a:t>, </a:t>
+            </a:r>
+            <a:r>
+              <a:rPr sz="1500" b="0" i="0" lang="th-TH" altLang="en-US">
+                <a:solidFill>
+                  <a:srgbClr val="24333D"/>
+                </a:solidFill>
+                <a:latin typeface="Sarabun"/>
+                <a:ea typeface="Sarabun"/>
+                <a:cs typeface="Sarabun"/>
+              </a:rPr>
               <a:t>สิบ</a:t>
             </a:r>
             <a:r>
@@ -7390,152 +7884,20 @@
                 <a:ea typeface="Sarabun"/>
                 <a:cs typeface="Sarabun"/>
               </a:rPr>
-              <a:t>, keeping </a:t>
-            </a:r>
-            <a:r>
-              <a:rPr sz="1500" b="0" i="0" lang="th-TH" altLang="en-US">
-                <a:solidFill>
-                  <a:srgbClr val="24333D"/>
-                </a:solidFill>
-                <a:latin typeface="Sarabun"/>
-                <a:ea typeface="Sarabun"/>
-                <a:cs typeface="Sarabun"/>
-              </a:rPr>
-              <a:t>หก</a:t>
-            </a:r>
-            <a:r>
-              <a:rPr sz="1500" b="0" i="1" lang="en-US" altLang="en-US">
-                <a:solidFill>
-                  <a:srgbClr val="566873"/>
-                </a:solidFill>
-                <a:latin typeface="Sarabun"/>
-                <a:ea typeface="Sarabun"/>
-                <a:cs typeface="Sarabun"/>
-              </a:rPr>
-              <a:t> (hòk)</a:t>
-            </a:r>
-            <a:r>
-              <a:rPr sz="1500" b="0" i="0" lang="en-US" altLang="en-US">
-                <a:solidFill>
-                  <a:srgbClr val="24333D"/>
-                </a:solidFill>
-                <a:latin typeface="Sarabun"/>
-                <a:ea typeface="Sarabun"/>
-                <a:cs typeface="Sarabun"/>
-              </a:rPr>
-              <a:t>, </a:t>
-            </a:r>
-            <a:r>
-              <a:rPr sz="1500" b="0" i="0" lang="th-TH" altLang="en-US">
-                <a:solidFill>
-                  <a:srgbClr val="24333D"/>
-                </a:solidFill>
-                <a:latin typeface="Sarabun"/>
-                <a:ea typeface="Sarabun"/>
-                <a:cs typeface="Sarabun"/>
-              </a:rPr>
-              <a:t>เจ็ด</a:t>
-            </a:r>
-            <a:r>
-              <a:rPr sz="1500" b="0" i="1" lang="en-US" altLang="en-US">
-                <a:solidFill>
-                  <a:srgbClr val="566873"/>
-                </a:solidFill>
-                <a:latin typeface="Sarabun"/>
-                <a:ea typeface="Sarabun"/>
-                <a:cs typeface="Sarabun"/>
-              </a:rPr>
-              <a:t> (jèt)</a:t>
-            </a:r>
-            <a:r>
-              <a:rPr sz="1500" b="0" i="0" lang="en-US" altLang="en-US">
-                <a:solidFill>
-                  <a:srgbClr val="24333D"/>
-                </a:solidFill>
-                <a:latin typeface="Sarabun"/>
-                <a:ea typeface="Sarabun"/>
-                <a:cs typeface="Sarabun"/>
-              </a:rPr>
-              <a:t>, </a:t>
-            </a:r>
-            <a:r>
-              <a:rPr sz="1500" b="0" i="0" lang="th-TH" altLang="en-US">
-                <a:solidFill>
-                  <a:srgbClr val="24333D"/>
-                </a:solidFill>
-                <a:latin typeface="Sarabun"/>
-                <a:ea typeface="Sarabun"/>
-                <a:cs typeface="Sarabun"/>
-              </a:rPr>
-              <a:t>แปด</a:t>
-            </a:r>
-            <a:r>
-              <a:rPr sz="1500" b="0" i="1" lang="en-US" altLang="en-US">
-                <a:solidFill>
-                  <a:srgbClr val="566873"/>
-                </a:solidFill>
-                <a:latin typeface="Sarabun"/>
-                <a:ea typeface="Sarabun"/>
-                <a:cs typeface="Sarabun"/>
-              </a:rPr>
-              <a:t> (bpàet)</a:t>
-            </a:r>
-            <a:r>
-              <a:rPr sz="1500" b="0" i="0" lang="en-US" altLang="en-US">
-                <a:solidFill>
-                  <a:srgbClr val="24333D"/>
-                </a:solidFill>
-                <a:latin typeface="Sarabun"/>
-                <a:ea typeface="Sarabun"/>
-                <a:cs typeface="Sarabun"/>
-              </a:rPr>
-              <a:t>, and </a:t>
-            </a:r>
-            <a:r>
-              <a:rPr sz="1500" b="0" i="0" lang="th-TH" altLang="en-US">
-                <a:solidFill>
-                  <a:srgbClr val="24333D"/>
-                </a:solidFill>
-                <a:latin typeface="Sarabun"/>
-                <a:ea typeface="Sarabun"/>
-                <a:cs typeface="Sarabun"/>
-              </a:rPr>
-              <a:t>สิบ</a:t>
-            </a:r>
-            <a:r>
-              <a:rPr sz="1500" b="0" i="1" lang="en-US" altLang="en-US">
-                <a:solidFill>
-                  <a:srgbClr val="566873"/>
-                </a:solidFill>
-                <a:latin typeface="Sarabun"/>
-                <a:ea typeface="Sarabun"/>
-                <a:cs typeface="Sarabun"/>
-              </a:rPr>
-              <a:t> (sìp)</a:t>
-            </a:r>
-            <a:r>
-              <a:rPr sz="1500" b="0" i="0" lang="en-US" altLang="en-US">
-                <a:solidFill>
-                  <a:srgbClr val="24333D"/>
-                </a:solidFill>
-                <a:latin typeface="Sarabun"/>
-                <a:ea typeface="Sarabun"/>
-                <a:cs typeface="Sarabun"/>
-              </a:rPr>
-              <a:t> short and controlled.</a:t>
-            </a:r>
-          </a:p>
-        </p:txBody>
-      </p:sp>
-      <p:sp>
-        <p:nvSpPr>
-          <p:cNvPr id="26" name="Oval 25"/>
+              <a:t>. Now count 0 to 10 from memory.</a:t>
+            </a:r>
+          </a:p>
+        </p:txBody>
+      </p:sp>
+      <p:sp>
+        <p:nvSpPr>
+          <p:cNvPr id="30" name="Oval 29"/>
           <p:cNvSpPr/>
           <p:nvPr/>
         </p:nvSpPr>
         <p:spPr>
           <a:xfrm>
-            <a:off x="932688" y="9372600"/>
+            <a:off x="932688" y="6373368"/>
             <a:ext cx="82296" cy="82296"/>
           </a:xfrm>
           <a:prstGeom prst="ellipse">
@@ -7572,13 +7934,13 @@
       </p:sp>
       <p:sp>
         <p:nvSpPr>
-          <p:cNvPr id="27" name="TextBox 26"/>
+          <p:cNvPr id="31" name="TextBox 30"/>
           <p:cNvSpPr txBox="1"/>
           <p:nvPr/>
         </p:nvSpPr>
         <p:spPr>
           <a:xfrm>
-            <a:off x="1078992" y="9281160"/>
+            <a:off x="1078992" y="6281928"/>
             <a:ext cx="9555480" cy="274320"/>
           </a:xfrm>
           <a:prstGeom prst="rect">
@@ -7602,20 +7964,185 @@
                 <a:ea typeface="Sarabun"/>
                 <a:cs typeface="Sarabun"/>
               </a:rPr>
-              <a:t>Random recall: I say a number in English. You say the Thai word before I show it. Seven. Ten. Eight. Six. Nine.</a:t>
-            </a:r>
-          </a:p>
-        </p:txBody>
-      </p:sp>
-      <p:sp>
-        <p:nvSpPr>
-          <p:cNvPr id="28" name="Oval 27"/>
+              <a:t>Pause-and-produce: Seven? </a:t>
+            </a:r>
+            <a:r>
+              <a:rPr sz="1500" b="0" i="0" lang="th-TH" altLang="en-US">
+                <a:solidFill>
+                  <a:srgbClr val="24333D"/>
+                </a:solidFill>
+                <a:latin typeface="Sarabun"/>
+                <a:ea typeface="Sarabun"/>
+                <a:cs typeface="Sarabun"/>
+              </a:rPr>
+              <a:t>เจ็ด</a:t>
+            </a:r>
+            <a:r>
+              <a:rPr sz="1500" b="0" i="1" lang="en-US" altLang="en-US">
+                <a:solidFill>
+                  <a:srgbClr val="566873"/>
+                </a:solidFill>
+                <a:latin typeface="Sarabun"/>
+                <a:ea typeface="Sarabun"/>
+                <a:cs typeface="Sarabun"/>
+              </a:rPr>
+              <a:t> (jèt)</a:t>
+            </a:r>
+            <a:r>
+              <a:rPr sz="1500" b="0" i="0" lang="en-US" altLang="en-US">
+                <a:solidFill>
+                  <a:srgbClr val="24333D"/>
+                </a:solidFill>
+                <a:latin typeface="Sarabun"/>
+                <a:ea typeface="Sarabun"/>
+                <a:cs typeface="Sarabun"/>
+              </a:rPr>
+              <a:t>. Ten? </a:t>
+            </a:r>
+            <a:r>
+              <a:rPr sz="1500" b="0" i="0" lang="th-TH" altLang="en-US">
+                <a:solidFill>
+                  <a:srgbClr val="24333D"/>
+                </a:solidFill>
+                <a:latin typeface="Sarabun"/>
+                <a:ea typeface="Sarabun"/>
+                <a:cs typeface="Sarabun"/>
+              </a:rPr>
+              <a:t>สิบ</a:t>
+            </a:r>
+            <a:r>
+              <a:rPr sz="1500" b="0" i="1" lang="en-US" altLang="en-US">
+                <a:solidFill>
+                  <a:srgbClr val="566873"/>
+                </a:solidFill>
+                <a:latin typeface="Sarabun"/>
+                <a:ea typeface="Sarabun"/>
+                <a:cs typeface="Sarabun"/>
+              </a:rPr>
+              <a:t> (sìp)</a:t>
+            </a:r>
+            <a:r>
+              <a:rPr sz="1500" b="0" i="0" lang="en-US" altLang="en-US">
+                <a:solidFill>
+                  <a:srgbClr val="24333D"/>
+                </a:solidFill>
+                <a:latin typeface="Sarabun"/>
+                <a:ea typeface="Sarabun"/>
+                <a:cs typeface="Sarabun"/>
+              </a:rPr>
+              <a:t>. Eight? </a:t>
+            </a:r>
+            <a:r>
+              <a:rPr sz="1500" b="0" i="0" lang="th-TH" altLang="en-US">
+                <a:solidFill>
+                  <a:srgbClr val="24333D"/>
+                </a:solidFill>
+                <a:latin typeface="Sarabun"/>
+                <a:ea typeface="Sarabun"/>
+                <a:cs typeface="Sarabun"/>
+              </a:rPr>
+              <a:t>แปด</a:t>
+            </a:r>
+            <a:r>
+              <a:rPr sz="1500" b="0" i="1" lang="en-US" altLang="en-US">
+                <a:solidFill>
+                  <a:srgbClr val="566873"/>
+                </a:solidFill>
+                <a:latin typeface="Sarabun"/>
+                <a:ea typeface="Sarabun"/>
+                <a:cs typeface="Sarabun"/>
+              </a:rPr>
+              <a:t> (bpàet)</a:t>
+            </a:r>
+            <a:r>
+              <a:rPr sz="1500" b="0" i="0" lang="en-US" altLang="en-US">
+                <a:solidFill>
+                  <a:srgbClr val="24333D"/>
+                </a:solidFill>
+                <a:latin typeface="Sarabun"/>
+                <a:ea typeface="Sarabun"/>
+                <a:cs typeface="Sarabun"/>
+              </a:rPr>
+              <a:t>. Six? </a:t>
+            </a:r>
+            <a:r>
+              <a:rPr sz="1500" b="0" i="0" lang="th-TH" altLang="en-US">
+                <a:solidFill>
+                  <a:srgbClr val="24333D"/>
+                </a:solidFill>
+                <a:latin typeface="Sarabun"/>
+                <a:ea typeface="Sarabun"/>
+                <a:cs typeface="Sarabun"/>
+              </a:rPr>
+              <a:t>หก</a:t>
+            </a:r>
+            <a:r>
+              <a:rPr sz="1500" b="0" i="1" lang="en-US" altLang="en-US">
+                <a:solidFill>
+                  <a:srgbClr val="566873"/>
+                </a:solidFill>
+                <a:latin typeface="Sarabun"/>
+                <a:ea typeface="Sarabun"/>
+                <a:cs typeface="Sarabun"/>
+              </a:rPr>
+              <a:t> (hòk)</a:t>
+            </a:r>
+            <a:r>
+              <a:rPr sz="1500" b="0" i="0" lang="en-US" altLang="en-US">
+                <a:solidFill>
+                  <a:srgbClr val="24333D"/>
+                </a:solidFill>
+                <a:latin typeface="Sarabun"/>
+                <a:ea typeface="Sarabun"/>
+                <a:cs typeface="Sarabun"/>
+              </a:rPr>
+              <a:t>. Nine? </a:t>
+            </a:r>
+            <a:r>
+              <a:rPr sz="1500" b="0" i="0" lang="th-TH" altLang="en-US">
+                <a:solidFill>
+                  <a:srgbClr val="24333D"/>
+                </a:solidFill>
+                <a:latin typeface="Sarabun"/>
+                <a:ea typeface="Sarabun"/>
+                <a:cs typeface="Sarabun"/>
+              </a:rPr>
+              <a:t>เก้า</a:t>
+            </a:r>
+            <a:r>
+              <a:rPr sz="1500" b="0" i="1" lang="en-US" altLang="en-US">
+                <a:solidFill>
+                  <a:srgbClr val="566873"/>
+                </a:solidFill>
+                <a:latin typeface="Sarabun"/>
+                <a:ea typeface="Sarabun"/>
+                <a:cs typeface="Sarabun"/>
+              </a:rPr>
+              <a:t> (gâo)</a:t>
+            </a:r>
+            <a:r>
+              <a:rPr sz="1500" b="0" i="0" lang="en-US" altLang="en-US">
+                <a:solidFill>
+                  <a:srgbClr val="24333D"/>
+                </a:solidFill>
+                <a:latin typeface="Sarabun"/>
+                <a:ea typeface="Sarabun"/>
+                <a:cs typeface="Sarabun"/>
+              </a:rPr>
+              <a:t>.</a:t>
+            </a:r>
+          </a:p>
+        </p:txBody>
+      </p:sp>
+      <p:sp>
+        <p:nvSpPr>
+          <p:cNvPr id="32" name="Oval 31"/>
           <p:cNvSpPr/>
           <p:nvPr/>
         </p:nvSpPr>
         <p:spPr>
           <a:xfrm>
-            <a:off x="932688" y="9683496"/>
+            <a:off x="932688" y="6684264"/>
             <a:ext cx="82296" cy="82296"/>
           </a:xfrm>
           <a:prstGeom prst="ellipse">
@@ -7652,13 +8179,13 @@
       </p:sp>
       <p:sp>
         <p:nvSpPr>
-          <p:cNvPr id="29" name="TextBox 28"/>
+          <p:cNvPr id="33" name="TextBox 32"/>
           <p:cNvSpPr txBox="1"/>
           <p:nvPr/>
         </p:nvSpPr>
         <p:spPr>
           <a:xfrm>
-            <a:off x="1078992" y="9592056"/>
+            <a:off x="1078992" y="6592824"/>
             <a:ext cx="9555480" cy="274320"/>
           </a:xfrm>
           <a:prstGeom prst="rect">
@@ -7682,7 +8209,7 @@
                 <a:ea typeface="Sarabun"/>
                 <a:cs typeface="Sarabun"/>
               </a:rPr>
-              <a:t>Substitution drill: I start a room-number code. You finish it. </a:t>
+              <a:t>Substitution: what floor? Floor 9? </a:t>
             </a:r>
             <a:r>
               <a:rPr sz="1500" b="0" i="0" lang="th-TH" altLang="en-US">
@@ -7693,7 +8220,7 @@
                 <a:ea typeface="Sarabun"/>
                 <a:cs typeface="Sarabun"/>
               </a:rPr>
-              <a:t>ห้า</a:t>
+              <a:t>เก้า</a:t>
             </a:r>
             <a:r>
               <a:rPr sz="1500" b="0" i="1" lang="en-US" altLang="en-US">
@@ -7704,7 +8231,7 @@
                 <a:ea typeface="Sarabun"/>
                 <a:cs typeface="Sarabun"/>
               </a:rPr>
-              <a:t> (hâa)</a:t>
+              <a:t> (gâo)</a:t>
             </a:r>
             <a:r>
               <a:rPr sz="1500" b="0" i="0" lang="en-US" altLang="en-US">
@@ -7715,7 +8242,7 @@
                 <a:ea typeface="Sarabun"/>
                 <a:cs typeface="Sarabun"/>
               </a:rPr>
-              <a:t>-</a:t>
+              <a:t>. Floor 6? </a:t>
             </a:r>
             <a:r>
               <a:rPr sz="1500" b="0" i="0" lang="th-TH" altLang="en-US">
@@ -7726,7 +8253,7 @@
                 <a:ea typeface="Sarabun"/>
                 <a:cs typeface="Sarabun"/>
               </a:rPr>
-              <a:t>ศูนย์</a:t>
+              <a:t>หก</a:t>
             </a:r>
             <a:r>
               <a:rPr sz="1500" b="0" i="1" lang="en-US" altLang="en-US">
@@ -7737,7 +8264,7 @@
                 <a:ea typeface="Sarabun"/>
                 <a:cs typeface="Sarabun"/>
               </a:rPr>
-              <a:t> (sǔun)</a:t>
+              <a:t> (hòk)</a:t>
             </a:r>
             <a:r>
               <a:rPr sz="1500" b="0" i="0" lang="en-US" altLang="en-US">
@@ -7748,7 +8275,7 @@
                 <a:ea typeface="Sarabun"/>
                 <a:cs typeface="Sarabun"/>
               </a:rPr>
-              <a:t>-... say </a:t>
+              <a:t>. Floor 10? </a:t>
             </a:r>
             <a:r>
               <a:rPr sz="1500" b="0" i="0" lang="th-TH" altLang="en-US">
@@ -7759,7 +8286,7 @@
                 <a:ea typeface="Sarabun"/>
                 <a:cs typeface="Sarabun"/>
               </a:rPr>
-              <a:t>สอง</a:t>
+              <a:t>สิบ</a:t>
             </a:r>
             <a:r>
               <a:rPr sz="1500" b="0" i="1" lang="en-US" altLang="en-US">
@@ -7770,205 +8297,7 @@
                 <a:ea typeface="Sarabun"/>
                 <a:cs typeface="Sarabun"/>
               </a:rPr>
-              <a:t> (sǎawng)</a:t>
-            </a:r>
-            <a:r>
-              <a:rPr sz="1500" b="0" i="0" lang="en-US" altLang="en-US">
-                <a:solidFill>
-                  <a:srgbClr val="24333D"/>
-                </a:solidFill>
-                <a:latin typeface="Sarabun"/>
-                <a:ea typeface="Sarabun"/>
-                <a:cs typeface="Sarabun"/>
-              </a:rPr>
-              <a:t>. Now </a:t>
-            </a:r>
-            <a:r>
-              <a:rPr sz="1500" b="0" i="0" lang="th-TH" altLang="en-US">
-                <a:solidFill>
-                  <a:srgbClr val="24333D"/>
-                </a:solidFill>
-                <a:latin typeface="Sarabun"/>
-                <a:ea typeface="Sarabun"/>
-                <a:cs typeface="Sarabun"/>
-              </a:rPr>
-              <a:t>สาม</a:t>
-            </a:r>
-            <a:r>
-              <a:rPr sz="1500" b="0" i="1" lang="en-US" altLang="en-US">
-                <a:solidFill>
-                  <a:srgbClr val="566873"/>
-                </a:solidFill>
-                <a:latin typeface="Sarabun"/>
-                <a:ea typeface="Sarabun"/>
-                <a:cs typeface="Sarabun"/>
-              </a:rPr>
-              <a:t> (sǎam)</a:t>
-            </a:r>
-            <a:r>
-              <a:rPr sz="1500" b="0" i="0" lang="en-US" altLang="en-US">
-                <a:solidFill>
-                  <a:srgbClr val="24333D"/>
-                </a:solidFill>
-                <a:latin typeface="Sarabun"/>
-                <a:ea typeface="Sarabun"/>
-                <a:cs typeface="Sarabun"/>
-              </a:rPr>
-              <a:t>-</a:t>
-            </a:r>
-            <a:r>
-              <a:rPr sz="1500" b="0" i="0" lang="th-TH" altLang="en-US">
-                <a:solidFill>
-                  <a:srgbClr val="24333D"/>
-                </a:solidFill>
-                <a:latin typeface="Sarabun"/>
-                <a:ea typeface="Sarabun"/>
-                <a:cs typeface="Sarabun"/>
-              </a:rPr>
-              <a:t>ศูนย์</a:t>
-            </a:r>
-            <a:r>
-              <a:rPr sz="1500" b="0" i="1" lang="en-US" altLang="en-US">
-                <a:solidFill>
-                  <a:srgbClr val="566873"/>
-                </a:solidFill>
-                <a:latin typeface="Sarabun"/>
-                <a:ea typeface="Sarabun"/>
-                <a:cs typeface="Sarabun"/>
-              </a:rPr>
-              <a:t> (sǔun)</a:t>
-            </a:r>
-            <a:r>
-              <a:rPr sz="1500" b="0" i="0" lang="en-US" altLang="en-US">
-                <a:solidFill>
-                  <a:srgbClr val="24333D"/>
-                </a:solidFill>
-                <a:latin typeface="Sarabun"/>
-                <a:ea typeface="Sarabun"/>
-                <a:cs typeface="Sarabun"/>
-              </a:rPr>
-              <a:t>-... say </a:t>
-            </a:r>
-            <a:r>
-              <a:rPr sz="1500" b="0" i="0" lang="th-TH" altLang="en-US">
-                <a:solidFill>
-                  <a:srgbClr val="24333D"/>
-                </a:solidFill>
-                <a:latin typeface="Sarabun"/>
-                <a:ea typeface="Sarabun"/>
-                <a:cs typeface="Sarabun"/>
-              </a:rPr>
-              <a:t>หก</a:t>
-            </a:r>
-            <a:r>
-              <a:rPr sz="1500" b="0" i="1" lang="en-US" altLang="en-US">
-                <a:solidFill>
-                  <a:srgbClr val="566873"/>
-                </a:solidFill>
-                <a:latin typeface="Sarabun"/>
-                <a:ea typeface="Sarabun"/>
-                <a:cs typeface="Sarabun"/>
-              </a:rPr>
-              <a:t> (hòk)</a:t>
-            </a:r>
-            <a:r>
-              <a:rPr sz="1500" b="0" i="0" lang="en-US" altLang="en-US">
-                <a:solidFill>
-                  <a:srgbClr val="24333D"/>
-                </a:solidFill>
-                <a:latin typeface="Sarabun"/>
-                <a:ea typeface="Sarabun"/>
-                <a:cs typeface="Sarabun"/>
-              </a:rPr>
-              <a:t>. Now </a:t>
-            </a:r>
-            <a:r>
-              <a:rPr sz="1500" b="0" i="0" lang="th-TH" altLang="en-US">
-                <a:solidFill>
-                  <a:srgbClr val="24333D"/>
-                </a:solidFill>
-                <a:latin typeface="Sarabun"/>
-                <a:ea typeface="Sarabun"/>
-                <a:cs typeface="Sarabun"/>
-              </a:rPr>
-              <a:t>เก้า</a:t>
-            </a:r>
-            <a:r>
-              <a:rPr sz="1500" b="0" i="1" lang="en-US" altLang="en-US">
-                <a:solidFill>
-                  <a:srgbClr val="566873"/>
-                </a:solidFill>
-                <a:latin typeface="Sarabun"/>
-                <a:ea typeface="Sarabun"/>
-                <a:cs typeface="Sarabun"/>
-              </a:rPr>
-              <a:t> (gâo)</a:t>
-            </a:r>
-            <a:r>
-              <a:rPr sz="1500" b="0" i="0" lang="en-US" altLang="en-US">
-                <a:solidFill>
-                  <a:srgbClr val="24333D"/>
-                </a:solidFill>
-                <a:latin typeface="Sarabun"/>
-                <a:ea typeface="Sarabun"/>
-                <a:cs typeface="Sarabun"/>
-              </a:rPr>
-              <a:t>-</a:t>
-            </a:r>
-            <a:r>
-              <a:rPr sz="1500" b="0" i="0" lang="th-TH" altLang="en-US">
-                <a:solidFill>
-                  <a:srgbClr val="24333D"/>
-                </a:solidFill>
-                <a:latin typeface="Sarabun"/>
-                <a:ea typeface="Sarabun"/>
-                <a:cs typeface="Sarabun"/>
-              </a:rPr>
-              <a:t>ศูนย์</a:t>
-            </a:r>
-            <a:r>
-              <a:rPr sz="1500" b="0" i="1" lang="en-US" altLang="en-US">
-                <a:solidFill>
-                  <a:srgbClr val="566873"/>
-                </a:solidFill>
-                <a:latin typeface="Sarabun"/>
-                <a:ea typeface="Sarabun"/>
-                <a:cs typeface="Sarabun"/>
-              </a:rPr>
-              <a:t> (sǔun)</a:t>
-            </a:r>
-            <a:r>
-              <a:rPr sz="1500" b="0" i="0" lang="en-US" altLang="en-US">
-                <a:solidFill>
-                  <a:srgbClr val="24333D"/>
-                </a:solidFill>
-                <a:latin typeface="Sarabun"/>
-                <a:ea typeface="Sarabun"/>
-                <a:cs typeface="Sarabun"/>
-              </a:rPr>
-              <a:t>-... say </a:t>
-            </a:r>
-            <a:r>
-              <a:rPr sz="1500" b="0" i="0" lang="th-TH" altLang="en-US">
-                <a:solidFill>
-                  <a:srgbClr val="24333D"/>
-                </a:solidFill>
-                <a:latin typeface="Sarabun"/>
-                <a:ea typeface="Sarabun"/>
-                <a:cs typeface="Sarabun"/>
-              </a:rPr>
-              <a:t>แปด</a:t>
-            </a:r>
-            <a:r>
-              <a:rPr sz="1500" b="0" i="1" lang="en-US" altLang="en-US">
-                <a:solidFill>
-                  <a:srgbClr val="566873"/>
-                </a:solidFill>
-                <a:latin typeface="Sarabun"/>
-                <a:ea typeface="Sarabun"/>
-                <a:cs typeface="Sarabun"/>
-              </a:rPr>
-              <a:t> (bpàet)</a:t>
+              <a:t> (sìp)</a:t>
             </a:r>
             <a:r>
               <a:rPr sz="1500" b="0" i="0" lang="en-US" altLang="en-US">
@@ -8179,7 +8508,7 @@
                 <a:ea typeface="Sarabun"/>
                 <a:cs typeface="Sarabun"/>
               </a:rPr>
-              <a:t>Ask for a number and say your age</a:t>
+              <a:t>Ask what number and say your age</a:t>
             </a:r>
           </a:p>
         </p:txBody>
@@ -8367,7 +8696,7 @@
         </p:nvSpPr>
         <p:spPr>
           <a:xfrm>
-            <a:off x="731520" y="3081528"/>
+            <a:off x="731520" y="2606040"/>
             <a:ext cx="3889080" cy="1572768"/>
           </a:xfrm>
           <a:prstGeom prst="roundRect">
@@ -8414,7 +8743,7 @@
         </p:nvSpPr>
         <p:spPr>
           <a:xfrm>
-            <a:off x="868680" y="3282696"/>
+            <a:off x="868680" y="2807208"/>
             <a:ext cx="73152" cy="1143000"/>
           </a:xfrm>
           <a:prstGeom prst="rect">
@@ -8457,7 +8786,7 @@
         </p:nvSpPr>
         <p:spPr>
           <a:xfrm>
-            <a:off x="1078992" y="3191256"/>
+            <a:off x="1078992" y="2715768"/>
             <a:ext cx="3431880" cy="658368"/>
           </a:xfrm>
           <a:prstGeom prst="rect">
@@ -8481,7 +8810,7 @@
                 <a:ea typeface="Sarabun"/>
                 <a:cs typeface="Sarabun"/>
               </a:rPr>
-              <a:t>ฉันอายุ...ปี</a:t>
+              <a:t>อายุ...ปี</a:t>
             </a:r>
             <a:r>
               <a:rPr sz="1980" b="0" i="1" lang="en-US" altLang="en-US">
@@ -8492,7 +8821,7 @@
                 <a:ea typeface="Sarabun"/>
                 <a:cs typeface="Sarabun"/>
               </a:rPr>
-              <a:t> (chǎn aa-yú ... bpii)</a:t>
+              <a:t> (aa-yú ... bpii)</a:t>
             </a:r>
           </a:p>
         </p:txBody>
@@ -8505,7 +8834,7 @@
         </p:nvSpPr>
         <p:spPr>
           <a:xfrm>
-            <a:off x="1078992" y="3959352"/>
+            <a:off x="1078992" y="3483864"/>
             <a:ext cx="3431880" cy="274320"/>
           </a:xfrm>
           <a:prstGeom prst="rect">
@@ -8529,7 +8858,7 @@
                 <a:ea typeface="Sarabun"/>
                 <a:cs typeface="Sarabun"/>
               </a:rPr>
-              <a:t>I am ... years old</a:t>
+              <a:t>... years old</a:t>
             </a:r>
           </a:p>
         </p:txBody>
@@ -8542,7 +8871,7 @@
         </p:nvSpPr>
         <p:spPr>
           <a:xfrm>
-            <a:off x="731520" y="4837176"/>
+            <a:off x="731520" y="3886200"/>
             <a:ext cx="3889080" cy="1572768"/>
           </a:xfrm>
           <a:prstGeom prst="roundRect">
@@ -8589,7 +8918,7 @@
         </p:nvSpPr>
         <p:spPr>
           <a:xfrm>
-            <a:off x="868680" y="5038344"/>
+            <a:off x="868680" y="4087368"/>
             <a:ext cx="73152" cy="1143000"/>
           </a:xfrm>
           <a:prstGeom prst="rect">
@@ -8632,7 +8961,7 @@
         </p:nvSpPr>
         <p:spPr>
           <a:xfrm>
-            <a:off x="1078992" y="4946904"/>
+            <a:off x="1078992" y="3995928"/>
             <a:ext cx="3431880" cy="658368"/>
           </a:xfrm>
           <a:prstGeom prst="rect">
@@ -8656,7 +8985,7 @@
                 <a:ea typeface="Sarabun"/>
                 <a:cs typeface="Sarabun"/>
               </a:rPr>
-              <a:t>เขาอายุ...ปี</a:t>
+              <a:t>ผมอายุ...ปี</a:t>
             </a:r>
             <a:r>
               <a:rPr sz="1980" b="0" i="1" lang="en-US" altLang="en-US">
@@ -8667,7 +8996,7 @@
                 <a:ea typeface="Sarabun"/>
                 <a:cs typeface="Sarabun"/>
               </a:rPr>
-              <a:t> (khǎo aa-yú ... bpii)</a:t>
+              <a:t> (phǒm aa-yú ... bpii)</a:t>
             </a:r>
           </a:p>
         </p:txBody>
@@ -8680,7 +9009,7 @@
         </p:nvSpPr>
         <p:spPr>
           <a:xfrm>
-            <a:off x="1078992" y="5715000"/>
+            <a:off x="1078992" y="4764024"/>
             <a:ext cx="3431880" cy="274320"/>
           </a:xfrm>
           <a:prstGeom prst="rect">
@@ -8704,7 +9033,7 @@
                 <a:ea typeface="Sarabun"/>
                 <a:cs typeface="Sarabun"/>
               </a:rPr>
-              <a:t>he/she is ... years old</a:t>
+              <a:t>I am ... years old (male)</a:t>
             </a:r>
           </a:p>
         </p:txBody>
@@ -8717,8 +9046,8 @@
         </p:nvSpPr>
         <p:spPr>
           <a:xfrm>
-            <a:off x="731520" y="6775704"/>
-            <a:ext cx="10058400" cy="1636776"/>
+            <a:off x="731520" y="5166360"/>
+            <a:ext cx="3889080" cy="1572768"/>
           </a:xfrm>
           <a:prstGeom prst="roundRect">
             <a:avLst>
@@ -8758,14 +9087,57 @@
       </p:sp>
       <p:sp>
         <p:nvSpPr>
-          <p:cNvPr id="19" name="TextBox 18"/>
+          <p:cNvPr id="19" name="Rectangle 18"/>
+          <p:cNvSpPr/>
+          <p:nvPr/>
+        </p:nvSpPr>
+        <p:spPr>
+          <a:xfrm>
+            <a:off x="868680" y="5367528"/>
+            <a:ext cx="73152" cy="1143000"/>
+          </a:xfrm>
+          <a:prstGeom prst="rect">
+            <a:avLst/>
+          </a:prstGeom>
+          <a:solidFill>
+            <a:srgbClr val="355C7D"/>
+          </a:solidFill>
+          <a:ln>
+            <a:noFill/>
+          </a:ln>
+        </p:spPr>
+        <p:style>
+          <a:lnRef idx="1">
+            <a:schemeClr val="accent1"/>
+          </a:lnRef>
+          <a:fillRef idx="3">
+            <a:schemeClr val="accent1"/>
+          </a:fillRef>
+          <a:effectRef idx="2">
+            <a:schemeClr val="accent1"/>
+          </a:effectRef>
+          <a:fontRef idx="minor">
+            <a:schemeClr val="lt1"/>
+          </a:fontRef>
+        </p:style>
+        <p:txBody>
+          <a:bodyPr rtlCol="0" anchor="ctr"/>
+          <a:lstStyle/>
+          <a:p>
+            <a:pPr algn="ctr"/>
+          </a:p>
+        </p:txBody>
+      </p:sp>
+      <p:sp>
+        <p:nvSpPr>
+          <p:cNvPr id="20" name="TextBox 19"/>
           <p:cNvSpPr txBox="1"/>
           <p:nvPr/>
         </p:nvSpPr>
         <p:spPr>
           <a:xfrm>
-            <a:off x="932688" y="6922008"/>
-            <a:ext cx="9692640" cy="228600"/>
+            <a:off x="1078992" y="5276088"/>
+            <a:ext cx="3431880" cy="658368"/>
           </a:xfrm>
           <a:prstGeom prst="rect">
             <a:avLst/>
@@ -8780,6 +9152,138 @@
           <a:p>
             <a:pPr algn="l"/>
             <a:r>
+              <a:rPr sz="3200" b="1" i="0" lang="th-TH" altLang="en-US">
+                <a:solidFill>
+                  <a:srgbClr val="24333D"/>
+                </a:solidFill>
+                <a:latin typeface="Sarabun"/>
+                <a:ea typeface="Sarabun"/>
+                <a:cs typeface="Sarabun"/>
+              </a:rPr>
+              <a:t>ฉันอายุ...ปี</a:t>
+            </a:r>
+            <a:r>
+              <a:rPr sz="1980" b="0" i="1" lang="en-US" altLang="en-US">
+                <a:solidFill>
+                  <a:srgbClr val="566873"/>
+                </a:solidFill>
+                <a:latin typeface="Sarabun"/>
+                <a:ea typeface="Sarabun"/>
+                <a:cs typeface="Sarabun"/>
+              </a:rPr>
+              <a:t> (chǎn aa-yú ... bpii)</a:t>
+            </a:r>
+          </a:p>
+        </p:txBody>
+      </p:sp>
+      <p:sp>
+        <p:nvSpPr>
+          <p:cNvPr id="21" name="TextBox 20"/>
+          <p:cNvSpPr txBox="1"/>
+          <p:nvPr/>
+        </p:nvSpPr>
+        <p:spPr>
+          <a:xfrm>
+            <a:off x="1078992" y="6044184"/>
+            <a:ext cx="3431880" cy="274320"/>
+          </a:xfrm>
+          <a:prstGeom prst="rect">
+            <a:avLst/>
+          </a:prstGeom>
+          <a:noFill/>
+        </p:spPr>
+        <p:txBody>
+          <a:bodyPr wrap="square" anchor="t">
+            <a:spAutoFit/>
+          </a:bodyPr>
+          <a:lstStyle/>
+          <a:p>
+            <a:pPr algn="l"/>
+            <a:r>
+              <a:rPr sz="1500" b="0" i="0" lang="en-US" altLang="en-US">
+                <a:solidFill>
+                  <a:srgbClr val="82909A"/>
+                </a:solidFill>
+                <a:latin typeface="Sarabun"/>
+                <a:ea typeface="Sarabun"/>
+                <a:cs typeface="Sarabun"/>
+              </a:rPr>
+              <a:t>I am ... years old</a:t>
+            </a:r>
+          </a:p>
+        </p:txBody>
+      </p:sp>
+      <p:sp>
+        <p:nvSpPr>
+          <p:cNvPr id="22" name="Rounded Rectangle 21"/>
+          <p:cNvSpPr/>
+          <p:nvPr/>
+        </p:nvSpPr>
+        <p:spPr>
+          <a:xfrm>
+            <a:off x="731520" y="6629400"/>
+            <a:ext cx="10058400" cy="1636776"/>
+          </a:xfrm>
+          <a:prstGeom prst="roundRect">
+            <a:avLst>
+              <a:gd name="adj" fmla="val 6000"/>
+            </a:avLst>
+          </a:prstGeom>
+          <a:solidFill>
+            <a:srgbClr val="FFFFFF"/>
+          </a:solidFill>
+          <a:ln>
+            <a:solidFill>
+              <a:srgbClr val="D7DEE3"/>
+            </a:solidFill>
+          </a:ln>
+        </p:spPr>
+        <p:style>
+          <a:lnRef idx="1">
+            <a:schemeClr val="accent1"/>
+          </a:lnRef>
+          <a:fillRef idx="3">
+            <a:schemeClr val="accent1"/>
+          </a:fillRef>
+          <a:effectRef idx="2">
+            <a:schemeClr val="accent1"/>
+          </a:effectRef>
+          <a:fontRef idx="minor">
+            <a:schemeClr val="lt1"/>
+          </a:fontRef>
+        </p:style>
+        <p:txBody>
+          <a:bodyPr rtlCol="0" anchor="ctr"/>
+          <a:lstStyle/>
+          <a:p>
+            <a:pPr algn="ctr"/>
+          </a:p>
+        </p:txBody>
+      </p:sp>
+      <p:sp>
+        <p:nvSpPr>
+          <p:cNvPr id="23" name="TextBox 22"/>
+          <p:cNvSpPr txBox="1"/>
+          <p:nvPr/>
+        </p:nvSpPr>
+        <p:spPr>
+          <a:xfrm>
+            <a:off x="932688" y="6775704"/>
+            <a:ext cx="9692640" cy="228600"/>
+          </a:xfrm>
+          <a:prstGeom prst="rect">
+            <a:avLst/>
+          </a:prstGeom>
+          <a:noFill/>
+        </p:spPr>
+        <p:txBody>
+          <a:bodyPr wrap="square" anchor="t">
+            <a:spAutoFit/>
+          </a:bodyPr>
+          <a:lstStyle/>
+          <a:p>
+            <a:pPr algn="l"/>
+            <a:r>
               <a:rPr sz="1500" b="1" i="0" lang="en-US" altLang="en-US">
                 <a:solidFill>
                   <a:srgbClr val="C96F4A"/>
@@ -8795,13 +9299,13 @@
       </p:sp>
       <p:sp>
         <p:nvSpPr>
-          <p:cNvPr id="20" name="Oval 19"/>
+          <p:cNvPr id="24" name="Oval 23"/>
           <p:cNvSpPr/>
           <p:nvPr/>
         </p:nvSpPr>
         <p:spPr>
           <a:xfrm>
-            <a:off x="932688" y="7306056"/>
+            <a:off x="932688" y="7159752"/>
             <a:ext cx="82296" cy="82296"/>
           </a:xfrm>
           <a:prstGeom prst="ellipse">
@@ -8838,13 +9342,13 @@
       </p:sp>
       <p:sp>
         <p:nvSpPr>
-          <p:cNvPr id="21" name="TextBox 20"/>
+          <p:cNvPr id="25" name="TextBox 24"/>
           <p:cNvSpPr txBox="1"/>
           <p:nvPr/>
         </p:nvSpPr>
         <p:spPr>
           <a:xfrm>
-            <a:off x="1078992" y="7214616"/>
+            <a:off x="1078992" y="7068312"/>
             <a:ext cx="9555480" cy="274320"/>
           </a:xfrm>
           <a:prstGeom prst="rect">
@@ -8868,7 +9372,7 @@
                 <a:ea typeface="Sarabun"/>
                 <a:cs typeface="Sarabun"/>
               </a:rPr>
-              <a:t>Prompt drill: I ask </a:t>
+              <a:t>Response-building: I ask </a:t>
             </a:r>
             <a:r>
               <a:rPr sz="1500" b="0" i="0" lang="th-TH" altLang="en-US">
@@ -8901,7 +9405,7 @@
                 <a:ea typeface="Sarabun"/>
                 <a:cs typeface="Sarabun"/>
               </a:rPr>
-              <a:t>. You answer with a digit string. Room 205? </a:t>
+              <a:t>. Room 409? </a:t>
             </a:r>
             <a:r>
               <a:rPr sz="1500" b="0" i="0" lang="th-TH" altLang="en-US">
@@ -8912,7 +9416,7 @@
                 <a:ea typeface="Sarabun"/>
                 <a:cs typeface="Sarabun"/>
               </a:rPr>
-              <a:t>สอง</a:t>
+              <a:t>สี่</a:t>
             </a:r>
             <a:r>
               <a:rPr sz="1500" b="0" i="1" lang="en-US" altLang="en-US">
@@ -8923,7 +9427,7 @@
                 <a:ea typeface="Sarabun"/>
                 <a:cs typeface="Sarabun"/>
               </a:rPr>
-              <a:t> (sǎawng)</a:t>
+              <a:t> (sìi)</a:t>
             </a:r>
             <a:r>
               <a:rPr sz="1500" b="0" i="0" lang="en-US" altLang="en-US">
@@ -8978,7 +9482,7 @@
                 <a:ea typeface="Sarabun"/>
                 <a:cs typeface="Sarabun"/>
               </a:rPr>
-              <a:t>ห้า</a:t>
+              <a:t>เก้า</a:t>
             </a:r>
             <a:r>
               <a:rPr sz="1500" b="0" i="1" lang="en-US" altLang="en-US">
@@ -8989,7 +9493,7 @@
                 <a:ea typeface="Sarabun"/>
                 <a:cs typeface="Sarabun"/>
               </a:rPr>
-              <a:t> (hâa)</a:t>
+              <a:t> (gâo)</a:t>
             </a:r>
             <a:r>
               <a:rPr sz="1500" b="0" i="0" lang="en-US" altLang="en-US">
@@ -9000,7 +9504,7 @@
                 <a:ea typeface="Sarabun"/>
                 <a:cs typeface="Sarabun"/>
               </a:rPr>
-              <a:t>. Room 409? </a:t>
+              <a:t>. Room 108? </a:t>
             </a:r>
             <a:r>
               <a:rPr sz="1500" b="0" i="0" lang="th-TH" altLang="en-US">
@@ -9011,7 +9515,7 @@
                 <a:ea typeface="Sarabun"/>
                 <a:cs typeface="Sarabun"/>
               </a:rPr>
-              <a:t>สี่</a:t>
+              <a:t>หนึ่ง</a:t>
             </a:r>
             <a:r>
               <a:rPr sz="1500" b="0" i="1" lang="en-US" altLang="en-US">
@@ -9022,7 +9526,7 @@
                 <a:ea typeface="Sarabun"/>
                 <a:cs typeface="Sarabun"/>
               </a:rPr>
-              <a:t> (sìi)</a:t>
+              <a:t> (nùeng)</a:t>
             </a:r>
             <a:r>
               <a:rPr sz="1500" b="0" i="0" lang="en-US" altLang="en-US">
@@ -9077,7 +9581,7 @@
                 <a:ea typeface="Sarabun"/>
                 <a:cs typeface="Sarabun"/>
               </a:rPr>
-              <a:t>เก้า</a:t>
+              <a:t>แปด</a:t>
             </a:r>
             <a:r>
               <a:rPr sz="1500" b="0" i="1" lang="en-US" altLang="en-US">
@@ -9088,7 +9592,7 @@
                 <a:ea typeface="Sarabun"/>
                 <a:cs typeface="Sarabun"/>
               </a:rPr>
-              <a:t> (gâo)</a:t>
+              <a:t> (bpàet)</a:t>
             </a:r>
             <a:r>
               <a:rPr sz="1500" b="0" i="0" lang="en-US" altLang="en-US">
@@ -9099,20 +9603,20 @@
                 <a:ea typeface="Sarabun"/>
                 <a:cs typeface="Sarabun"/>
               </a:rPr>
-              <a:t>. Your turn.</a:t>
-            </a:r>
-          </a:p>
-        </p:txBody>
-      </p:sp>
-      <p:sp>
-        <p:nvSpPr>
-          <p:cNvPr id="22" name="Oval 21"/>
+              <a:t>.</a:t>
+            </a:r>
+          </a:p>
+        </p:txBody>
+      </p:sp>
+      <p:sp>
+        <p:nvSpPr>
+          <p:cNvPr id="26" name="Oval 25"/>
           <p:cNvSpPr/>
           <p:nvPr/>
         </p:nvSpPr>
         <p:spPr>
           <a:xfrm>
-            <a:off x="932688" y="7616952"/>
+            <a:off x="932688" y="7470648"/>
             <a:ext cx="82296" cy="82296"/>
           </a:xfrm>
           <a:prstGeom prst="ellipse">
@@ -9149,13 +9653,13 @@
       </p:sp>
       <p:sp>
         <p:nvSpPr>
-          <p:cNvPr id="23" name="TextBox 22"/>
+          <p:cNvPr id="27" name="TextBox 26"/>
           <p:cNvSpPr txBox="1"/>
           <p:nvPr/>
         </p:nvSpPr>
         <p:spPr>
           <a:xfrm>
-            <a:off x="1078992" y="7525512"/>
+            <a:off x="1078992" y="7379208"/>
             <a:ext cx="9555480" cy="274320"/>
           </a:xfrm>
           <a:prstGeom prst="rect">
@@ -9179,7 +9683,7 @@
                 <a:ea typeface="Sarabun"/>
                 <a:cs typeface="Sarabun"/>
               </a:rPr>
-              <a:t>Pattern drill: I give you a number. You build the age sentence. Five? </a:t>
+              <a:t>Substitution: build your age sentence. Thirty? </a:t>
             </a:r>
             <a:r>
               <a:rPr sz="1500" b="0" i="0" lang="th-TH" altLang="en-US">
@@ -9190,6 +9694,39 @@
                 <a:ea typeface="Sarabun"/>
                 <a:cs typeface="Sarabun"/>
               </a:rPr>
+              <a:t>ผมอายุสามสิบปีครับ</a:t>
+            </a:r>
+            <a:r>
+              <a:rPr sz="1500" b="0" i="1" lang="en-US" altLang="en-US">
+                <a:solidFill>
+                  <a:srgbClr val="566873"/>
+                </a:solidFill>
+                <a:latin typeface="Sarabun"/>
+                <a:ea typeface="Sarabun"/>
+                <a:cs typeface="Sarabun"/>
+              </a:rPr>
+              <a:t> (phǒm aa-yú sǎam-sìp bpii khráp)</a:t>
+            </a:r>
+            <a:r>
+              <a:rPr sz="1500" b="0" i="0" lang="en-US" altLang="en-US">
+                <a:solidFill>
+                  <a:srgbClr val="24333D"/>
+                </a:solidFill>
+                <a:latin typeface="Sarabun"/>
+                <a:ea typeface="Sarabun"/>
+                <a:cs typeface="Sarabun"/>
+              </a:rPr>
+              <a:t>. Twenty-five? </a:t>
+            </a:r>
+            <a:r>
+              <a:rPr sz="1500" b="0" i="0" lang="th-TH" altLang="en-US">
+                <a:solidFill>
+                  <a:srgbClr val="24333D"/>
+                </a:solidFill>
+                <a:latin typeface="Sarabun"/>
+                <a:ea typeface="Sarabun"/>
+                <a:cs typeface="Sarabun"/>
+              </a:rPr>
               <a:t>ฉัน</a:t>
             </a:r>
             <a:r>
@@ -9215,6 +9752,17 @@
               <a:t>อายุ</a:t>
             </a:r>
             <a:r>
+              <a:rPr sz="1500" b="0" i="1" lang="en-US" altLang="en-US">
+                <a:solidFill>
+                  <a:srgbClr val="566873"/>
+                </a:solidFill>
+                <a:latin typeface="Sarabun"/>
+                <a:ea typeface="Sarabun"/>
+                <a:cs typeface="Sarabun"/>
+              </a:rPr>
+              <a:t> (aa-yú)</a:t>
+            </a:r>
+            <a:r>
               <a:rPr sz="1500" b="0" i="0" lang="th-TH" altLang="en-US">
                 <a:solidFill>
                   <a:srgbClr val="24333D"/>
@@ -9223,6 +9771,39 @@
                 <a:ea typeface="Sarabun"/>
                 <a:cs typeface="Sarabun"/>
               </a:rPr>
+              <a:t>ยี่</a:t>
+            </a:r>
+            <a:r>
+              <a:rPr sz="1500" b="0" i="0" lang="th-TH" altLang="en-US">
+                <a:solidFill>
+                  <a:srgbClr val="24333D"/>
+                </a:solidFill>
+                <a:latin typeface="Sarabun"/>
+                <a:ea typeface="Sarabun"/>
+                <a:cs typeface="Sarabun"/>
+              </a:rPr>
+              <a:t>สิบ</a:t>
+            </a:r>
+            <a:r>
+              <a:rPr sz="1500" b="0" i="1" lang="en-US" altLang="en-US">
+                <a:solidFill>
+                  <a:srgbClr val="566873"/>
+                </a:solidFill>
+                <a:latin typeface="Sarabun"/>
+                <a:ea typeface="Sarabun"/>
+                <a:cs typeface="Sarabun"/>
+              </a:rPr>
+              <a:t> (sìp)</a:t>
+            </a:r>
+            <a:r>
+              <a:rPr sz="1500" b="0" i="0" lang="th-TH" altLang="en-US">
+                <a:solidFill>
+                  <a:srgbClr val="24333D"/>
+                </a:solidFill>
+                <a:latin typeface="Sarabun"/>
+                <a:ea typeface="Sarabun"/>
+                <a:cs typeface="Sarabun"/>
+              </a:rPr>
               <a:t>ห้า</a:t>
             </a:r>
             <a:r>
@@ -9245,7 +9826,18 @@
                 <a:ea typeface="Sarabun"/>
                 <a:cs typeface="Sarabun"/>
               </a:rPr>
-              <a:t>ปี. Eight? </a:t>
+              <a:t>ปี</a:t>
+            </a:r>
+            <a:r>
+              <a:rPr sz="1500" b="0" i="1" lang="en-US" altLang="en-US">
+                <a:solidFill>
+                  <a:srgbClr val="566873"/>
+                </a:solidFill>
+                <a:latin typeface="Sarabun"/>
+                <a:ea typeface="Sarabun"/>
+                <a:cs typeface="Sarabun"/>
+              </a:rPr>
+              <a:t> (bpii)</a:t>
             </a:r>
             <a:r>
               <a:rPr sz="1500" b="0" i="0" lang="th-TH" altLang="en-US">
@@ -9256,108 +9848,20 @@
                 <a:ea typeface="Sarabun"/>
                 <a:cs typeface="Sarabun"/>
               </a:rPr>
-              <a:t>ฉันอายุแปดปี</a:t>
-            </a:r>
-            <a:r>
-              <a:rPr sz="1500" b="0" i="1" lang="en-US" altLang="en-US">
-                <a:solidFill>
-                  <a:srgbClr val="566873"/>
-                </a:solidFill>
-                <a:latin typeface="Sarabun"/>
-                <a:ea typeface="Sarabun"/>
-                <a:cs typeface="Sarabun"/>
-              </a:rPr>
-              <a:t> (chǎn aa-yú bpàet bpii)</a:t>
-            </a:r>
-            <a:r>
-              <a:rPr sz="1500" b="0" i="0" lang="en-US" altLang="en-US">
-                <a:solidFill>
-                  <a:srgbClr val="24333D"/>
-                </a:solidFill>
-                <a:latin typeface="Sarabun"/>
-                <a:ea typeface="Sarabun"/>
-                <a:cs typeface="Sarabun"/>
-              </a:rPr>
-              <a:t>. Ten? </a:t>
-            </a:r>
-            <a:r>
-              <a:rPr sz="1500" b="0" i="0" lang="th-TH" altLang="en-US">
-                <a:solidFill>
-                  <a:srgbClr val="24333D"/>
-                </a:solidFill>
-                <a:latin typeface="Sarabun"/>
-                <a:ea typeface="Sarabun"/>
-                <a:cs typeface="Sarabun"/>
-              </a:rPr>
-              <a:t>ฉัน</a:t>
-            </a:r>
-            <a:r>
-              <a:rPr sz="1500" b="0" i="1" lang="en-US" altLang="en-US">
-                <a:solidFill>
-                  <a:srgbClr val="566873"/>
-                </a:solidFill>
-                <a:latin typeface="Sarabun"/>
-                <a:ea typeface="Sarabun"/>
-                <a:cs typeface="Sarabun"/>
-              </a:rPr>
-              <a:t> (chǎn)</a:t>
-            </a:r>
-            <a:r>
-              <a:rPr sz="1500" b="0" i="0" lang="th-TH" altLang="en-US">
-                <a:solidFill>
-                  <a:srgbClr val="24333D"/>
-                </a:solidFill>
-                <a:latin typeface="Sarabun"/>
-                <a:ea typeface="Sarabun"/>
-                <a:cs typeface="Sarabun"/>
-              </a:rPr>
-              <a:t>อายุ</a:t>
-            </a:r>
-            <a:r>
-              <a:rPr sz="1500" b="0" i="0" lang="th-TH" altLang="en-US">
-                <a:solidFill>
-                  <a:srgbClr val="24333D"/>
-                </a:solidFill>
-                <a:latin typeface="Sarabun"/>
-                <a:ea typeface="Sarabun"/>
-                <a:cs typeface="Sarabun"/>
-              </a:rPr>
-              <a:t>สิบ</a:t>
-            </a:r>
-            <a:r>
-              <a:rPr sz="1500" b="0" i="1" lang="en-US" altLang="en-US">
-                <a:solidFill>
-                  <a:srgbClr val="566873"/>
-                </a:solidFill>
-                <a:latin typeface="Sarabun"/>
-                <a:ea typeface="Sarabun"/>
-                <a:cs typeface="Sarabun"/>
-              </a:rPr>
-              <a:t> (sìp)</a:t>
-            </a:r>
-            <a:r>
-              <a:rPr sz="1500" b="0" i="0" lang="th-TH" altLang="en-US">
-                <a:solidFill>
-                  <a:srgbClr val="24333D"/>
-                </a:solidFill>
-                <a:latin typeface="Sarabun"/>
-                <a:ea typeface="Sarabun"/>
-                <a:cs typeface="Sarabun"/>
-              </a:rPr>
-              <a:t>ปี.</a:t>
-            </a:r>
-          </a:p>
-        </p:txBody>
-      </p:sp>
-      <p:sp>
-        <p:nvSpPr>
-          <p:cNvPr id="24" name="Oval 23"/>
+              <a:t>ค่ะ.</a:t>
+            </a:r>
+          </a:p>
+        </p:txBody>
+      </p:sp>
+      <p:sp>
+        <p:nvSpPr>
+          <p:cNvPr id="28" name="Oval 27"/>
           <p:cNvSpPr/>
           <p:nvPr/>
         </p:nvSpPr>
         <p:spPr>
           <a:xfrm>
-            <a:off x="932688" y="7927848"/>
+            <a:off x="932688" y="7781544"/>
             <a:ext cx="82296" cy="82296"/>
           </a:xfrm>
           <a:prstGeom prst="ellipse">
@@ -9394,13 +9898,13 @@
       </p:sp>
       <p:sp>
         <p:nvSpPr>
-          <p:cNvPr id="25" name="TextBox 24"/>
+          <p:cNvPr id="29" name="TextBox 28"/>
           <p:cNvSpPr txBox="1"/>
           <p:nvPr/>
         </p:nvSpPr>
         <p:spPr>
           <a:xfrm>
-            <a:off x="1078992" y="7836408"/>
+            <a:off x="1078992" y="7690104"/>
             <a:ext cx="9555480" cy="274320"/>
           </a:xfrm>
           <a:prstGeom prst="rect">
@@ -9416,17 +9920,6 @@
           <a:p>
             <a:pPr algn="l"/>
             <a:r>
-              <a:rPr sz="1500" b="0" i="0" lang="en-US" altLang="en-US">
-                <a:solidFill>
-                  <a:srgbClr val="24333D"/>
-                </a:solidFill>
-                <a:latin typeface="Sarabun"/>
-                <a:ea typeface="Sarabun"/>
-                <a:cs typeface="Sarabun"/>
-              </a:rPr>
-              <a:t>Substitution drill: now change the pronoun. I say a number and a pronoun. </a:t>
-            </a:r>
-            <a:r>
               <a:rPr sz="1500" b="0" i="0" lang="th-TH" altLang="en-US">
                 <a:solidFill>
                   <a:srgbClr val="24333D"/>
@@ -9435,7 +9928,18 @@
                 <a:ea typeface="Sarabun"/>
                 <a:cs typeface="Sarabun"/>
               </a:rPr>
-              <a:t>เขา</a:t>
+              <a:t>Pause-and-produce: someone asks คุณ</a:t>
+            </a:r>
+            <a:r>
+              <a:rPr sz="1500" b="0" i="0" lang="th-TH" altLang="en-US">
+                <a:solidFill>
+                  <a:srgbClr val="24333D"/>
+                </a:solidFill>
+                <a:latin typeface="Sarabun"/>
+                <a:ea typeface="Sarabun"/>
+                <a:cs typeface="Sarabun"/>
+              </a:rPr>
+              <a:t>อายุ</a:t>
             </a:r>
             <a:r>
               <a:rPr sz="1500" b="0" i="1" lang="en-US" altLang="en-US">
@@ -9446,18 +9950,7 @@
                 <a:ea typeface="Sarabun"/>
                 <a:cs typeface="Sarabun"/>
               </a:rPr>
-              <a:t> (khǎo)</a:t>
-            </a:r>
-            <a:r>
-              <a:rPr sz="1500" b="0" i="0" lang="en-US" altLang="en-US">
-                <a:solidFill>
-                  <a:srgbClr val="24333D"/>
-                </a:solidFill>
-                <a:latin typeface="Sarabun"/>
-                <a:ea typeface="Sarabun"/>
-                <a:cs typeface="Sarabun"/>
-              </a:rPr>
-              <a:t>, seven? </a:t>
+              <a:t> (aa-yú)</a:t>
             </a:r>
             <a:r>
               <a:rPr sz="1500" b="0" i="0" lang="th-TH" altLang="en-US">
@@ -9468,95 +9961,7 @@
                 <a:ea typeface="Sarabun"/>
                 <a:cs typeface="Sarabun"/>
               </a:rPr>
-              <a:t>เขา</a:t>
-            </a:r>
-            <a:r>
-              <a:rPr sz="1500" b="0" i="1" lang="en-US" altLang="en-US">
-                <a:solidFill>
-                  <a:srgbClr val="566873"/>
-                </a:solidFill>
-                <a:latin typeface="Sarabun"/>
-                <a:ea typeface="Sarabun"/>
-                <a:cs typeface="Sarabun"/>
-              </a:rPr>
-              <a:t> (khǎo)</a:t>
-            </a:r>
-            <a:r>
-              <a:rPr sz="1500" b="0" i="0" lang="th-TH" altLang="en-US">
-                <a:solidFill>
-                  <a:srgbClr val="24333D"/>
-                </a:solidFill>
-                <a:latin typeface="Sarabun"/>
-                <a:ea typeface="Sarabun"/>
-                <a:cs typeface="Sarabun"/>
-              </a:rPr>
-              <a:t>อายุ</a:t>
-            </a:r>
-            <a:r>
-              <a:rPr sz="1500" b="0" i="0" lang="th-TH" altLang="en-US">
-                <a:solidFill>
-                  <a:srgbClr val="24333D"/>
-                </a:solidFill>
-                <a:latin typeface="Sarabun"/>
-                <a:ea typeface="Sarabun"/>
-                <a:cs typeface="Sarabun"/>
-              </a:rPr>
-              <a:t>เจ็ด</a:t>
-            </a:r>
-            <a:r>
-              <a:rPr sz="1500" b="0" i="1" lang="en-US" altLang="en-US">
-                <a:solidFill>
-                  <a:srgbClr val="566873"/>
-                </a:solidFill>
-                <a:latin typeface="Sarabun"/>
-                <a:ea typeface="Sarabun"/>
-                <a:cs typeface="Sarabun"/>
-              </a:rPr>
-              <a:t> (jèt)</a:t>
-            </a:r>
-            <a:r>
-              <a:rPr sz="1500" b="0" i="0" lang="th-TH" altLang="en-US">
-                <a:solidFill>
-                  <a:srgbClr val="24333D"/>
-                </a:solidFill>
-                <a:latin typeface="Sarabun"/>
-                <a:ea typeface="Sarabun"/>
-                <a:cs typeface="Sarabun"/>
-              </a:rPr>
-              <a:t>ปี. ผม, nine? ผมอายุ</a:t>
-            </a:r>
-            <a:r>
-              <a:rPr sz="1500" b="0" i="0" lang="th-TH" altLang="en-US">
-                <a:solidFill>
-                  <a:srgbClr val="24333D"/>
-                </a:solidFill>
-                <a:latin typeface="Sarabun"/>
-                <a:ea typeface="Sarabun"/>
-                <a:cs typeface="Sarabun"/>
-              </a:rPr>
-              <a:t>เก้า</a:t>
-            </a:r>
-            <a:r>
-              <a:rPr sz="1500" b="0" i="1" lang="en-US" altLang="en-US">
-                <a:solidFill>
-                  <a:srgbClr val="566873"/>
-                </a:solidFill>
-                <a:latin typeface="Sarabun"/>
-                <a:ea typeface="Sarabun"/>
-                <a:cs typeface="Sarabun"/>
-              </a:rPr>
-              <a:t> (gâo)</a:t>
-            </a:r>
-            <a:r>
-              <a:rPr sz="1500" b="0" i="0" lang="th-TH" altLang="en-US">
-                <a:solidFill>
-                  <a:srgbClr val="24333D"/>
-                </a:solidFill>
-                <a:latin typeface="Sarabun"/>
-                <a:ea typeface="Sarabun"/>
-                <a:cs typeface="Sarabun"/>
-              </a:rPr>
-              <a:t>ปี.</a:t>
+              <a:t>เท่าไหร่. Say your real age in Thai.</a:t>
             </a:r>
           </a:p>
         </p:txBody>
@@ -9756,7 +10161,62 @@
                 <a:ea typeface="Sarabun"/>
                 <a:cs typeface="Sarabun"/>
               </a:rPr>
-              <a:t>Numbers in real exchanges</a:t>
+              <a:t>Pronunciation: </a:t>
+            </a:r>
+            <a:r>
+              <a:rPr sz="3600" b="1" i="0" lang="th-TH" altLang="en-US">
+                <a:solidFill>
+                  <a:srgbClr val="24333D"/>
+                </a:solidFill>
+                <a:latin typeface="Sarabun"/>
+                <a:ea typeface="Sarabun"/>
+                <a:cs typeface="Sarabun"/>
+              </a:rPr>
+              <a:t>สี่</a:t>
+            </a:r>
+            <a:r>
+              <a:rPr sz="2230" b="0" i="1" lang="en-US" altLang="en-US">
+                <a:solidFill>
+                  <a:srgbClr val="566873"/>
+                </a:solidFill>
+                <a:latin typeface="Sarabun"/>
+                <a:ea typeface="Sarabun"/>
+                <a:cs typeface="Sarabun"/>
+              </a:rPr>
+              <a:t> (sìi)</a:t>
+            </a:r>
+            <a:r>
+              <a:rPr sz="3600" b="1" i="0" lang="en-US" altLang="en-US">
+                <a:solidFill>
+                  <a:srgbClr val="24333D"/>
+                </a:solidFill>
+                <a:latin typeface="Sarabun"/>
+                <a:ea typeface="Sarabun"/>
+                <a:cs typeface="Sarabun"/>
+              </a:rPr>
+              <a:t> vs </a:t>
+            </a:r>
+            <a:r>
+              <a:rPr sz="3600" b="1" i="0" lang="th-TH" altLang="en-US">
+                <a:solidFill>
+                  <a:srgbClr val="24333D"/>
+                </a:solidFill>
+                <a:latin typeface="Sarabun"/>
+                <a:ea typeface="Sarabun"/>
+                <a:cs typeface="Sarabun"/>
+              </a:rPr>
+              <a:t>สี</a:t>
+            </a:r>
+            <a:r>
+              <a:rPr sz="2230" b="0" i="1" lang="en-US" altLang="en-US">
+                <a:solidFill>
+                  <a:srgbClr val="566873"/>
+                </a:solidFill>
+                <a:latin typeface="Sarabun"/>
+                <a:ea typeface="Sarabun"/>
+                <a:cs typeface="Sarabun"/>
+              </a:rPr>
+              <a:t> (sǐi)</a:t>
             </a:r>
           </a:p>
         </p:txBody>
@@ -9883,7 +10343,7 @@
                 <a:ea typeface="Sarabun"/>
                 <a:cs typeface="Sarabun"/>
               </a:rPr>
-              <a:t>คุณอายุเท่าไหร่</a:t>
+              <a:t>สี่</a:t>
             </a:r>
             <a:r>
               <a:rPr sz="1980" b="0" i="1" lang="en-US" altLang="en-US">
@@ -9894,7 +10354,7 @@
                 <a:ea typeface="Sarabun"/>
                 <a:cs typeface="Sarabun"/>
               </a:rPr>
-              <a:t> (khun aa-yú thâo-rài)</a:t>
+              <a:t> (sìi)</a:t>
             </a:r>
           </a:p>
         </p:txBody>
@@ -9931,7 +10391,7 @@
                 <a:ea typeface="Sarabun"/>
                 <a:cs typeface="Sarabun"/>
               </a:rPr>
-              <a:t>how old are you?</a:t>
+              <a:t>four — low tone (voice stays low)</a:t>
             </a:r>
           </a:p>
         </p:txBody>
@@ -10058,7 +10518,7 @@
                 <a:ea typeface="Sarabun"/>
                 <a:cs typeface="Sarabun"/>
               </a:rPr>
-              <a:t>ฉันอายุแปดปี</a:t>
+              <a:t>สี</a:t>
             </a:r>
             <a:r>
               <a:rPr sz="1980" b="0" i="1" lang="en-US" altLang="en-US">
@@ -10069,7 +10529,7 @@
                 <a:ea typeface="Sarabun"/>
                 <a:cs typeface="Sarabun"/>
               </a:rPr>
-              <a:t> (chǎn aa-yú bpàet bpii)</a:t>
+              <a:t> (sǐi)</a:t>
             </a:r>
           </a:p>
         </p:txBody>
@@ -10106,7 +10566,7 @@
                 <a:ea typeface="Sarabun"/>
                 <a:cs typeface="Sarabun"/>
               </a:rPr>
-              <a:t>I am eight years old</a:t>
+              <a:t>colour — rising tone (voice lifts)</a:t>
             </a:r>
           </a:p>
         </p:txBody>
@@ -10233,7 +10693,7 @@
                 <a:ea typeface="Sarabun"/>
                 <a:cs typeface="Sarabun"/>
               </a:rPr>
-              <a:t>ขอโทษครับ / ค่ะ</a:t>
+              <a:t>เก้า</a:t>
             </a:r>
             <a:r>
               <a:rPr sz="1980" b="0" i="1" lang="en-US" altLang="en-US">
@@ -10244,7 +10704,7 @@
                 <a:ea typeface="Sarabun"/>
                 <a:cs typeface="Sarabun"/>
               </a:rPr>
-              <a:t> (khǎaw-thôot khráp / khâ)</a:t>
+              <a:t> (gâo)</a:t>
             </a:r>
           </a:p>
         </p:txBody>
@@ -10281,7 +10741,7 @@
                 <a:ea typeface="Sarabun"/>
                 <a:cs typeface="Sarabun"/>
               </a:rPr>
-              <a:t>excuse me (polite)</a:t>
+              <a:t>nine — falling tone (voice drops)</a:t>
             </a:r>
           </a:p>
         </p:txBody>
@@ -10295,7 +10755,7 @@
         <p:spPr>
           <a:xfrm>
             <a:off x="731520" y="6775704"/>
-            <a:ext cx="10058400" cy="1636776"/>
+            <a:ext cx="10058400" cy="1289304"/>
           </a:xfrm>
           <a:prstGeom prst="roundRect">
             <a:avLst>
@@ -10445,7 +10905,7 @@
                 <a:ea typeface="Sarabun"/>
                 <a:cs typeface="Sarabun"/>
               </a:rPr>
-              <a:t>Response-building drill: I ask </a:t>
+              <a:t>Tone echo: </a:t>
             </a:r>
             <a:r>
               <a:rPr sz="1500" b="0" i="0" lang="th-TH" altLang="en-US">
@@ -10456,7 +10916,7 @@
                 <a:ea typeface="Sarabun"/>
                 <a:cs typeface="Sarabun"/>
               </a:rPr>
-              <a:t>เบอร์อะไร</a:t>
+              <a:t>สี่</a:t>
             </a:r>
             <a:r>
               <a:rPr sz="1500" b="0" i="1" lang="en-US" altLang="en-US">
@@ -10467,7 +10927,18 @@
                 <a:ea typeface="Sarabun"/>
                 <a:cs typeface="Sarabun"/>
               </a:rPr>
-              <a:t> (ber à-rai)</a:t>
+              <a:t> (sìi)</a:t>
+            </a:r>
+            <a:r>
+              <a:rPr sz="1500" b="0" i="0" lang="en-US" altLang="en-US">
+                <a:solidFill>
+                  <a:srgbClr val="24333D"/>
+                </a:solidFill>
+                <a:latin typeface="Sarabun"/>
+                <a:ea typeface="Sarabun"/>
+                <a:cs typeface="Sarabun"/>
+              </a:rPr>
+              <a:t> sìi — repeat low. </a:t>
             </a:r>
             <a:r>
               <a:rPr sz="1500" b="0" i="0" lang="th-TH" altLang="en-US">
@@ -10478,18 +10949,7 @@
                 <a:ea typeface="Sarabun"/>
                 <a:cs typeface="Sarabun"/>
               </a:rPr>
-              <a:t>ครับ. You answer with room 601. Then I ask </a:t>
-            </a:r>
-            <a:r>
-              <a:rPr sz="1500" b="0" i="0" lang="th-TH" altLang="en-US">
-                <a:solidFill>
-                  <a:srgbClr val="24333D"/>
-                </a:solidFill>
-                <a:latin typeface="Sarabun"/>
-                <a:ea typeface="Sarabun"/>
-                <a:cs typeface="Sarabun"/>
-              </a:rPr>
-              <a:t>คุณอายุเท่าไหร่</a:t>
+              <a:t>สี</a:t>
             </a:r>
             <a:r>
               <a:rPr sz="1500" b="0" i="1" lang="en-US" altLang="en-US">
@@ -10500,7 +10960,7 @@
                 <a:ea typeface="Sarabun"/>
                 <a:cs typeface="Sarabun"/>
               </a:rPr>
-              <a:t> (khun aa-yú thâo-rài)</a:t>
+              <a:t> (sǐi)</a:t>
             </a:r>
             <a:r>
               <a:rPr sz="1500" b="0" i="0" lang="en-US" altLang="en-US">
@@ -10511,7 +10971,7 @@
                 <a:ea typeface="Sarabun"/>
                 <a:cs typeface="Sarabun"/>
               </a:rPr>
-              <a:t>. You answer with age seven. Say your lines before looking.</a:t>
+              <a:t> sǐi — repeat rising.</a:t>
             </a:r>
           </a:p>
         </p:txBody>
@@ -10591,351 +11051,7 @@
                 <a:ea typeface="Sarabun"/>
                 <a:cs typeface="Sarabun"/>
               </a:rPr>
-              <a:t>Repair drill: I say a three-digit room number once, fast. If you catch it, repeat it back. If you miss it, say </a:t>
-            </a:r>
-            <a:r>
-              <a:rPr sz="1500" b="0" i="0" lang="th-TH" altLang="en-US">
-                <a:solidFill>
-                  <a:srgbClr val="24333D"/>
-                </a:solidFill>
-                <a:latin typeface="Sarabun"/>
-                <a:ea typeface="Sarabun"/>
-                <a:cs typeface="Sarabun"/>
-              </a:rPr>
-              <a:t>ขอโทษ</a:t>
-            </a:r>
-            <a:r>
-              <a:rPr sz="1500" b="0" i="1" lang="en-US" altLang="en-US">
-                <a:solidFill>
-                  <a:srgbClr val="566873"/>
-                </a:solidFill>
-                <a:latin typeface="Sarabun"/>
-                <a:ea typeface="Sarabun"/>
-                <a:cs typeface="Sarabun"/>
-              </a:rPr>
-              <a:t> (khǎaw-thôot)</a:t>
-            </a:r>
-            <a:r>
-              <a:rPr sz="1500" b="0" i="0" lang="th-TH" altLang="en-US">
-                <a:solidFill>
-                  <a:srgbClr val="24333D"/>
-                </a:solidFill>
-                <a:latin typeface="Sarabun"/>
-                <a:ea typeface="Sarabun"/>
-                <a:cs typeface="Sarabun"/>
-              </a:rPr>
-              <a:t>ครับ or </a:t>
-            </a:r>
-            <a:r>
-              <a:rPr sz="1500" b="0" i="0" lang="th-TH" altLang="en-US">
-                <a:solidFill>
-                  <a:srgbClr val="24333D"/>
-                </a:solidFill>
-                <a:latin typeface="Sarabun"/>
-                <a:ea typeface="Sarabun"/>
-                <a:cs typeface="Sarabun"/>
-              </a:rPr>
-              <a:t>ขอโทษ</a:t>
-            </a:r>
-            <a:r>
-              <a:rPr sz="1500" b="0" i="1" lang="en-US" altLang="en-US">
-                <a:solidFill>
-                  <a:srgbClr val="566873"/>
-                </a:solidFill>
-                <a:latin typeface="Sarabun"/>
-                <a:ea typeface="Sarabun"/>
-                <a:cs typeface="Sarabun"/>
-              </a:rPr>
-              <a:t> (khǎaw-thôot)</a:t>
-            </a:r>
-            <a:r>
-              <a:rPr sz="1500" b="0" i="0" lang="th-TH" altLang="en-US">
-                <a:solidFill>
-                  <a:srgbClr val="24333D"/>
-                </a:solidFill>
-                <a:latin typeface="Sarabun"/>
-                <a:ea typeface="Sarabun"/>
-                <a:cs typeface="Sarabun"/>
-              </a:rPr>
-              <a:t>ค่ะ, then I repeat and you try again.</a:t>
-            </a:r>
-          </a:p>
-        </p:txBody>
-      </p:sp>
-      <p:sp>
-        <p:nvSpPr>
-          <p:cNvPr id="24" name="Oval 23"/>
-          <p:cNvSpPr/>
-          <p:nvPr/>
-        </p:nvSpPr>
-        <p:spPr>
-          <a:xfrm>
-            <a:off x="932688" y="7927848"/>
-            <a:ext cx="82296" cy="82296"/>
-          </a:xfrm>
-          <a:prstGeom prst="ellipse">
-            <a:avLst/>
-          </a:prstGeom>
-          <a:solidFill>
-            <a:srgbClr val="C96F4A"/>
-          </a:solidFill>
-          <a:ln>
-            <a:noFill/>
-          </a:ln>
-        </p:spPr>
-        <p:style>
-          <a:lnRef idx="1">
-            <a:schemeClr val="accent1"/>
-          </a:lnRef>
-          <a:fillRef idx="3">
-            <a:schemeClr val="accent1"/>
-          </a:fillRef>
-          <a:effectRef idx="2">
-            <a:schemeClr val="accent1"/>
-          </a:effectRef>
-          <a:fontRef idx="minor">
-            <a:schemeClr val="lt1"/>
-          </a:fontRef>
-        </p:style>
-        <p:txBody>
-          <a:bodyPr rtlCol="0" anchor="ctr"/>
-          <a:lstStyle/>
-          <a:p>
-            <a:pPr algn="ctr"/>
-          </a:p>
-        </p:txBody>
-      </p:sp>
-      <p:sp>
-        <p:nvSpPr>
-          <p:cNvPr id="25" name="TextBox 24"/>
-          <p:cNvSpPr txBox="1"/>
-          <p:nvPr/>
-        </p:nvSpPr>
-        <p:spPr>
-          <a:xfrm>
-            <a:off x="1078992" y="7836408"/>
-            <a:ext cx="9555480" cy="274320"/>
-          </a:xfrm>
-          <a:prstGeom prst="rect">
-            <a:avLst/>
-          </a:prstGeom>
-          <a:noFill/>
-        </p:spPr>
-        <p:txBody>
-          <a:bodyPr wrap="square" anchor="t">
-            <a:spAutoFit/>
-          </a:bodyPr>
-          <a:lstStyle/>
-          <a:p>
-            <a:pPr algn="l"/>
-            <a:r>
-              <a:rPr sz="1500" b="0" i="0" lang="en-US" altLang="en-US">
-                <a:solidFill>
-                  <a:srgbClr val="24333D"/>
-                </a:solidFill>
-                <a:latin typeface="Sarabun"/>
-                <a:ea typeface="Sarabun"/>
-                <a:cs typeface="Sarabun"/>
-              </a:rPr>
-              <a:t>Substitution drill: change the person. </a:t>
-            </a:r>
-            <a:r>
-              <a:rPr sz="1500" b="0" i="0" lang="th-TH" altLang="en-US">
-                <a:solidFill>
-                  <a:srgbClr val="24333D"/>
-                </a:solidFill>
-                <a:latin typeface="Sarabun"/>
-                <a:ea typeface="Sarabun"/>
-                <a:cs typeface="Sarabun"/>
-              </a:rPr>
-              <a:t>เขา</a:t>
-            </a:r>
-            <a:r>
-              <a:rPr sz="1500" b="0" i="1" lang="en-US" altLang="en-US">
-                <a:solidFill>
-                  <a:srgbClr val="566873"/>
-                </a:solidFill>
-                <a:latin typeface="Sarabun"/>
-                <a:ea typeface="Sarabun"/>
-                <a:cs typeface="Sarabun"/>
-              </a:rPr>
-              <a:t> (khǎo)</a:t>
-            </a:r>
-            <a:r>
-              <a:rPr sz="1500" b="0" i="0" lang="th-TH" altLang="en-US">
-                <a:solidFill>
-                  <a:srgbClr val="24333D"/>
-                </a:solidFill>
-                <a:latin typeface="Sarabun"/>
-                <a:ea typeface="Sarabun"/>
-                <a:cs typeface="Sarabun"/>
-              </a:rPr>
-              <a:t>อายุ</a:t>
-            </a:r>
-            <a:r>
-              <a:rPr sz="1500" b="0" i="0" lang="th-TH" altLang="en-US">
-                <a:solidFill>
-                  <a:srgbClr val="24333D"/>
-                </a:solidFill>
-                <a:latin typeface="Sarabun"/>
-                <a:ea typeface="Sarabun"/>
-                <a:cs typeface="Sarabun"/>
-              </a:rPr>
-              <a:t>สาม</a:t>
-            </a:r>
-            <a:r>
-              <a:rPr sz="1500" b="0" i="1" lang="en-US" altLang="en-US">
-                <a:solidFill>
-                  <a:srgbClr val="566873"/>
-                </a:solidFill>
-                <a:latin typeface="Sarabun"/>
-                <a:ea typeface="Sarabun"/>
-                <a:cs typeface="Sarabun"/>
-              </a:rPr>
-              <a:t> (sǎam)</a:t>
-            </a:r>
-            <a:r>
-              <a:rPr sz="1500" b="0" i="0" lang="th-TH" altLang="en-US">
-                <a:solidFill>
-                  <a:srgbClr val="24333D"/>
-                </a:solidFill>
-                <a:latin typeface="Sarabun"/>
-                <a:ea typeface="Sarabun"/>
-                <a:cs typeface="Sarabun"/>
-              </a:rPr>
-              <a:t>ปี. Now change the number: </a:t>
-            </a:r>
-            <a:r>
-              <a:rPr sz="1500" b="0" i="0" lang="th-TH" altLang="en-US">
-                <a:solidFill>
-                  <a:srgbClr val="24333D"/>
-                </a:solidFill>
-                <a:latin typeface="Sarabun"/>
-                <a:ea typeface="Sarabun"/>
-                <a:cs typeface="Sarabun"/>
-              </a:rPr>
-              <a:t>เขา</a:t>
-            </a:r>
-            <a:r>
-              <a:rPr sz="1500" b="0" i="1" lang="en-US" altLang="en-US">
-                <a:solidFill>
-                  <a:srgbClr val="566873"/>
-                </a:solidFill>
-                <a:latin typeface="Sarabun"/>
-                <a:ea typeface="Sarabun"/>
-                <a:cs typeface="Sarabun"/>
-              </a:rPr>
-              <a:t> (khǎo)</a:t>
-            </a:r>
-            <a:r>
-              <a:rPr sz="1500" b="0" i="0" lang="th-TH" altLang="en-US">
-                <a:solidFill>
-                  <a:srgbClr val="24333D"/>
-                </a:solidFill>
-                <a:latin typeface="Sarabun"/>
-                <a:ea typeface="Sarabun"/>
-                <a:cs typeface="Sarabun"/>
-              </a:rPr>
-              <a:t>อายุ</a:t>
-            </a:r>
-            <a:r>
-              <a:rPr sz="1500" b="0" i="0" lang="th-TH" altLang="en-US">
-                <a:solidFill>
-                  <a:srgbClr val="24333D"/>
-                </a:solidFill>
-                <a:latin typeface="Sarabun"/>
-                <a:ea typeface="Sarabun"/>
-                <a:cs typeface="Sarabun"/>
-              </a:rPr>
-              <a:t>หก</a:t>
-            </a:r>
-            <a:r>
-              <a:rPr sz="1500" b="0" i="1" lang="en-US" altLang="en-US">
-                <a:solidFill>
-                  <a:srgbClr val="566873"/>
-                </a:solidFill>
-                <a:latin typeface="Sarabun"/>
-                <a:ea typeface="Sarabun"/>
-                <a:cs typeface="Sarabun"/>
-              </a:rPr>
-              <a:t> (hòk)</a:t>
-            </a:r>
-            <a:r>
-              <a:rPr sz="1500" b="0" i="0" lang="th-TH" altLang="en-US">
-                <a:solidFill>
-                  <a:srgbClr val="24333D"/>
-                </a:solidFill>
-                <a:latin typeface="Sarabun"/>
-                <a:ea typeface="Sarabun"/>
-                <a:cs typeface="Sarabun"/>
-              </a:rPr>
-              <a:t>ปี. Now change both: </a:t>
-            </a:r>
-            <a:r>
-              <a:rPr sz="1500" b="0" i="0" lang="th-TH" altLang="en-US">
-                <a:solidFill>
-                  <a:srgbClr val="24333D"/>
-                </a:solidFill>
-                <a:latin typeface="Sarabun"/>
-                <a:ea typeface="Sarabun"/>
-                <a:cs typeface="Sarabun"/>
-              </a:rPr>
-              <a:t>ฉัน</a:t>
-            </a:r>
-            <a:r>
-              <a:rPr sz="1500" b="0" i="1" lang="en-US" altLang="en-US">
-                <a:solidFill>
-                  <a:srgbClr val="566873"/>
-                </a:solidFill>
-                <a:latin typeface="Sarabun"/>
-                <a:ea typeface="Sarabun"/>
-                <a:cs typeface="Sarabun"/>
-              </a:rPr>
-              <a:t> (chǎn)</a:t>
-            </a:r>
-            <a:r>
-              <a:rPr sz="1500" b="0" i="0" lang="th-TH" altLang="en-US">
-                <a:solidFill>
-                  <a:srgbClr val="24333D"/>
-                </a:solidFill>
-                <a:latin typeface="Sarabun"/>
-                <a:ea typeface="Sarabun"/>
-                <a:cs typeface="Sarabun"/>
-              </a:rPr>
-              <a:t>อายุ</a:t>
-            </a:r>
-            <a:r>
-              <a:rPr sz="1500" b="0" i="0" lang="th-TH" altLang="en-US">
-                <a:solidFill>
-                  <a:srgbClr val="24333D"/>
-                </a:solidFill>
-                <a:latin typeface="Sarabun"/>
-                <a:ea typeface="Sarabun"/>
-                <a:cs typeface="Sarabun"/>
-              </a:rPr>
-              <a:t>สิบ</a:t>
-            </a:r>
-            <a:r>
-              <a:rPr sz="1500" b="0" i="1" lang="en-US" altLang="en-US">
-                <a:solidFill>
-                  <a:srgbClr val="566873"/>
-                </a:solidFill>
-                <a:latin typeface="Sarabun"/>
-                <a:ea typeface="Sarabun"/>
-                <a:cs typeface="Sarabun"/>
-              </a:rPr>
-              <a:t> (sìp)</a:t>
-            </a:r>
-            <a:r>
-              <a:rPr sz="1500" b="0" i="0" lang="th-TH" altLang="en-US">
-                <a:solidFill>
-                  <a:srgbClr val="24333D"/>
-                </a:solidFill>
-                <a:latin typeface="Sarabun"/>
-                <a:ea typeface="Sarabun"/>
-                <a:cs typeface="Sarabun"/>
-              </a:rPr>
-              <a:t>ปี.</a:t>
+              <a:t>Minimal pair: I say one. Is it four or colour? Answer before I show it.</a:t>
             </a:r>
           </a:p>
         </p:txBody>
@@ -11098,7 +11214,7 @@
                 <a:ea typeface="Sarabun"/>
                 <a:cs typeface="Sarabun"/>
               </a:rPr>
-              <a:t>Teaching slide</a:t>
+              <a:t>Roleplay</a:t>
             </a:r>
           </a:p>
         </p:txBody>
@@ -11127,15 +11243,15 @@
           <a:p>
             <a:pPr algn="l"/>
             <a:r>
-              <a:rPr sz="2800" b="1" i="0" lang="en-US" altLang="en-US">
-                <a:solidFill>
-                  <a:srgbClr val="24333D"/>
-                </a:solidFill>
-                <a:latin typeface="Sarabun"/>
-                <a:ea typeface="Sarabun"/>
-                <a:cs typeface="Sarabun"/>
-              </a:rPr>
-              <a:t>Pronunciation beat: low tone vs rising tone</a:t>
+              <a:rPr sz="3600" b="1" i="0" lang="en-US" altLang="en-US">
+                <a:solidFill>
+                  <a:srgbClr val="24333D"/>
+                </a:solidFill>
+                <a:latin typeface="Sarabun"/>
+                <a:ea typeface="Sarabun"/>
+                <a:cs typeface="Sarabun"/>
+              </a:rPr>
+              <a:t>Roleplay</a:t>
             </a:r>
           </a:p>
         </p:txBody>
@@ -11148,21 +11264,19 @@
         </p:nvSpPr>
         <p:spPr>
           <a:xfrm>
-            <a:off x="731520" y="1325880"/>
-            <a:ext cx="3889080" cy="1572768"/>
+            <a:off x="731520" y="1097280"/>
+            <a:ext cx="1051560" cy="274320"/>
           </a:xfrm>
           <a:prstGeom prst="roundRect">
             <a:avLst>
-              <a:gd name="adj" fmla="val 6000"/>
+              <a:gd name="adj" fmla="val 28000"/>
             </a:avLst>
           </a:prstGeom>
           <a:solidFill>
-            <a:srgbClr val="FFFFFF"/>
+            <a:srgbClr val="7A8F54"/>
           </a:solidFill>
           <a:ln>
-            <a:solidFill>
-              <a:srgbClr val="D7DEE3"/>
-            </a:solidFill>
+            <a:noFill/>
           </a:ln>
         </p:spPr>
         <p:style>
@@ -11180,66 +11294,34 @@
           </a:fontRef>
         </p:style>
         <p:txBody>
-          <a:bodyPr rtlCol="0" anchor="ctr"/>
+          <a:bodyPr rtlCol="0" anchor="ctr" wrap="none"/>
           <a:lstStyle/>
           <a:p>
             <a:pPr algn="ctr"/>
-          </a:p>
-        </p:txBody>
-      </p:sp>
-      <p:sp>
-        <p:nvSpPr>
-          <p:cNvPr id="7" name="Rectangle 6"/>
-          <p:cNvSpPr/>
-          <p:nvPr/>
-        </p:nvSpPr>
-        <p:spPr>
-          <a:xfrm>
-            <a:off x="868680" y="1527048"/>
-            <a:ext cx="73152" cy="1143000"/>
-          </a:xfrm>
-          <a:prstGeom prst="rect">
-            <a:avLst/>
-          </a:prstGeom>
-          <a:solidFill>
-            <a:srgbClr val="355C7D"/>
-          </a:solidFill>
-          <a:ln>
-            <a:noFill/>
-          </a:ln>
-        </p:spPr>
-        <p:style>
-          <a:lnRef idx="1">
-            <a:schemeClr val="accent1"/>
-          </a:lnRef>
-          <a:fillRef idx="3">
-            <a:schemeClr val="accent1"/>
-          </a:fillRef>
-          <a:effectRef idx="2">
-            <a:schemeClr val="accent1"/>
-          </a:effectRef>
-          <a:fontRef idx="minor">
-            <a:schemeClr val="lt1"/>
-          </a:fontRef>
-        </p:style>
-        <p:txBody>
-          <a:bodyPr rtlCol="0" anchor="ctr"/>
-          <a:lstStyle/>
-          <a:p>
-            <a:pPr algn="ctr"/>
-          </a:p>
-        </p:txBody>
-      </p:sp>
-      <p:sp>
-        <p:nvSpPr>
-          <p:cNvPr id="8" name="TextBox 7"/>
+            <a:r>
+              <a:rPr sz="1200" b="1" lang="en-US" altLang="en-US">
+                <a:solidFill>
+                  <a:srgbClr val="FFFFFF"/>
+                </a:solidFill>
+                <a:latin typeface="Sarabun"/>
+                <a:ea typeface="Sarabun"/>
+                <a:cs typeface="Sarabun"/>
+              </a:rPr>
+              <a:t>You</a:t>
+            </a:r>
+          </a:p>
+        </p:txBody>
+      </p:sp>
+      <p:sp>
+        <p:nvSpPr>
+          <p:cNvPr id="7" name="TextBox 6"/>
           <p:cNvSpPr txBox="1"/>
           <p:nvPr/>
         </p:nvSpPr>
         <p:spPr>
           <a:xfrm>
-            <a:off x="1078992" y="1435608"/>
-            <a:ext cx="3431880" cy="658368"/>
+            <a:off x="1965960" y="1069848"/>
+            <a:ext cx="5836615" cy="384048"/>
           </a:xfrm>
           <a:prstGeom prst="rect">
             <a:avLst/>
@@ -11254,18 +11336,18 @@
           <a:p>
             <a:pPr algn="l"/>
             <a:r>
-              <a:rPr sz="3200" b="1" i="0" lang="th-TH" altLang="en-US">
-                <a:solidFill>
-                  <a:srgbClr val="24333D"/>
-                </a:solidFill>
-                <a:latin typeface="Sarabun"/>
-                <a:ea typeface="Sarabun"/>
-                <a:cs typeface="Sarabun"/>
-              </a:rPr>
-              <a:t>สี่</a:t>
-            </a:r>
-            <a:r>
-              <a:rPr sz="1980" b="0" i="1" lang="en-US" altLang="en-US">
+              <a:rPr sz="2200" b="1" i="0" lang="th-TH" altLang="en-US">
+                <a:solidFill>
+                  <a:srgbClr val="24333D"/>
+                </a:solidFill>
+                <a:latin typeface="Sarabun"/>
+                <a:ea typeface="Sarabun"/>
+                <a:cs typeface="Sarabun"/>
+              </a:rPr>
+              <a:t>สวัสดีครับ</a:t>
+            </a:r>
+            <a:r>
+              <a:rPr sz="1500" b="0" i="1" lang="en-US" altLang="en-US">
                 <a:solidFill>
                   <a:srgbClr val="566873"/>
                 </a:solidFill>
@@ -11273,21 +11355,21 @@
                 <a:ea typeface="Sarabun"/>
                 <a:cs typeface="Sarabun"/>
               </a:rPr>
-              <a:t> (sìi)</a:t>
-            </a:r>
-          </a:p>
-        </p:txBody>
-      </p:sp>
-      <p:sp>
-        <p:nvSpPr>
-          <p:cNvPr id="9" name="TextBox 8"/>
+              <a:t> (sà-wàt-dii khráp)</a:t>
+            </a:r>
+          </a:p>
+        </p:txBody>
+      </p:sp>
+      <p:sp>
+        <p:nvSpPr>
+          <p:cNvPr id="8" name="TextBox 7"/>
           <p:cNvSpPr txBox="1"/>
           <p:nvPr/>
         </p:nvSpPr>
         <p:spPr>
           <a:xfrm>
-            <a:off x="1078992" y="2203704"/>
-            <a:ext cx="3431880" cy="274320"/>
+            <a:off x="1965960" y="1353312"/>
+            <a:ext cx="5836615" cy="228600"/>
           </a:xfrm>
           <a:prstGeom prst="rect">
             <a:avLst/>
@@ -11302,466 +11384,34 @@
           <a:p>
             <a:pPr algn="l"/>
             <a:r>
-              <a:rPr sz="1500" b="0" i="0" lang="en-US" altLang="en-US">
-                <a:solidFill>
-                  <a:srgbClr val="82909A"/>
-                </a:solidFill>
-                <a:latin typeface="Sarabun"/>
-                <a:ea typeface="Sarabun"/>
-                <a:cs typeface="Sarabun"/>
-              </a:rPr>
-              <a:t>four (low tone — voice stays low and flat)</a:t>
-            </a:r>
-          </a:p>
-        </p:txBody>
-      </p:sp>
-      <p:sp>
-        <p:nvSpPr>
-          <p:cNvPr id="10" name="Rounded Rectangle 9"/>
+              <a:rPr sz="1300" b="0" i="0" lang="en-US" altLang="en-US">
+                <a:solidFill>
+                  <a:srgbClr val="566873"/>
+                </a:solidFill>
+                <a:latin typeface="Sarabun"/>
+                <a:ea typeface="Sarabun"/>
+                <a:cs typeface="Sarabun"/>
+              </a:rPr>
+              <a:t>Hello.</a:t>
+            </a:r>
+          </a:p>
+        </p:txBody>
+      </p:sp>
+      <p:sp>
+        <p:nvSpPr>
+          <p:cNvPr id="9" name="Rounded Rectangle 8"/>
           <p:cNvSpPr/>
           <p:nvPr/>
         </p:nvSpPr>
         <p:spPr>
           <a:xfrm>
-            <a:off x="731520" y="3081528"/>
-            <a:ext cx="3889080" cy="1572768"/>
+            <a:off x="731520" y="1874520"/>
+            <a:ext cx="1051560" cy="274320"/>
           </a:xfrm>
           <a:prstGeom prst="roundRect">
             <a:avLst>
-              <a:gd name="adj" fmla="val 6000"/>
+              <a:gd name="adj" fmla="val 28000"/>
             </a:avLst>
-          </a:prstGeom>
-          <a:solidFill>
-            <a:srgbClr val="FFFFFF"/>
-          </a:solidFill>
-          <a:ln>
-            <a:solidFill>
-              <a:srgbClr val="D7DEE3"/>
-            </a:solidFill>
-          </a:ln>
-        </p:spPr>
-        <p:style>
-          <a:lnRef idx="1">
-            <a:schemeClr val="accent1"/>
-          </a:lnRef>
-          <a:fillRef idx="3">
-            <a:schemeClr val="accent1"/>
-          </a:fillRef>
-          <a:effectRef idx="2">
-            <a:schemeClr val="accent1"/>
-          </a:effectRef>
-          <a:fontRef idx="minor">
-            <a:schemeClr val="lt1"/>
-          </a:fontRef>
-        </p:style>
-        <p:txBody>
-          <a:bodyPr rtlCol="0" anchor="ctr"/>
-          <a:lstStyle/>
-          <a:p>
-            <a:pPr algn="ctr"/>
-          </a:p>
-        </p:txBody>
-      </p:sp>
-      <p:sp>
-        <p:nvSpPr>
-          <p:cNvPr id="11" name="Rectangle 10"/>
-          <p:cNvSpPr/>
-          <p:nvPr/>
-        </p:nvSpPr>
-        <p:spPr>
-          <a:xfrm>
-            <a:off x="868680" y="3282696"/>
-            <a:ext cx="73152" cy="1143000"/>
-          </a:xfrm>
-          <a:prstGeom prst="rect">
-            <a:avLst/>
-          </a:prstGeom>
-          <a:solidFill>
-            <a:srgbClr val="355C7D"/>
-          </a:solidFill>
-          <a:ln>
-            <a:noFill/>
-          </a:ln>
-        </p:spPr>
-        <p:style>
-          <a:lnRef idx="1">
-            <a:schemeClr val="accent1"/>
-          </a:lnRef>
-          <a:fillRef idx="3">
-            <a:schemeClr val="accent1"/>
-          </a:fillRef>
-          <a:effectRef idx="2">
-            <a:schemeClr val="accent1"/>
-          </a:effectRef>
-          <a:fontRef idx="minor">
-            <a:schemeClr val="lt1"/>
-          </a:fontRef>
-        </p:style>
-        <p:txBody>
-          <a:bodyPr rtlCol="0" anchor="ctr"/>
-          <a:lstStyle/>
-          <a:p>
-            <a:pPr algn="ctr"/>
-          </a:p>
-        </p:txBody>
-      </p:sp>
-      <p:sp>
-        <p:nvSpPr>
-          <p:cNvPr id="12" name="TextBox 11"/>
-          <p:cNvSpPr txBox="1"/>
-          <p:nvPr/>
-        </p:nvSpPr>
-        <p:spPr>
-          <a:xfrm>
-            <a:off x="1078992" y="3191256"/>
-            <a:ext cx="3431880" cy="658368"/>
-          </a:xfrm>
-          <a:prstGeom prst="rect">
-            <a:avLst/>
-          </a:prstGeom>
-          <a:noFill/>
-        </p:spPr>
-        <p:txBody>
-          <a:bodyPr wrap="square" anchor="t">
-            <a:spAutoFit/>
-          </a:bodyPr>
-          <a:lstStyle/>
-          <a:p>
-            <a:pPr algn="l"/>
-            <a:r>
-              <a:rPr sz="3200" b="1" i="0" lang="th-TH" altLang="en-US">
-                <a:solidFill>
-                  <a:srgbClr val="24333D"/>
-                </a:solidFill>
-                <a:latin typeface="Sarabun"/>
-                <a:ea typeface="Sarabun"/>
-                <a:cs typeface="Sarabun"/>
-              </a:rPr>
-              <a:t>สี</a:t>
-            </a:r>
-            <a:r>
-              <a:rPr sz="1980" b="0" i="1" lang="en-US" altLang="en-US">
-                <a:solidFill>
-                  <a:srgbClr val="566873"/>
-                </a:solidFill>
-                <a:latin typeface="Sarabun"/>
-                <a:ea typeface="Sarabun"/>
-                <a:cs typeface="Sarabun"/>
-              </a:rPr>
-              <a:t> (sǐi)</a:t>
-            </a:r>
-          </a:p>
-        </p:txBody>
-      </p:sp>
-      <p:sp>
-        <p:nvSpPr>
-          <p:cNvPr id="13" name="TextBox 12"/>
-          <p:cNvSpPr txBox="1"/>
-          <p:nvPr/>
-        </p:nvSpPr>
-        <p:spPr>
-          <a:xfrm>
-            <a:off x="1078992" y="3959352"/>
-            <a:ext cx="3431880" cy="274320"/>
-          </a:xfrm>
-          <a:prstGeom prst="rect">
-            <a:avLst/>
-          </a:prstGeom>
-          <a:noFill/>
-        </p:spPr>
-        <p:txBody>
-          <a:bodyPr wrap="square" anchor="t">
-            <a:spAutoFit/>
-          </a:bodyPr>
-          <a:lstStyle/>
-          <a:p>
-            <a:pPr algn="l"/>
-            <a:r>
-              <a:rPr sz="1500" b="0" i="0" lang="en-US" altLang="en-US">
-                <a:solidFill>
-                  <a:srgbClr val="82909A"/>
-                </a:solidFill>
-                <a:latin typeface="Sarabun"/>
-                <a:ea typeface="Sarabun"/>
-                <a:cs typeface="Sarabun"/>
-              </a:rPr>
-              <a:t>colour (rising tone — voice lifts up)</a:t>
-            </a:r>
-          </a:p>
-        </p:txBody>
-      </p:sp>
-      <p:sp>
-        <p:nvSpPr>
-          <p:cNvPr id="14" name="Rounded Rectangle 13"/>
-          <p:cNvSpPr/>
-          <p:nvPr/>
-        </p:nvSpPr>
-        <p:spPr>
-          <a:xfrm>
-            <a:off x="731520" y="4837176"/>
-            <a:ext cx="3889080" cy="1572768"/>
-          </a:xfrm>
-          <a:prstGeom prst="roundRect">
-            <a:avLst>
-              <a:gd name="adj" fmla="val 6000"/>
-            </a:avLst>
-          </a:prstGeom>
-          <a:solidFill>
-            <a:srgbClr val="FFFFFF"/>
-          </a:solidFill>
-          <a:ln>
-            <a:solidFill>
-              <a:srgbClr val="D7DEE3"/>
-            </a:solidFill>
-          </a:ln>
-        </p:spPr>
-        <p:style>
-          <a:lnRef idx="1">
-            <a:schemeClr val="accent1"/>
-          </a:lnRef>
-          <a:fillRef idx="3">
-            <a:schemeClr val="accent1"/>
-          </a:fillRef>
-          <a:effectRef idx="2">
-            <a:schemeClr val="accent1"/>
-          </a:effectRef>
-          <a:fontRef idx="minor">
-            <a:schemeClr val="lt1"/>
-          </a:fontRef>
-        </p:style>
-        <p:txBody>
-          <a:bodyPr rtlCol="0" anchor="ctr"/>
-          <a:lstStyle/>
-          <a:p>
-            <a:pPr algn="ctr"/>
-          </a:p>
-        </p:txBody>
-      </p:sp>
-      <p:sp>
-        <p:nvSpPr>
-          <p:cNvPr id="15" name="Rectangle 14"/>
-          <p:cNvSpPr/>
-          <p:nvPr/>
-        </p:nvSpPr>
-        <p:spPr>
-          <a:xfrm>
-            <a:off x="868680" y="5038344"/>
-            <a:ext cx="73152" cy="1143000"/>
-          </a:xfrm>
-          <a:prstGeom prst="rect">
-            <a:avLst/>
-          </a:prstGeom>
-          <a:solidFill>
-            <a:srgbClr val="355C7D"/>
-          </a:solidFill>
-          <a:ln>
-            <a:noFill/>
-          </a:ln>
-        </p:spPr>
-        <p:style>
-          <a:lnRef idx="1">
-            <a:schemeClr val="accent1"/>
-          </a:lnRef>
-          <a:fillRef idx="3">
-            <a:schemeClr val="accent1"/>
-          </a:fillRef>
-          <a:effectRef idx="2">
-            <a:schemeClr val="accent1"/>
-          </a:effectRef>
-          <a:fontRef idx="minor">
-            <a:schemeClr val="lt1"/>
-          </a:fontRef>
-        </p:style>
-        <p:txBody>
-          <a:bodyPr rtlCol="0" anchor="ctr"/>
-          <a:lstStyle/>
-          <a:p>
-            <a:pPr algn="ctr"/>
-          </a:p>
-        </p:txBody>
-      </p:sp>
-      <p:sp>
-        <p:nvSpPr>
-          <p:cNvPr id="16" name="TextBox 15"/>
-          <p:cNvSpPr txBox="1"/>
-          <p:nvPr/>
-        </p:nvSpPr>
-        <p:spPr>
-          <a:xfrm>
-            <a:off x="1078992" y="4946904"/>
-            <a:ext cx="3431880" cy="658368"/>
-          </a:xfrm>
-          <a:prstGeom prst="rect">
-            <a:avLst/>
-          </a:prstGeom>
-          <a:noFill/>
-        </p:spPr>
-        <p:txBody>
-          <a:bodyPr wrap="square" anchor="t">
-            <a:spAutoFit/>
-          </a:bodyPr>
-          <a:lstStyle/>
-          <a:p>
-            <a:pPr algn="l"/>
-            <a:r>
-              <a:rPr sz="3200" b="1" i="0" lang="th-TH" altLang="en-US">
-                <a:solidFill>
-                  <a:srgbClr val="24333D"/>
-                </a:solidFill>
-                <a:latin typeface="Sarabun"/>
-                <a:ea typeface="Sarabun"/>
-                <a:cs typeface="Sarabun"/>
-              </a:rPr>
-              <a:t>เก้า</a:t>
-            </a:r>
-            <a:r>
-              <a:rPr sz="1980" b="0" i="1" lang="en-US" altLang="en-US">
-                <a:solidFill>
-                  <a:srgbClr val="566873"/>
-                </a:solidFill>
-                <a:latin typeface="Sarabun"/>
-                <a:ea typeface="Sarabun"/>
-                <a:cs typeface="Sarabun"/>
-              </a:rPr>
-              <a:t> (gâo)</a:t>
-            </a:r>
-          </a:p>
-        </p:txBody>
-      </p:sp>
-      <p:sp>
-        <p:nvSpPr>
-          <p:cNvPr id="17" name="TextBox 16"/>
-          <p:cNvSpPr txBox="1"/>
-          <p:nvPr/>
-        </p:nvSpPr>
-        <p:spPr>
-          <a:xfrm>
-            <a:off x="1078992" y="5715000"/>
-            <a:ext cx="3431880" cy="274320"/>
-          </a:xfrm>
-          <a:prstGeom prst="rect">
-            <a:avLst/>
-          </a:prstGeom>
-          <a:noFill/>
-        </p:spPr>
-        <p:txBody>
-          <a:bodyPr wrap="square" anchor="t">
-            <a:spAutoFit/>
-          </a:bodyPr>
-          <a:lstStyle/>
-          <a:p>
-            <a:pPr algn="l"/>
-            <a:r>
-              <a:rPr sz="1500" b="0" i="0" lang="en-US" altLang="en-US">
-                <a:solidFill>
-                  <a:srgbClr val="82909A"/>
-                </a:solidFill>
-                <a:latin typeface="Sarabun"/>
-                <a:ea typeface="Sarabun"/>
-                <a:cs typeface="Sarabun"/>
-              </a:rPr>
-              <a:t>nine (falling tone — voice drops down)</a:t>
-            </a:r>
-          </a:p>
-        </p:txBody>
-      </p:sp>
-      <p:sp>
-        <p:nvSpPr>
-          <p:cNvPr id="18" name="Rounded Rectangle 17"/>
-          <p:cNvSpPr/>
-          <p:nvPr/>
-        </p:nvSpPr>
-        <p:spPr>
-          <a:xfrm>
-            <a:off x="731520" y="6775704"/>
-            <a:ext cx="10058400" cy="1289304"/>
-          </a:xfrm>
-          <a:prstGeom prst="roundRect">
-            <a:avLst>
-              <a:gd name="adj" fmla="val 6000"/>
-            </a:avLst>
-          </a:prstGeom>
-          <a:solidFill>
-            <a:srgbClr val="FFFFFF"/>
-          </a:solidFill>
-          <a:ln>
-            <a:solidFill>
-              <a:srgbClr val="D7DEE3"/>
-            </a:solidFill>
-          </a:ln>
-        </p:spPr>
-        <p:style>
-          <a:lnRef idx="1">
-            <a:schemeClr val="accent1"/>
-          </a:lnRef>
-          <a:fillRef idx="3">
-            <a:schemeClr val="accent1"/>
-          </a:fillRef>
-          <a:effectRef idx="2">
-            <a:schemeClr val="accent1"/>
-          </a:effectRef>
-          <a:fontRef idx="minor">
-            <a:schemeClr val="lt1"/>
-          </a:fontRef>
-        </p:style>
-        <p:txBody>
-          <a:bodyPr rtlCol="0" anchor="ctr"/>
-          <a:lstStyle/>
-          <a:p>
-            <a:pPr algn="ctr"/>
-          </a:p>
-        </p:txBody>
-      </p:sp>
-      <p:sp>
-        <p:nvSpPr>
-          <p:cNvPr id="19" name="TextBox 18"/>
-          <p:cNvSpPr txBox="1"/>
-          <p:nvPr/>
-        </p:nvSpPr>
-        <p:spPr>
-          <a:xfrm>
-            <a:off x="932688" y="6922008"/>
-            <a:ext cx="9692640" cy="228600"/>
-          </a:xfrm>
-          <a:prstGeom prst="rect">
-            <a:avLst/>
-          </a:prstGeom>
-          <a:noFill/>
-        </p:spPr>
-        <p:txBody>
-          <a:bodyPr wrap="square" anchor="t">
-            <a:spAutoFit/>
-          </a:bodyPr>
-          <a:lstStyle/>
-          <a:p>
-            <a:pPr algn="l"/>
-            <a:r>
-              <a:rPr sz="1500" b="1" i="0" lang="en-US" altLang="en-US">
-                <a:solidFill>
-                  <a:srgbClr val="C96F4A"/>
-                </a:solidFill>
-                <a:latin typeface="Sarabun"/>
-                <a:ea typeface="Sarabun"/>
-                <a:cs typeface="Sarabun"/>
-              </a:rPr>
-              <a:t>Practice</a:t>
-            </a:r>
-          </a:p>
-        </p:txBody>
-      </p:sp>
-      <p:sp>
-        <p:nvSpPr>
-          <p:cNvPr id="20" name="Oval 19"/>
-          <p:cNvSpPr/>
-          <p:nvPr/>
-        </p:nvSpPr>
-        <p:spPr>
-          <a:xfrm>
-            <a:off x="932688" y="7306056"/>
-            <a:ext cx="82296" cy="82296"/>
-          </a:xfrm>
-          <a:prstGeom prst="ellipse">
-            <a:avLst/>
           </a:prstGeom>
           <a:solidFill>
             <a:srgbClr val="C96F4A"/>
@@ -11785,23 +11435,34 @@
           </a:fontRef>
         </p:style>
         <p:txBody>
-          <a:bodyPr rtlCol="0" anchor="ctr"/>
+          <a:bodyPr rtlCol="0" anchor="ctr" wrap="none"/>
           <a:lstStyle/>
           <a:p>
             <a:pPr algn="ctr"/>
-          </a:p>
-        </p:txBody>
-      </p:sp>
-      <p:sp>
-        <p:nvSpPr>
-          <p:cNvPr id="21" name="TextBox 20"/>
+            <a:r>
+              <a:rPr sz="1200" b="1" lang="en-US" altLang="en-US">
+                <a:solidFill>
+                  <a:srgbClr val="FFFFFF"/>
+                </a:solidFill>
+                <a:latin typeface="Sarabun"/>
+                <a:ea typeface="Sarabun"/>
+                <a:cs typeface="Sarabun"/>
+              </a:rPr>
+              <a:t>Staff</a:t>
+            </a:r>
+          </a:p>
+        </p:txBody>
+      </p:sp>
+      <p:sp>
+        <p:nvSpPr>
+          <p:cNvPr id="10" name="TextBox 9"/>
           <p:cNvSpPr txBox="1"/>
           <p:nvPr/>
         </p:nvSpPr>
         <p:spPr>
           <a:xfrm>
-            <a:off x="1078992" y="7214616"/>
-            <a:ext cx="9555480" cy="274320"/>
+            <a:off x="1965960" y="1847088"/>
+            <a:ext cx="5836615" cy="384048"/>
           </a:xfrm>
           <a:prstGeom prst="rect">
             <a:avLst/>
@@ -11816,26 +11477,15 @@
           <a:p>
             <a:pPr algn="l"/>
             <a:r>
-              <a:rPr sz="1500" b="0" i="0" lang="en-US" altLang="en-US">
-                <a:solidFill>
-                  <a:srgbClr val="24333D"/>
-                </a:solidFill>
-                <a:latin typeface="Sarabun"/>
-                <a:ea typeface="Sarabun"/>
-                <a:cs typeface="Sarabun"/>
-              </a:rPr>
-              <a:t>Tone echo: I say </a:t>
-            </a:r>
-            <a:r>
-              <a:rPr sz="1500" b="0" i="0" lang="th-TH" altLang="en-US">
-                <a:solidFill>
-                  <a:srgbClr val="24333D"/>
-                </a:solidFill>
-                <a:latin typeface="Sarabun"/>
-                <a:ea typeface="Sarabun"/>
-                <a:cs typeface="Sarabun"/>
-              </a:rPr>
-              <a:t>สี่</a:t>
+              <a:rPr sz="2200" b="1" i="0" lang="th-TH" altLang="en-US">
+                <a:solidFill>
+                  <a:srgbClr val="24333D"/>
+                </a:solidFill>
+                <a:latin typeface="Sarabun"/>
+                <a:ea typeface="Sarabun"/>
+                <a:cs typeface="Sarabun"/>
+              </a:rPr>
+              <a:t>สวัสดีค่ะ เบอร์ห้องอะไรคะ</a:t>
             </a:r>
             <a:r>
               <a:rPr sz="1500" b="0" i="1" lang="en-US" altLang="en-US">
@@ -11846,29 +11496,137 @@
                 <a:ea typeface="Sarabun"/>
                 <a:cs typeface="Sarabun"/>
               </a:rPr>
-              <a:t> (sìi)</a:t>
-            </a:r>
-            <a:r>
-              <a:rPr sz="1500" b="0" i="0" lang="en-US" altLang="en-US">
-                <a:solidFill>
-                  <a:srgbClr val="24333D"/>
-                </a:solidFill>
-                <a:latin typeface="Sarabun"/>
-                <a:ea typeface="Sarabun"/>
-                <a:cs typeface="Sarabun"/>
-              </a:rPr>
-              <a:t> sìi. Repeat it with a low tone. Now I say </a:t>
-            </a:r>
-            <a:r>
-              <a:rPr sz="1500" b="0" i="0" lang="th-TH" altLang="en-US">
-                <a:solidFill>
-                  <a:srgbClr val="24333D"/>
-                </a:solidFill>
-                <a:latin typeface="Sarabun"/>
-                <a:ea typeface="Sarabun"/>
-                <a:cs typeface="Sarabun"/>
-              </a:rPr>
-              <a:t>สี</a:t>
+              <a:t> (sà-wàt-dii khâ ber hâwng à-rai khá)</a:t>
+            </a:r>
+          </a:p>
+        </p:txBody>
+      </p:sp>
+      <p:sp>
+        <p:nvSpPr>
+          <p:cNvPr id="11" name="TextBox 10"/>
+          <p:cNvSpPr txBox="1"/>
+          <p:nvPr/>
+        </p:nvSpPr>
+        <p:spPr>
+          <a:xfrm>
+            <a:off x="1965960" y="2130552"/>
+            <a:ext cx="5836615" cy="228600"/>
+          </a:xfrm>
+          <a:prstGeom prst="rect">
+            <a:avLst/>
+          </a:prstGeom>
+          <a:noFill/>
+        </p:spPr>
+        <p:txBody>
+          <a:bodyPr wrap="square" anchor="t">
+            <a:spAutoFit/>
+          </a:bodyPr>
+          <a:lstStyle/>
+          <a:p>
+            <a:pPr algn="l"/>
+            <a:r>
+              <a:rPr sz="1300" b="0" i="0" lang="en-US" altLang="en-US">
+                <a:solidFill>
+                  <a:srgbClr val="566873"/>
+                </a:solidFill>
+                <a:latin typeface="Sarabun"/>
+                <a:ea typeface="Sarabun"/>
+                <a:cs typeface="Sarabun"/>
+              </a:rPr>
+              <a:t>Hello. What room number?</a:t>
+            </a:r>
+          </a:p>
+        </p:txBody>
+      </p:sp>
+      <p:sp>
+        <p:nvSpPr>
+          <p:cNvPr id="12" name="Rounded Rectangle 11"/>
+          <p:cNvSpPr/>
+          <p:nvPr/>
+        </p:nvSpPr>
+        <p:spPr>
+          <a:xfrm>
+            <a:off x="731520" y="2651760"/>
+            <a:ext cx="1051560" cy="274320"/>
+          </a:xfrm>
+          <a:prstGeom prst="roundRect">
+            <a:avLst>
+              <a:gd name="adj" fmla="val 28000"/>
+            </a:avLst>
+          </a:prstGeom>
+          <a:solidFill>
+            <a:srgbClr val="7A8F54"/>
+          </a:solidFill>
+          <a:ln>
+            <a:noFill/>
+          </a:ln>
+        </p:spPr>
+        <p:style>
+          <a:lnRef idx="1">
+            <a:schemeClr val="accent1"/>
+          </a:lnRef>
+          <a:fillRef idx="3">
+            <a:schemeClr val="accent1"/>
+          </a:fillRef>
+          <a:effectRef idx="2">
+            <a:schemeClr val="accent1"/>
+          </a:effectRef>
+          <a:fontRef idx="minor">
+            <a:schemeClr val="lt1"/>
+          </a:fontRef>
+        </p:style>
+        <p:txBody>
+          <a:bodyPr rtlCol="0" anchor="ctr" wrap="none"/>
+          <a:lstStyle/>
+          <a:p>
+            <a:pPr algn="ctr"/>
+            <a:r>
+              <a:rPr sz="1200" b="1" lang="en-US" altLang="en-US">
+                <a:solidFill>
+                  <a:srgbClr val="FFFFFF"/>
+                </a:solidFill>
+                <a:latin typeface="Sarabun"/>
+                <a:ea typeface="Sarabun"/>
+                <a:cs typeface="Sarabun"/>
+              </a:rPr>
+              <a:t>You</a:t>
+            </a:r>
+          </a:p>
+        </p:txBody>
+      </p:sp>
+      <p:sp>
+        <p:nvSpPr>
+          <p:cNvPr id="13" name="TextBox 12"/>
+          <p:cNvSpPr txBox="1"/>
+          <p:nvPr/>
+        </p:nvSpPr>
+        <p:spPr>
+          <a:xfrm>
+            <a:off x="1965960" y="2624328"/>
+            <a:ext cx="5836615" cy="384048"/>
+          </a:xfrm>
+          <a:prstGeom prst="rect">
+            <a:avLst/>
+          </a:prstGeom>
+          <a:noFill/>
+        </p:spPr>
+        <p:txBody>
+          <a:bodyPr wrap="square" anchor="t">
+            <a:spAutoFit/>
+          </a:bodyPr>
+          <a:lstStyle/>
+          <a:p>
+            <a:pPr algn="l"/>
+            <a:r>
+              <a:rPr sz="2200" b="1" i="0" lang="th-TH" altLang="en-US">
+                <a:solidFill>
+                  <a:srgbClr val="24333D"/>
+                </a:solidFill>
+                <a:latin typeface="Sarabun"/>
+                <a:ea typeface="Sarabun"/>
+                <a:cs typeface="Sarabun"/>
+              </a:rPr>
+              <a:t>ห้า-ศูนย์-สองครับ</a:t>
             </a:r>
             <a:r>
               <a:rPr sz="1500" b="0" i="1" lang="en-US" altLang="en-US">
@@ -11879,35 +11637,63 @@
                 <a:ea typeface="Sarabun"/>
                 <a:cs typeface="Sarabun"/>
               </a:rPr>
-              <a:t> (sǐi)</a:t>
-            </a:r>
-            <a:r>
-              <a:rPr sz="1500" b="0" i="0" lang="en-US" altLang="en-US">
-                <a:solidFill>
-                  <a:srgbClr val="24333D"/>
-                </a:solidFill>
-                <a:latin typeface="Sarabun"/>
-                <a:ea typeface="Sarabun"/>
-                <a:cs typeface="Sarabun"/>
-              </a:rPr>
-              <a:t> sǐi. Repeat it with a rising tone. Can you feel the difference?</a:t>
-            </a:r>
-          </a:p>
-        </p:txBody>
-      </p:sp>
-      <p:sp>
-        <p:nvSpPr>
-          <p:cNvPr id="22" name="Oval 21"/>
+              <a:t> (hâa-sǔun-sǎawng khráp)</a:t>
+            </a:r>
+          </a:p>
+        </p:txBody>
+      </p:sp>
+      <p:sp>
+        <p:nvSpPr>
+          <p:cNvPr id="14" name="TextBox 13"/>
+          <p:cNvSpPr txBox="1"/>
+          <p:nvPr/>
+        </p:nvSpPr>
+        <p:spPr>
+          <a:xfrm>
+            <a:off x="1965960" y="2907792"/>
+            <a:ext cx="5836615" cy="228600"/>
+          </a:xfrm>
+          <a:prstGeom prst="rect">
+            <a:avLst/>
+          </a:prstGeom>
+          <a:noFill/>
+        </p:spPr>
+        <p:txBody>
+          <a:bodyPr wrap="square" anchor="t">
+            <a:spAutoFit/>
+          </a:bodyPr>
+          <a:lstStyle/>
+          <a:p>
+            <a:pPr algn="l"/>
+            <a:r>
+              <a:rPr sz="1300" b="0" i="0" lang="en-US" altLang="en-US">
+                <a:solidFill>
+                  <a:srgbClr val="566873"/>
+                </a:solidFill>
+                <a:latin typeface="Sarabun"/>
+                <a:ea typeface="Sarabun"/>
+                <a:cs typeface="Sarabun"/>
+              </a:rPr>
+              <a:t>502.</a:t>
+            </a:r>
+          </a:p>
+        </p:txBody>
+      </p:sp>
+      <p:sp>
+        <p:nvSpPr>
+          <p:cNvPr id="15" name="Rounded Rectangle 14"/>
           <p:cNvSpPr/>
           <p:nvPr/>
         </p:nvSpPr>
         <p:spPr>
           <a:xfrm>
-            <a:off x="932688" y="7616952"/>
-            <a:ext cx="82296" cy="82296"/>
-          </a:xfrm>
-          <a:prstGeom prst="ellipse">
-            <a:avLst/>
+            <a:off x="731520" y="3429000"/>
+            <a:ext cx="1051560" cy="274320"/>
+          </a:xfrm>
+          <a:prstGeom prst="roundRect">
+            <a:avLst>
+              <a:gd name="adj" fmla="val 28000"/>
+            </a:avLst>
           </a:prstGeom>
           <a:solidFill>
             <a:srgbClr val="C96F4A"/>
@@ -11931,23 +11717,34 @@
           </a:fontRef>
         </p:style>
         <p:txBody>
-          <a:bodyPr rtlCol="0" anchor="ctr"/>
+          <a:bodyPr rtlCol="0" anchor="ctr" wrap="none"/>
           <a:lstStyle/>
           <a:p>
             <a:pPr algn="ctr"/>
-          </a:p>
-        </p:txBody>
-      </p:sp>
-      <p:sp>
-        <p:nvSpPr>
-          <p:cNvPr id="23" name="TextBox 22"/>
+            <a:r>
+              <a:rPr sz="1200" b="1" lang="en-US" altLang="en-US">
+                <a:solidFill>
+                  <a:srgbClr val="FFFFFF"/>
+                </a:solidFill>
+                <a:latin typeface="Sarabun"/>
+                <a:ea typeface="Sarabun"/>
+                <a:cs typeface="Sarabun"/>
+              </a:rPr>
+              <a:t>Staff</a:t>
+            </a:r>
+          </a:p>
+        </p:txBody>
+      </p:sp>
+      <p:sp>
+        <p:nvSpPr>
+          <p:cNvPr id="16" name="TextBox 15"/>
           <p:cNvSpPr txBox="1"/>
           <p:nvPr/>
         </p:nvSpPr>
         <p:spPr>
           <a:xfrm>
-            <a:off x="1078992" y="7525512"/>
-            <a:ext cx="9555480" cy="274320"/>
+            <a:off x="1965960" y="3401568"/>
+            <a:ext cx="8823960" cy="384048"/>
           </a:xfrm>
           <a:prstGeom prst="rect">
             <a:avLst/>
@@ -11962,15 +11759,345 @@
           <a:p>
             <a:pPr algn="l"/>
             <a:r>
-              <a:rPr sz="1500" b="0" i="0" lang="en-US" altLang="en-US">
-                <a:solidFill>
-                  <a:srgbClr val="24333D"/>
-                </a:solidFill>
-                <a:latin typeface="Sarabun"/>
-                <a:ea typeface="Sarabun"/>
-                <a:cs typeface="Sarabun"/>
-              </a:rPr>
-              <a:t>Minimal pair choice: I say one word. Is it four or colour? Point to the answer, then say the word back to me.</a:t>
+              <a:rPr sz="2200" b="1" i="0" lang="th-TH" altLang="en-US">
+                <a:solidFill>
+                  <a:srgbClr val="24333D"/>
+                </a:solidFill>
+                <a:latin typeface="Sarabun"/>
+                <a:ea typeface="Sarabun"/>
+                <a:cs typeface="Sarabun"/>
+              </a:rPr>
+              <a:t>ค่ะ คุณอายุเท่าไหร่คะ</a:t>
+            </a:r>
+            <a:r>
+              <a:rPr sz="1500" b="0" i="1" lang="en-US" altLang="en-US">
+                <a:solidFill>
+                  <a:srgbClr val="566873"/>
+                </a:solidFill>
+                <a:latin typeface="Sarabun"/>
+                <a:ea typeface="Sarabun"/>
+                <a:cs typeface="Sarabun"/>
+              </a:rPr>
+              <a:t> (khâ khun aa-yú thâo-rài khá)</a:t>
+            </a:r>
+          </a:p>
+        </p:txBody>
+      </p:sp>
+      <p:sp>
+        <p:nvSpPr>
+          <p:cNvPr id="17" name="TextBox 16"/>
+          <p:cNvSpPr txBox="1"/>
+          <p:nvPr/>
+        </p:nvSpPr>
+        <p:spPr>
+          <a:xfrm>
+            <a:off x="1965960" y="3685032"/>
+            <a:ext cx="8823960" cy="228600"/>
+          </a:xfrm>
+          <a:prstGeom prst="rect">
+            <a:avLst/>
+          </a:prstGeom>
+          <a:noFill/>
+        </p:spPr>
+        <p:txBody>
+          <a:bodyPr wrap="square" anchor="t">
+            <a:spAutoFit/>
+          </a:bodyPr>
+          <a:lstStyle/>
+          <a:p>
+            <a:pPr algn="l"/>
+            <a:r>
+              <a:rPr sz="1300" b="0" i="0" lang="en-US" altLang="en-US">
+                <a:solidFill>
+                  <a:srgbClr val="566873"/>
+                </a:solidFill>
+                <a:latin typeface="Sarabun"/>
+                <a:ea typeface="Sarabun"/>
+                <a:cs typeface="Sarabun"/>
+              </a:rPr>
+              <a:t>How old are you?</a:t>
+            </a:r>
+          </a:p>
+        </p:txBody>
+      </p:sp>
+      <p:sp>
+        <p:nvSpPr>
+          <p:cNvPr id="18" name="Rounded Rectangle 17"/>
+          <p:cNvSpPr/>
+          <p:nvPr/>
+        </p:nvSpPr>
+        <p:spPr>
+          <a:xfrm>
+            <a:off x="731520" y="4206240"/>
+            <a:ext cx="1051560" cy="274320"/>
+          </a:xfrm>
+          <a:prstGeom prst="roundRect">
+            <a:avLst>
+              <a:gd name="adj" fmla="val 28000"/>
+            </a:avLst>
+          </a:prstGeom>
+          <a:solidFill>
+            <a:srgbClr val="7A8F54"/>
+          </a:solidFill>
+          <a:ln>
+            <a:noFill/>
+          </a:ln>
+        </p:spPr>
+        <p:style>
+          <a:lnRef idx="1">
+            <a:schemeClr val="accent1"/>
+          </a:lnRef>
+          <a:fillRef idx="3">
+            <a:schemeClr val="accent1"/>
+          </a:fillRef>
+          <a:effectRef idx="2">
+            <a:schemeClr val="accent1"/>
+          </a:effectRef>
+          <a:fontRef idx="minor">
+            <a:schemeClr val="lt1"/>
+          </a:fontRef>
+        </p:style>
+        <p:txBody>
+          <a:bodyPr rtlCol="0" anchor="ctr" wrap="none"/>
+          <a:lstStyle/>
+          <a:p>
+            <a:pPr algn="ctr"/>
+            <a:r>
+              <a:rPr sz="1200" b="1" lang="en-US" altLang="en-US">
+                <a:solidFill>
+                  <a:srgbClr val="FFFFFF"/>
+                </a:solidFill>
+                <a:latin typeface="Sarabun"/>
+                <a:ea typeface="Sarabun"/>
+                <a:cs typeface="Sarabun"/>
+              </a:rPr>
+              <a:t>You</a:t>
+            </a:r>
+          </a:p>
+        </p:txBody>
+      </p:sp>
+      <p:sp>
+        <p:nvSpPr>
+          <p:cNvPr id="19" name="TextBox 18"/>
+          <p:cNvSpPr txBox="1"/>
+          <p:nvPr/>
+        </p:nvSpPr>
+        <p:spPr>
+          <a:xfrm>
+            <a:off x="1965960" y="4178808"/>
+            <a:ext cx="8823960" cy="384048"/>
+          </a:xfrm>
+          <a:prstGeom prst="rect">
+            <a:avLst/>
+          </a:prstGeom>
+          <a:noFill/>
+        </p:spPr>
+        <p:txBody>
+          <a:bodyPr wrap="square" anchor="t">
+            <a:spAutoFit/>
+          </a:bodyPr>
+          <a:lstStyle/>
+          <a:p>
+            <a:pPr algn="l"/>
+            <a:r>
+              <a:rPr sz="2200" b="1" i="0" lang="th-TH" altLang="en-US">
+                <a:solidFill>
+                  <a:srgbClr val="24333D"/>
+                </a:solidFill>
+                <a:latin typeface="Sarabun"/>
+                <a:ea typeface="Sarabun"/>
+                <a:cs typeface="Sarabun"/>
+              </a:rPr>
+              <a:t>ผมอายุสามสิบปีครับ</a:t>
+            </a:r>
+            <a:r>
+              <a:rPr sz="1500" b="0" i="1" lang="en-US" altLang="en-US">
+                <a:solidFill>
+                  <a:srgbClr val="566873"/>
+                </a:solidFill>
+                <a:latin typeface="Sarabun"/>
+                <a:ea typeface="Sarabun"/>
+                <a:cs typeface="Sarabun"/>
+              </a:rPr>
+              <a:t> (phǒm aa-yú sǎam-sìp bpii khráp)</a:t>
+            </a:r>
+          </a:p>
+        </p:txBody>
+      </p:sp>
+      <p:sp>
+        <p:nvSpPr>
+          <p:cNvPr id="20" name="TextBox 19"/>
+          <p:cNvSpPr txBox="1"/>
+          <p:nvPr/>
+        </p:nvSpPr>
+        <p:spPr>
+          <a:xfrm>
+            <a:off x="1965960" y="4462272"/>
+            <a:ext cx="8823960" cy="228600"/>
+          </a:xfrm>
+          <a:prstGeom prst="rect">
+            <a:avLst/>
+          </a:prstGeom>
+          <a:noFill/>
+        </p:spPr>
+        <p:txBody>
+          <a:bodyPr wrap="square" anchor="t">
+            <a:spAutoFit/>
+          </a:bodyPr>
+          <a:lstStyle/>
+          <a:p>
+            <a:pPr algn="l"/>
+            <a:r>
+              <a:rPr sz="1300" b="0" i="0" lang="en-US" altLang="en-US">
+                <a:solidFill>
+                  <a:srgbClr val="566873"/>
+                </a:solidFill>
+                <a:latin typeface="Sarabun"/>
+                <a:ea typeface="Sarabun"/>
+                <a:cs typeface="Sarabun"/>
+              </a:rPr>
+              <a:t>I am thirty.</a:t>
+            </a:r>
+          </a:p>
+        </p:txBody>
+      </p:sp>
+      <p:sp>
+        <p:nvSpPr>
+          <p:cNvPr id="21" name="Rounded Rectangle 20"/>
+          <p:cNvSpPr/>
+          <p:nvPr/>
+        </p:nvSpPr>
+        <p:spPr>
+          <a:xfrm>
+            <a:off x="731520" y="4983480"/>
+            <a:ext cx="1051560" cy="274320"/>
+          </a:xfrm>
+          <a:prstGeom prst="roundRect">
+            <a:avLst>
+              <a:gd name="adj" fmla="val 28000"/>
+            </a:avLst>
+          </a:prstGeom>
+          <a:solidFill>
+            <a:srgbClr val="C96F4A"/>
+          </a:solidFill>
+          <a:ln>
+            <a:noFill/>
+          </a:ln>
+        </p:spPr>
+        <p:style>
+          <a:lnRef idx="1">
+            <a:schemeClr val="accent1"/>
+          </a:lnRef>
+          <a:fillRef idx="3">
+            <a:schemeClr val="accent1"/>
+          </a:fillRef>
+          <a:effectRef idx="2">
+            <a:schemeClr val="accent1"/>
+          </a:effectRef>
+          <a:fontRef idx="minor">
+            <a:schemeClr val="lt1"/>
+          </a:fontRef>
+        </p:style>
+        <p:txBody>
+          <a:bodyPr rtlCol="0" anchor="ctr" wrap="none"/>
+          <a:lstStyle/>
+          <a:p>
+            <a:pPr algn="ctr"/>
+            <a:r>
+              <a:rPr sz="1200" b="1" lang="en-US" altLang="en-US">
+                <a:solidFill>
+                  <a:srgbClr val="FFFFFF"/>
+                </a:solidFill>
+                <a:latin typeface="Sarabun"/>
+                <a:ea typeface="Sarabun"/>
+                <a:cs typeface="Sarabun"/>
+              </a:rPr>
+              <a:t>Staff</a:t>
+            </a:r>
+          </a:p>
+        </p:txBody>
+      </p:sp>
+      <p:sp>
+        <p:nvSpPr>
+          <p:cNvPr id="22" name="TextBox 21"/>
+          <p:cNvSpPr txBox="1"/>
+          <p:nvPr/>
+        </p:nvSpPr>
+        <p:spPr>
+          <a:xfrm>
+            <a:off x="1965960" y="4956048"/>
+            <a:ext cx="8823960" cy="384048"/>
+          </a:xfrm>
+          <a:prstGeom prst="rect">
+            <a:avLst/>
+          </a:prstGeom>
+          <a:noFill/>
+        </p:spPr>
+        <p:txBody>
+          <a:bodyPr wrap="square" anchor="t">
+            <a:spAutoFit/>
+          </a:bodyPr>
+          <a:lstStyle/>
+          <a:p>
+            <a:pPr algn="l"/>
+            <a:r>
+              <a:rPr sz="2200" b="1" i="0" lang="th-TH" altLang="en-US">
+                <a:solidFill>
+                  <a:srgbClr val="24333D"/>
+                </a:solidFill>
+                <a:latin typeface="Sarabun"/>
+                <a:ea typeface="Sarabun"/>
+                <a:cs typeface="Sarabun"/>
+              </a:rPr>
+              <a:t>ขอบคุณค่ะ</a:t>
+            </a:r>
+            <a:r>
+              <a:rPr sz="1500" b="0" i="1" lang="en-US" altLang="en-US">
+                <a:solidFill>
+                  <a:srgbClr val="566873"/>
+                </a:solidFill>
+                <a:latin typeface="Sarabun"/>
+                <a:ea typeface="Sarabun"/>
+                <a:cs typeface="Sarabun"/>
+              </a:rPr>
+              <a:t> (khàawp-khun khâ)</a:t>
+            </a:r>
+          </a:p>
+        </p:txBody>
+      </p:sp>
+      <p:sp>
+        <p:nvSpPr>
+          <p:cNvPr id="23" name="TextBox 22"/>
+          <p:cNvSpPr txBox="1"/>
+          <p:nvPr/>
+        </p:nvSpPr>
+        <p:spPr>
+          <a:xfrm>
+            <a:off x="1965960" y="5239512"/>
+            <a:ext cx="8823960" cy="228600"/>
+          </a:xfrm>
+          <a:prstGeom prst="rect">
+            <a:avLst/>
+          </a:prstGeom>
+          <a:noFill/>
+        </p:spPr>
+        <p:txBody>
+          <a:bodyPr wrap="square" anchor="t">
+            <a:spAutoFit/>
+          </a:bodyPr>
+          <a:lstStyle/>
+          <a:p>
+            <a:pPr algn="l"/>
+            <a:r>
+              <a:rPr sz="1300" b="0" i="0" lang="en-US" altLang="en-US">
+                <a:solidFill>
+                  <a:srgbClr val="566873"/>
+                </a:solidFill>
+                <a:latin typeface="Sarabun"/>
+                <a:ea typeface="Sarabun"/>
+                <a:cs typeface="Sarabun"/>
+              </a:rPr>
+              <a:t>Thank you.</a:t>
             </a:r>
           </a:p>
         </p:txBody>
@@ -12133,7 +12260,7 @@
                 <a:ea typeface="Sarabun"/>
                 <a:cs typeface="Sarabun"/>
               </a:rPr>
-              <a:t>Roleplay</a:t>
+              <a:t>Recap</a:t>
             </a:r>
           </a:p>
         </p:txBody>
@@ -12170,7 +12297,7 @@
                 <a:ea typeface="Sarabun"/>
                 <a:cs typeface="Sarabun"/>
               </a:rPr>
-              <a:t>Roleplay</a:t>
+              <a:t>Recap</a:t>
             </a:r>
           </a:p>
         </p:txBody>
@@ -12183,13 +12310,634 @@
         </p:nvSpPr>
         <p:spPr>
           <a:xfrm>
-            <a:off x="731520" y="1097280"/>
-            <a:ext cx="1051560" cy="274320"/>
+            <a:off x="731520" y="1417320"/>
+            <a:ext cx="7071055" cy="2331720"/>
           </a:xfrm>
           <a:prstGeom prst="roundRect">
             <a:avLst>
-              <a:gd name="adj" fmla="val 28000"/>
+              <a:gd name="adj" fmla="val 6000"/>
             </a:avLst>
+          </a:prstGeom>
+          <a:solidFill>
+            <a:srgbClr val="FFFFFF"/>
+          </a:solidFill>
+          <a:ln>
+            <a:solidFill>
+              <a:srgbClr val="D7DEE3"/>
+            </a:solidFill>
+          </a:ln>
+        </p:spPr>
+        <p:style>
+          <a:lnRef idx="1">
+            <a:schemeClr val="accent1"/>
+          </a:lnRef>
+          <a:fillRef idx="3">
+            <a:schemeClr val="accent1"/>
+          </a:fillRef>
+          <a:effectRef idx="2">
+            <a:schemeClr val="accent1"/>
+          </a:effectRef>
+          <a:fontRef idx="minor">
+            <a:schemeClr val="lt1"/>
+          </a:fontRef>
+        </p:style>
+        <p:txBody>
+          <a:bodyPr rtlCol="0" anchor="ctr"/>
+          <a:lstStyle/>
+          <a:p>
+            <a:pPr algn="ctr"/>
+          </a:p>
+        </p:txBody>
+      </p:sp>
+      <p:sp>
+        <p:nvSpPr>
+          <p:cNvPr id="7" name="TextBox 6"/>
+          <p:cNvSpPr txBox="1"/>
+          <p:nvPr/>
+        </p:nvSpPr>
+        <p:spPr>
+          <a:xfrm>
+            <a:off x="932688" y="1563624"/>
+            <a:ext cx="6705295" cy="228600"/>
+          </a:xfrm>
+          <a:prstGeom prst="rect">
+            <a:avLst/>
+          </a:prstGeom>
+          <a:noFill/>
+        </p:spPr>
+        <p:txBody>
+          <a:bodyPr wrap="square" anchor="t">
+            <a:spAutoFit/>
+          </a:bodyPr>
+          <a:lstStyle/>
+          <a:p>
+            <a:pPr algn="l"/>
+            <a:r>
+              <a:rPr sz="1500" b="1" i="0" lang="en-US" altLang="en-US">
+                <a:solidFill>
+                  <a:srgbClr val="355C7D"/>
+                </a:solidFill>
+                <a:latin typeface="Sarabun"/>
+                <a:ea typeface="Sarabun"/>
+                <a:cs typeface="Sarabun"/>
+              </a:rPr>
+              <a:t>What you can now do</a:t>
+            </a:r>
+          </a:p>
+        </p:txBody>
+      </p:sp>
+      <p:sp>
+        <p:nvSpPr>
+          <p:cNvPr id="8" name="Oval 7"/>
+          <p:cNvSpPr/>
+          <p:nvPr/>
+        </p:nvSpPr>
+        <p:spPr>
+          <a:xfrm>
+            <a:off x="932688" y="1947672"/>
+            <a:ext cx="82296" cy="82296"/>
+          </a:xfrm>
+          <a:prstGeom prst="ellipse">
+            <a:avLst/>
+          </a:prstGeom>
+          <a:solidFill>
+            <a:srgbClr val="355C7D"/>
+          </a:solidFill>
+          <a:ln>
+            <a:noFill/>
+          </a:ln>
+        </p:spPr>
+        <p:style>
+          <a:lnRef idx="1">
+            <a:schemeClr val="accent1"/>
+          </a:lnRef>
+          <a:fillRef idx="3">
+            <a:schemeClr val="accent1"/>
+          </a:fillRef>
+          <a:effectRef idx="2">
+            <a:schemeClr val="accent1"/>
+          </a:effectRef>
+          <a:fontRef idx="minor">
+            <a:schemeClr val="lt1"/>
+          </a:fontRef>
+        </p:style>
+        <p:txBody>
+          <a:bodyPr rtlCol="0" anchor="ctr"/>
+          <a:lstStyle/>
+          <a:p>
+            <a:pPr algn="ctr"/>
+          </a:p>
+        </p:txBody>
+      </p:sp>
+      <p:sp>
+        <p:nvSpPr>
+          <p:cNvPr id="9" name="TextBox 8"/>
+          <p:cNvSpPr txBox="1"/>
+          <p:nvPr/>
+        </p:nvSpPr>
+        <p:spPr>
+          <a:xfrm>
+            <a:off x="1078992" y="1856232"/>
+            <a:ext cx="6568135" cy="274320"/>
+          </a:xfrm>
+          <a:prstGeom prst="rect">
+            <a:avLst/>
+          </a:prstGeom>
+          <a:noFill/>
+        </p:spPr>
+        <p:txBody>
+          <a:bodyPr wrap="square" anchor="t">
+            <a:spAutoFit/>
+          </a:bodyPr>
+          <a:lstStyle/>
+          <a:p>
+            <a:pPr algn="l"/>
+            <a:r>
+              <a:rPr sz="1500" b="0" i="0" lang="en-US" altLang="en-US">
+                <a:solidFill>
+                  <a:srgbClr val="24333D"/>
+                </a:solidFill>
+                <a:latin typeface="Sarabun"/>
+                <a:ea typeface="Sarabun"/>
+                <a:cs typeface="Sarabun"/>
+              </a:rPr>
+              <a:t>Count 0 to 5 in Thai. Go.</a:t>
+            </a:r>
+          </a:p>
+        </p:txBody>
+      </p:sp>
+      <p:sp>
+        <p:nvSpPr>
+          <p:cNvPr id="10" name="Oval 9"/>
+          <p:cNvSpPr/>
+          <p:nvPr/>
+        </p:nvSpPr>
+        <p:spPr>
+          <a:xfrm>
+            <a:off x="932688" y="2258568"/>
+            <a:ext cx="82296" cy="82296"/>
+          </a:xfrm>
+          <a:prstGeom prst="ellipse">
+            <a:avLst/>
+          </a:prstGeom>
+          <a:solidFill>
+            <a:srgbClr val="355C7D"/>
+          </a:solidFill>
+          <a:ln>
+            <a:noFill/>
+          </a:ln>
+        </p:spPr>
+        <p:style>
+          <a:lnRef idx="1">
+            <a:schemeClr val="accent1"/>
+          </a:lnRef>
+          <a:fillRef idx="3">
+            <a:schemeClr val="accent1"/>
+          </a:fillRef>
+          <a:effectRef idx="2">
+            <a:schemeClr val="accent1"/>
+          </a:effectRef>
+          <a:fontRef idx="minor">
+            <a:schemeClr val="lt1"/>
+          </a:fontRef>
+        </p:style>
+        <p:txBody>
+          <a:bodyPr rtlCol="0" anchor="ctr"/>
+          <a:lstStyle/>
+          <a:p>
+            <a:pPr algn="ctr"/>
+          </a:p>
+        </p:txBody>
+      </p:sp>
+      <p:sp>
+        <p:nvSpPr>
+          <p:cNvPr id="11" name="TextBox 10"/>
+          <p:cNvSpPr txBox="1"/>
+          <p:nvPr/>
+        </p:nvSpPr>
+        <p:spPr>
+          <a:xfrm>
+            <a:off x="1078992" y="2167128"/>
+            <a:ext cx="6568135" cy="274320"/>
+          </a:xfrm>
+          <a:prstGeom prst="rect">
+            <a:avLst/>
+          </a:prstGeom>
+          <a:noFill/>
+        </p:spPr>
+        <p:txBody>
+          <a:bodyPr wrap="square" anchor="t">
+            <a:spAutoFit/>
+          </a:bodyPr>
+          <a:lstStyle/>
+          <a:p>
+            <a:pPr algn="l"/>
+            <a:r>
+              <a:rPr sz="1500" b="0" i="0" lang="en-US" altLang="en-US">
+                <a:solidFill>
+                  <a:srgbClr val="24333D"/>
+                </a:solidFill>
+                <a:latin typeface="Sarabun"/>
+                <a:ea typeface="Sarabun"/>
+                <a:cs typeface="Sarabun"/>
+              </a:rPr>
+              <a:t>Now 6 to 10.</a:t>
+            </a:r>
+          </a:p>
+        </p:txBody>
+      </p:sp>
+      <p:sp>
+        <p:nvSpPr>
+          <p:cNvPr id="12" name="Oval 11"/>
+          <p:cNvSpPr/>
+          <p:nvPr/>
+        </p:nvSpPr>
+        <p:spPr>
+          <a:xfrm>
+            <a:off x="932688" y="2569464"/>
+            <a:ext cx="82296" cy="82296"/>
+          </a:xfrm>
+          <a:prstGeom prst="ellipse">
+            <a:avLst/>
+          </a:prstGeom>
+          <a:solidFill>
+            <a:srgbClr val="355C7D"/>
+          </a:solidFill>
+          <a:ln>
+            <a:noFill/>
+          </a:ln>
+        </p:spPr>
+        <p:style>
+          <a:lnRef idx="1">
+            <a:schemeClr val="accent1"/>
+          </a:lnRef>
+          <a:fillRef idx="3">
+            <a:schemeClr val="accent1"/>
+          </a:fillRef>
+          <a:effectRef idx="2">
+            <a:schemeClr val="accent1"/>
+          </a:effectRef>
+          <a:fontRef idx="minor">
+            <a:schemeClr val="lt1"/>
+          </a:fontRef>
+        </p:style>
+        <p:txBody>
+          <a:bodyPr rtlCol="0" anchor="ctr"/>
+          <a:lstStyle/>
+          <a:p>
+            <a:pPr algn="ctr"/>
+          </a:p>
+        </p:txBody>
+      </p:sp>
+      <p:sp>
+        <p:nvSpPr>
+          <p:cNvPr id="13" name="TextBox 12"/>
+          <p:cNvSpPr txBox="1"/>
+          <p:nvPr/>
+        </p:nvSpPr>
+        <p:spPr>
+          <a:xfrm>
+            <a:off x="1078992" y="2478024"/>
+            <a:ext cx="6568135" cy="274320"/>
+          </a:xfrm>
+          <a:prstGeom prst="rect">
+            <a:avLst/>
+          </a:prstGeom>
+          <a:noFill/>
+        </p:spPr>
+        <p:txBody>
+          <a:bodyPr wrap="square" anchor="t">
+            <a:spAutoFit/>
+          </a:bodyPr>
+          <a:lstStyle/>
+          <a:p>
+            <a:pPr algn="l"/>
+            <a:r>
+              <a:rPr sz="1500" b="0" i="0" lang="en-US" altLang="en-US">
+                <a:solidFill>
+                  <a:srgbClr val="24333D"/>
+                </a:solidFill>
+                <a:latin typeface="Sarabun"/>
+                <a:ea typeface="Sarabun"/>
+                <a:cs typeface="Sarabun"/>
+              </a:rPr>
+              <a:t>Ask 'what number?' </a:t>
+            </a:r>
+            <a:r>
+              <a:rPr sz="1500" b="0" i="0" lang="th-TH" altLang="en-US">
+                <a:solidFill>
+                  <a:srgbClr val="24333D"/>
+                </a:solidFill>
+                <a:latin typeface="Sarabun"/>
+                <a:ea typeface="Sarabun"/>
+                <a:cs typeface="Sarabun"/>
+              </a:rPr>
+              <a:t>เบอร์อะไร</a:t>
+            </a:r>
+            <a:r>
+              <a:rPr sz="1500" b="0" i="1" lang="en-US" altLang="en-US">
+                <a:solidFill>
+                  <a:srgbClr val="566873"/>
+                </a:solidFill>
+                <a:latin typeface="Sarabun"/>
+                <a:ea typeface="Sarabun"/>
+                <a:cs typeface="Sarabun"/>
+              </a:rPr>
+              <a:t> (ber à-rai)</a:t>
+            </a:r>
+            <a:r>
+              <a:rPr sz="1500" b="0" i="0" lang="en-US" altLang="en-US">
+                <a:solidFill>
+                  <a:srgbClr val="24333D"/>
+                </a:solidFill>
+                <a:latin typeface="Sarabun"/>
+                <a:ea typeface="Sarabun"/>
+                <a:cs typeface="Sarabun"/>
+              </a:rPr>
+              <a:t>.</a:t>
+            </a:r>
+          </a:p>
+        </p:txBody>
+      </p:sp>
+      <p:sp>
+        <p:nvSpPr>
+          <p:cNvPr id="14" name="Oval 13"/>
+          <p:cNvSpPr/>
+          <p:nvPr/>
+        </p:nvSpPr>
+        <p:spPr>
+          <a:xfrm>
+            <a:off x="932688" y="2880360"/>
+            <a:ext cx="82296" cy="82296"/>
+          </a:xfrm>
+          <a:prstGeom prst="ellipse">
+            <a:avLst/>
+          </a:prstGeom>
+          <a:solidFill>
+            <a:srgbClr val="355C7D"/>
+          </a:solidFill>
+          <a:ln>
+            <a:noFill/>
+          </a:ln>
+        </p:spPr>
+        <p:style>
+          <a:lnRef idx="1">
+            <a:schemeClr val="accent1"/>
+          </a:lnRef>
+          <a:fillRef idx="3">
+            <a:schemeClr val="accent1"/>
+          </a:fillRef>
+          <a:effectRef idx="2">
+            <a:schemeClr val="accent1"/>
+          </a:effectRef>
+          <a:fontRef idx="minor">
+            <a:schemeClr val="lt1"/>
+          </a:fontRef>
+        </p:style>
+        <p:txBody>
+          <a:bodyPr rtlCol="0" anchor="ctr"/>
+          <a:lstStyle/>
+          <a:p>
+            <a:pPr algn="ctr"/>
+          </a:p>
+        </p:txBody>
+      </p:sp>
+      <p:sp>
+        <p:nvSpPr>
+          <p:cNvPr id="15" name="TextBox 14"/>
+          <p:cNvSpPr txBox="1"/>
+          <p:nvPr/>
+        </p:nvSpPr>
+        <p:spPr>
+          <a:xfrm>
+            <a:off x="1078992" y="2788920"/>
+            <a:ext cx="6568135" cy="274320"/>
+          </a:xfrm>
+          <a:prstGeom prst="rect">
+            <a:avLst/>
+          </a:prstGeom>
+          <a:noFill/>
+        </p:spPr>
+        <p:txBody>
+          <a:bodyPr wrap="square" anchor="t">
+            <a:spAutoFit/>
+          </a:bodyPr>
+          <a:lstStyle/>
+          <a:p>
+            <a:pPr algn="l"/>
+            <a:r>
+              <a:rPr sz="1500" b="0" i="0" lang="en-US" altLang="en-US">
+                <a:solidFill>
+                  <a:srgbClr val="24333D"/>
+                </a:solidFill>
+                <a:latin typeface="Sarabun"/>
+                <a:ea typeface="Sarabun"/>
+                <a:cs typeface="Sarabun"/>
+              </a:rPr>
+              <a:t>Say 'I am 30 years old' in Thai.</a:t>
+            </a:r>
+          </a:p>
+        </p:txBody>
+      </p:sp>
+      <p:sp>
+        <p:nvSpPr>
+          <p:cNvPr id="16" name="Oval 15"/>
+          <p:cNvSpPr/>
+          <p:nvPr/>
+        </p:nvSpPr>
+        <p:spPr>
+          <a:xfrm>
+            <a:off x="932688" y="3191256"/>
+            <a:ext cx="82296" cy="82296"/>
+          </a:xfrm>
+          <a:prstGeom prst="ellipse">
+            <a:avLst/>
+          </a:prstGeom>
+          <a:solidFill>
+            <a:srgbClr val="355C7D"/>
+          </a:solidFill>
+          <a:ln>
+            <a:noFill/>
+          </a:ln>
+        </p:spPr>
+        <p:style>
+          <a:lnRef idx="1">
+            <a:schemeClr val="accent1"/>
+          </a:lnRef>
+          <a:fillRef idx="3">
+            <a:schemeClr val="accent1"/>
+          </a:fillRef>
+          <a:effectRef idx="2">
+            <a:schemeClr val="accent1"/>
+          </a:effectRef>
+          <a:fontRef idx="minor">
+            <a:schemeClr val="lt1"/>
+          </a:fontRef>
+        </p:style>
+        <p:txBody>
+          <a:bodyPr rtlCol="0" anchor="ctr"/>
+          <a:lstStyle/>
+          <a:p>
+            <a:pPr algn="ctr"/>
+          </a:p>
+        </p:txBody>
+      </p:sp>
+      <p:sp>
+        <p:nvSpPr>
+          <p:cNvPr id="17" name="TextBox 16"/>
+          <p:cNvSpPr txBox="1"/>
+          <p:nvPr/>
+        </p:nvSpPr>
+        <p:spPr>
+          <a:xfrm>
+            <a:off x="1078992" y="3099816"/>
+            <a:ext cx="6568135" cy="274320"/>
+          </a:xfrm>
+          <a:prstGeom prst="rect">
+            <a:avLst/>
+          </a:prstGeom>
+          <a:noFill/>
+        </p:spPr>
+        <p:txBody>
+          <a:bodyPr wrap="square" anchor="t">
+            <a:spAutoFit/>
+          </a:bodyPr>
+          <a:lstStyle/>
+          <a:p>
+            <a:pPr algn="l"/>
+            <a:r>
+              <a:rPr sz="1500" b="0" i="0" lang="th-TH" altLang="en-US">
+                <a:solidFill>
+                  <a:srgbClr val="24333D"/>
+                </a:solidFill>
+                <a:latin typeface="Sarabun"/>
+                <a:ea typeface="Sarabun"/>
+                <a:cs typeface="Sarabun"/>
+              </a:rPr>
+              <a:t>สี่</a:t>
+            </a:r>
+            <a:r>
+              <a:rPr sz="1500" b="0" i="1" lang="en-US" altLang="en-US">
+                <a:solidFill>
+                  <a:srgbClr val="566873"/>
+                </a:solidFill>
+                <a:latin typeface="Sarabun"/>
+                <a:ea typeface="Sarabun"/>
+                <a:cs typeface="Sarabun"/>
+              </a:rPr>
+              <a:t> (sìi)</a:t>
+            </a:r>
+            <a:r>
+              <a:rPr sz="1500" b="0" i="0" lang="en-US" altLang="en-US">
+                <a:solidFill>
+                  <a:srgbClr val="24333D"/>
+                </a:solidFill>
+                <a:latin typeface="Sarabun"/>
+                <a:ea typeface="Sarabun"/>
+                <a:cs typeface="Sarabun"/>
+              </a:rPr>
+              <a:t> is low tone. Rising tone means what?</a:t>
+            </a:r>
+          </a:p>
+        </p:txBody>
+      </p:sp>
+      <p:sp>
+        <p:nvSpPr>
+          <p:cNvPr id="18" name="Rounded Rectangle 17"/>
+          <p:cNvSpPr/>
+          <p:nvPr/>
+        </p:nvSpPr>
+        <p:spPr>
+          <a:xfrm>
+            <a:off x="731520" y="4160520"/>
+            <a:ext cx="10058400" cy="1289304"/>
+          </a:xfrm>
+          <a:prstGeom prst="roundRect">
+            <a:avLst>
+              <a:gd name="adj" fmla="val 6000"/>
+            </a:avLst>
+          </a:prstGeom>
+          <a:solidFill>
+            <a:srgbClr val="FFFFFF"/>
+          </a:solidFill>
+          <a:ln>
+            <a:solidFill>
+              <a:srgbClr val="D7DEE3"/>
+            </a:solidFill>
+          </a:ln>
+        </p:spPr>
+        <p:style>
+          <a:lnRef idx="1">
+            <a:schemeClr val="accent1"/>
+          </a:lnRef>
+          <a:fillRef idx="3">
+            <a:schemeClr val="accent1"/>
+          </a:fillRef>
+          <a:effectRef idx="2">
+            <a:schemeClr val="accent1"/>
+          </a:effectRef>
+          <a:fontRef idx="minor">
+            <a:schemeClr val="lt1"/>
+          </a:fontRef>
+        </p:style>
+        <p:txBody>
+          <a:bodyPr rtlCol="0" anchor="ctr"/>
+          <a:lstStyle/>
+          <a:p>
+            <a:pPr algn="ctr"/>
+          </a:p>
+        </p:txBody>
+      </p:sp>
+      <p:sp>
+        <p:nvSpPr>
+          <p:cNvPr id="19" name="TextBox 18"/>
+          <p:cNvSpPr txBox="1"/>
+          <p:nvPr/>
+        </p:nvSpPr>
+        <p:spPr>
+          <a:xfrm>
+            <a:off x="932688" y="4306824"/>
+            <a:ext cx="9692640" cy="228600"/>
+          </a:xfrm>
+          <a:prstGeom prst="rect">
+            <a:avLst/>
+          </a:prstGeom>
+          <a:noFill/>
+        </p:spPr>
+        <p:txBody>
+          <a:bodyPr wrap="square" anchor="t">
+            <a:spAutoFit/>
+          </a:bodyPr>
+          <a:lstStyle/>
+          <a:p>
+            <a:pPr algn="l"/>
+            <a:r>
+              <a:rPr sz="1500" b="1" i="0" lang="en-US" altLang="en-US">
+                <a:solidFill>
+                  <a:srgbClr val="7A8F54"/>
+                </a:solidFill>
+                <a:latin typeface="Sarabun"/>
+                <a:ea typeface="Sarabun"/>
+                <a:cs typeface="Sarabun"/>
+              </a:rPr>
+              <a:t>Remember</a:t>
+            </a:r>
+          </a:p>
+        </p:txBody>
+      </p:sp>
+      <p:sp>
+        <p:nvSpPr>
+          <p:cNvPr id="20" name="Oval 19"/>
+          <p:cNvSpPr/>
+          <p:nvPr/>
+        </p:nvSpPr>
+        <p:spPr>
+          <a:xfrm>
+            <a:off x="932688" y="4690872"/>
+            <a:ext cx="82296" cy="82296"/>
+          </a:xfrm>
+          <a:prstGeom prst="ellipse">
+            <a:avLst/>
           </a:prstGeom>
           <a:solidFill>
             <a:srgbClr val="7A8F54"/>
@@ -12213,34 +12961,23 @@
           </a:fontRef>
         </p:style>
         <p:txBody>
-          <a:bodyPr rtlCol="0" anchor="ctr" wrap="none"/>
+          <a:bodyPr rtlCol="0" anchor="ctr"/>
           <a:lstStyle/>
           <a:p>
             <a:pPr algn="ctr"/>
-            <a:r>
-              <a:rPr sz="1200" b="1" lang="en-US" altLang="en-US">
-                <a:solidFill>
-                  <a:srgbClr val="FFFFFF"/>
-                </a:solidFill>
-                <a:latin typeface="Sarabun"/>
-                <a:ea typeface="Sarabun"/>
-                <a:cs typeface="Sarabun"/>
-              </a:rPr>
-              <a:t>You</a:t>
-            </a:r>
-          </a:p>
-        </p:txBody>
-      </p:sp>
-      <p:sp>
-        <p:nvSpPr>
-          <p:cNvPr id="7" name="TextBox 6"/>
+          </a:p>
+        </p:txBody>
+      </p:sp>
+      <p:sp>
+        <p:nvSpPr>
+          <p:cNvPr id="21" name="TextBox 20"/>
           <p:cNvSpPr txBox="1"/>
           <p:nvPr/>
         </p:nvSpPr>
         <p:spPr>
           <a:xfrm>
-            <a:off x="1965960" y="1069848"/>
-            <a:ext cx="5836615" cy="384048"/>
+            <a:off x="1078992" y="4599432"/>
+            <a:ext cx="9555480" cy="274320"/>
           </a:xfrm>
           <a:prstGeom prst="rect">
             <a:avLst/>
@@ -12255,15 +12992,15 @@
           <a:p>
             <a:pPr algn="l"/>
             <a:r>
-              <a:rPr sz="2200" b="1" i="0" lang="th-TH" altLang="en-US">
-                <a:solidFill>
-                  <a:srgbClr val="24333D"/>
-                </a:solidFill>
-                <a:latin typeface="Sarabun"/>
-                <a:ea typeface="Sarabun"/>
-                <a:cs typeface="Sarabun"/>
-              </a:rPr>
-              <a:t>สวัสดีครับ</a:t>
+              <a:rPr sz="1500" b="0" i="0" lang="th-TH" altLang="en-US">
+                <a:solidFill>
+                  <a:srgbClr val="24333D"/>
+                </a:solidFill>
+                <a:latin typeface="Sarabun"/>
+                <a:ea typeface="Sarabun"/>
+                <a:cs typeface="Sarabun"/>
+              </a:rPr>
+              <a:t>สี่</a:t>
             </a:r>
             <a:r>
               <a:rPr sz="1500" b="0" i="1" lang="en-US" altLang="en-US">
@@ -12274,749 +13011,18 @@
                 <a:ea typeface="Sarabun"/>
                 <a:cs typeface="Sarabun"/>
               </a:rPr>
-              <a:t> (sà-wàt-dii khráp)</a:t>
-            </a:r>
-          </a:p>
-        </p:txBody>
-      </p:sp>
-      <p:sp>
-        <p:nvSpPr>
-          <p:cNvPr id="8" name="TextBox 7"/>
-          <p:cNvSpPr txBox="1"/>
-          <p:nvPr/>
-        </p:nvSpPr>
-        <p:spPr>
-          <a:xfrm>
-            <a:off x="1965960" y="1353312"/>
-            <a:ext cx="5836615" cy="228600"/>
-          </a:xfrm>
-          <a:prstGeom prst="rect">
-            <a:avLst/>
-          </a:prstGeom>
-          <a:noFill/>
-        </p:spPr>
-        <p:txBody>
-          <a:bodyPr wrap="square" anchor="t">
-            <a:spAutoFit/>
-          </a:bodyPr>
-          <a:lstStyle/>
-          <a:p>
-            <a:pPr algn="l"/>
-            <a:r>
-              <a:rPr sz="1300" b="0" i="0" lang="en-US" altLang="en-US">
-                <a:solidFill>
-                  <a:srgbClr val="566873"/>
-                </a:solidFill>
-                <a:latin typeface="Sarabun"/>
-                <a:ea typeface="Sarabun"/>
-                <a:cs typeface="Sarabun"/>
-              </a:rPr>
-              <a:t>Hello.</a:t>
-            </a:r>
-          </a:p>
-        </p:txBody>
-      </p:sp>
-      <p:sp>
-        <p:nvSpPr>
-          <p:cNvPr id="9" name="Rounded Rectangle 8"/>
-          <p:cNvSpPr/>
-          <p:nvPr/>
-        </p:nvSpPr>
-        <p:spPr>
-          <a:xfrm>
-            <a:off x="731520" y="1874520"/>
-            <a:ext cx="1051560" cy="274320"/>
-          </a:xfrm>
-          <a:prstGeom prst="roundRect">
-            <a:avLst>
-              <a:gd name="adj" fmla="val 28000"/>
-            </a:avLst>
-          </a:prstGeom>
-          <a:solidFill>
-            <a:srgbClr val="C96F4A"/>
-          </a:solidFill>
-          <a:ln>
-            <a:noFill/>
-          </a:ln>
-        </p:spPr>
-        <p:style>
-          <a:lnRef idx="1">
-            <a:schemeClr val="accent1"/>
-          </a:lnRef>
-          <a:fillRef idx="3">
-            <a:schemeClr val="accent1"/>
-          </a:fillRef>
-          <a:effectRef idx="2">
-            <a:schemeClr val="accent1"/>
-          </a:effectRef>
-          <a:fontRef idx="minor">
-            <a:schemeClr val="lt1"/>
-          </a:fontRef>
-        </p:style>
-        <p:txBody>
-          <a:bodyPr rtlCol="0" anchor="ctr" wrap="none"/>
-          <a:lstStyle/>
-          <a:p>
-            <a:pPr algn="ctr"/>
-            <a:r>
-              <a:rPr sz="1200" b="1" lang="en-US" altLang="en-US">
-                <a:solidFill>
-                  <a:srgbClr val="FFFFFF"/>
-                </a:solidFill>
-                <a:latin typeface="Sarabun"/>
-                <a:ea typeface="Sarabun"/>
-                <a:cs typeface="Sarabun"/>
-              </a:rPr>
-              <a:t>Staff</a:t>
-            </a:r>
-          </a:p>
-        </p:txBody>
-      </p:sp>
-      <p:sp>
-        <p:nvSpPr>
-          <p:cNvPr id="10" name="TextBox 9"/>
-          <p:cNvSpPr txBox="1"/>
-          <p:nvPr/>
-        </p:nvSpPr>
-        <p:spPr>
-          <a:xfrm>
-            <a:off x="1965960" y="1847088"/>
-            <a:ext cx="5836615" cy="384048"/>
-          </a:xfrm>
-          <a:prstGeom prst="rect">
-            <a:avLst/>
-          </a:prstGeom>
-          <a:noFill/>
-        </p:spPr>
-        <p:txBody>
-          <a:bodyPr wrap="square" anchor="t">
-            <a:spAutoFit/>
-          </a:bodyPr>
-          <a:lstStyle/>
-          <a:p>
-            <a:pPr algn="l"/>
-            <a:r>
-              <a:rPr sz="2200" b="1" i="0" lang="th-TH" altLang="en-US">
-                <a:solidFill>
-                  <a:srgbClr val="24333D"/>
-                </a:solidFill>
-                <a:latin typeface="Sarabun"/>
-                <a:ea typeface="Sarabun"/>
-                <a:cs typeface="Sarabun"/>
-              </a:rPr>
-              <a:t>สวัสดีค่ะ ห้องเบอร์อะไรคะ</a:t>
-            </a:r>
-            <a:r>
-              <a:rPr sz="1500" b="0" i="1" lang="en-US" altLang="en-US">
-                <a:solidFill>
-                  <a:srgbClr val="566873"/>
-                </a:solidFill>
-                <a:latin typeface="Sarabun"/>
-                <a:ea typeface="Sarabun"/>
-                <a:cs typeface="Sarabun"/>
-              </a:rPr>
-              <a:t> (sà-wàt-dii khâ hâawng ber à-rai khá)</a:t>
-            </a:r>
-          </a:p>
-        </p:txBody>
-      </p:sp>
-      <p:sp>
-        <p:nvSpPr>
-          <p:cNvPr id="11" name="TextBox 10"/>
-          <p:cNvSpPr txBox="1"/>
-          <p:nvPr/>
-        </p:nvSpPr>
-        <p:spPr>
-          <a:xfrm>
-            <a:off x="1965960" y="2130552"/>
-            <a:ext cx="5836615" cy="228600"/>
-          </a:xfrm>
-          <a:prstGeom prst="rect">
-            <a:avLst/>
-          </a:prstGeom>
-          <a:noFill/>
-        </p:spPr>
-        <p:txBody>
-          <a:bodyPr wrap="square" anchor="t">
-            <a:spAutoFit/>
-          </a:bodyPr>
-          <a:lstStyle/>
-          <a:p>
-            <a:pPr algn="l"/>
-            <a:r>
-              <a:rPr sz="1300" b="0" i="0" lang="en-US" altLang="en-US">
-                <a:solidFill>
-                  <a:srgbClr val="566873"/>
-                </a:solidFill>
-                <a:latin typeface="Sarabun"/>
-                <a:ea typeface="Sarabun"/>
-                <a:cs typeface="Sarabun"/>
-              </a:rPr>
-              <a:t>Hello. What is the room number?</a:t>
-            </a:r>
-          </a:p>
-        </p:txBody>
-      </p:sp>
-      <p:sp>
-        <p:nvSpPr>
-          <p:cNvPr id="12" name="Rounded Rectangle 11"/>
-          <p:cNvSpPr/>
-          <p:nvPr/>
-        </p:nvSpPr>
-        <p:spPr>
-          <a:xfrm>
-            <a:off x="731520" y="2651760"/>
-            <a:ext cx="1051560" cy="274320"/>
-          </a:xfrm>
-          <a:prstGeom prst="roundRect">
-            <a:avLst>
-              <a:gd name="adj" fmla="val 28000"/>
-            </a:avLst>
-          </a:prstGeom>
-          <a:solidFill>
-            <a:srgbClr val="7A8F54"/>
-          </a:solidFill>
-          <a:ln>
-            <a:noFill/>
-          </a:ln>
-        </p:spPr>
-        <p:style>
-          <a:lnRef idx="1">
-            <a:schemeClr val="accent1"/>
-          </a:lnRef>
-          <a:fillRef idx="3">
-            <a:schemeClr val="accent1"/>
-          </a:fillRef>
-          <a:effectRef idx="2">
-            <a:schemeClr val="accent1"/>
-          </a:effectRef>
-          <a:fontRef idx="minor">
-            <a:schemeClr val="lt1"/>
-          </a:fontRef>
-        </p:style>
-        <p:txBody>
-          <a:bodyPr rtlCol="0" anchor="ctr" wrap="none"/>
-          <a:lstStyle/>
-          <a:p>
-            <a:pPr algn="ctr"/>
-            <a:r>
-              <a:rPr sz="1200" b="1" lang="en-US" altLang="en-US">
-                <a:solidFill>
-                  <a:srgbClr val="FFFFFF"/>
-                </a:solidFill>
-                <a:latin typeface="Sarabun"/>
-                <a:ea typeface="Sarabun"/>
-                <a:cs typeface="Sarabun"/>
-              </a:rPr>
-              <a:t>You</a:t>
-            </a:r>
-          </a:p>
-        </p:txBody>
-      </p:sp>
-      <p:sp>
-        <p:nvSpPr>
-          <p:cNvPr id="13" name="TextBox 12"/>
-          <p:cNvSpPr txBox="1"/>
-          <p:nvPr/>
-        </p:nvSpPr>
-        <p:spPr>
-          <a:xfrm>
-            <a:off x="1965960" y="2624328"/>
-            <a:ext cx="5836615" cy="384048"/>
-          </a:xfrm>
-          <a:prstGeom prst="rect">
-            <a:avLst/>
-          </a:prstGeom>
-          <a:noFill/>
-        </p:spPr>
-        <p:txBody>
-          <a:bodyPr wrap="square" anchor="t">
-            <a:spAutoFit/>
-          </a:bodyPr>
-          <a:lstStyle/>
-          <a:p>
-            <a:pPr algn="l"/>
-            <a:r>
-              <a:rPr sz="2200" b="1" i="0" lang="th-TH" altLang="en-US">
-                <a:solidFill>
-                  <a:srgbClr val="24333D"/>
-                </a:solidFill>
-                <a:latin typeface="Sarabun"/>
-                <a:ea typeface="Sarabun"/>
-                <a:cs typeface="Sarabun"/>
-              </a:rPr>
-              <a:t>ห้า-ศูนย์-สองครับ</a:t>
-            </a:r>
-            <a:r>
-              <a:rPr sz="1500" b="0" i="1" lang="en-US" altLang="en-US">
-                <a:solidFill>
-                  <a:srgbClr val="566873"/>
-                </a:solidFill>
-                <a:latin typeface="Sarabun"/>
-                <a:ea typeface="Sarabun"/>
-                <a:cs typeface="Sarabun"/>
-              </a:rPr>
-              <a:t> (hâa-sǔun-sǎawng khráp)</a:t>
-            </a:r>
-          </a:p>
-        </p:txBody>
-      </p:sp>
-      <p:sp>
-        <p:nvSpPr>
-          <p:cNvPr id="14" name="TextBox 13"/>
-          <p:cNvSpPr txBox="1"/>
-          <p:nvPr/>
-        </p:nvSpPr>
-        <p:spPr>
-          <a:xfrm>
-            <a:off x="1965960" y="2907792"/>
-            <a:ext cx="5836615" cy="228600"/>
-          </a:xfrm>
-          <a:prstGeom prst="rect">
-            <a:avLst/>
-          </a:prstGeom>
-          <a:noFill/>
-        </p:spPr>
-        <p:txBody>
-          <a:bodyPr wrap="square" anchor="t">
-            <a:spAutoFit/>
-          </a:bodyPr>
-          <a:lstStyle/>
-          <a:p>
-            <a:pPr algn="l"/>
-            <a:r>
-              <a:rPr sz="1300" b="0" i="0" lang="en-US" altLang="en-US">
-                <a:solidFill>
-                  <a:srgbClr val="566873"/>
-                </a:solidFill>
-                <a:latin typeface="Sarabun"/>
-                <a:ea typeface="Sarabun"/>
-                <a:cs typeface="Sarabun"/>
-              </a:rPr>
-              <a:t>Five-zero-two.</a:t>
-            </a:r>
-          </a:p>
-        </p:txBody>
-      </p:sp>
-      <p:sp>
-        <p:nvSpPr>
-          <p:cNvPr id="15" name="Rounded Rectangle 14"/>
-          <p:cNvSpPr/>
-          <p:nvPr/>
-        </p:nvSpPr>
-        <p:spPr>
-          <a:xfrm>
-            <a:off x="731520" y="3429000"/>
-            <a:ext cx="1051560" cy="274320"/>
-          </a:xfrm>
-          <a:prstGeom prst="roundRect">
-            <a:avLst>
-              <a:gd name="adj" fmla="val 28000"/>
-            </a:avLst>
-          </a:prstGeom>
-          <a:solidFill>
-            <a:srgbClr val="C96F4A"/>
-          </a:solidFill>
-          <a:ln>
-            <a:noFill/>
-          </a:ln>
-        </p:spPr>
-        <p:style>
-          <a:lnRef idx="1">
-            <a:schemeClr val="accent1"/>
-          </a:lnRef>
-          <a:fillRef idx="3">
-            <a:schemeClr val="accent1"/>
-          </a:fillRef>
-          <a:effectRef idx="2">
-            <a:schemeClr val="accent1"/>
-          </a:effectRef>
-          <a:fontRef idx="minor">
-            <a:schemeClr val="lt1"/>
-          </a:fontRef>
-        </p:style>
-        <p:txBody>
-          <a:bodyPr rtlCol="0" anchor="ctr" wrap="none"/>
-          <a:lstStyle/>
-          <a:p>
-            <a:pPr algn="ctr"/>
-            <a:r>
-              <a:rPr sz="1200" b="1" lang="en-US" altLang="en-US">
-                <a:solidFill>
-                  <a:srgbClr val="FFFFFF"/>
-                </a:solidFill>
-                <a:latin typeface="Sarabun"/>
-                <a:ea typeface="Sarabun"/>
-                <a:cs typeface="Sarabun"/>
-              </a:rPr>
-              <a:t>Staff</a:t>
-            </a:r>
-          </a:p>
-        </p:txBody>
-      </p:sp>
-      <p:sp>
-        <p:nvSpPr>
-          <p:cNvPr id="16" name="TextBox 15"/>
-          <p:cNvSpPr txBox="1"/>
-          <p:nvPr/>
-        </p:nvSpPr>
-        <p:spPr>
-          <a:xfrm>
-            <a:off x="1965960" y="3401568"/>
-            <a:ext cx="8823960" cy="384048"/>
-          </a:xfrm>
-          <a:prstGeom prst="rect">
-            <a:avLst/>
-          </a:prstGeom>
-          <a:noFill/>
-        </p:spPr>
-        <p:txBody>
-          <a:bodyPr wrap="square" anchor="t">
-            <a:spAutoFit/>
-          </a:bodyPr>
-          <a:lstStyle/>
-          <a:p>
-            <a:pPr algn="l"/>
-            <a:r>
-              <a:rPr sz="2200" b="1" i="0" lang="th-TH" altLang="en-US">
-                <a:solidFill>
-                  <a:srgbClr val="24333D"/>
-                </a:solidFill>
-                <a:latin typeface="Sarabun"/>
-                <a:ea typeface="Sarabun"/>
-                <a:cs typeface="Sarabun"/>
-              </a:rPr>
-              <a:t>ค่ะ คุณอายุเท่าไหร่คะ</a:t>
-            </a:r>
-            <a:r>
-              <a:rPr sz="1500" b="0" i="1" lang="en-US" altLang="en-US">
-                <a:solidFill>
-                  <a:srgbClr val="566873"/>
-                </a:solidFill>
-                <a:latin typeface="Sarabun"/>
-                <a:ea typeface="Sarabun"/>
-                <a:cs typeface="Sarabun"/>
-              </a:rPr>
-              <a:t> (khâ khun aa-yú thâo-rài khá)</a:t>
-            </a:r>
-          </a:p>
-        </p:txBody>
-      </p:sp>
-      <p:sp>
-        <p:nvSpPr>
-          <p:cNvPr id="17" name="TextBox 16"/>
-          <p:cNvSpPr txBox="1"/>
-          <p:nvPr/>
-        </p:nvSpPr>
-        <p:spPr>
-          <a:xfrm>
-            <a:off x="1965960" y="3685032"/>
-            <a:ext cx="8823960" cy="228600"/>
-          </a:xfrm>
-          <a:prstGeom prst="rect">
-            <a:avLst/>
-          </a:prstGeom>
-          <a:noFill/>
-        </p:spPr>
-        <p:txBody>
-          <a:bodyPr wrap="square" anchor="t">
-            <a:spAutoFit/>
-          </a:bodyPr>
-          <a:lstStyle/>
-          <a:p>
-            <a:pPr algn="l"/>
-            <a:r>
-              <a:rPr sz="1300" b="0" i="0" lang="en-US" altLang="en-US">
-                <a:solidFill>
-                  <a:srgbClr val="566873"/>
-                </a:solidFill>
-                <a:latin typeface="Sarabun"/>
-                <a:ea typeface="Sarabun"/>
-                <a:cs typeface="Sarabun"/>
-              </a:rPr>
-              <a:t>Okay. How old are you?</a:t>
-            </a:r>
-          </a:p>
-        </p:txBody>
-      </p:sp>
-      <p:sp>
-        <p:nvSpPr>
-          <p:cNvPr id="18" name="Rounded Rectangle 17"/>
-          <p:cNvSpPr/>
-          <p:nvPr/>
-        </p:nvSpPr>
-        <p:spPr>
-          <a:xfrm>
-            <a:off x="731520" y="4206240"/>
-            <a:ext cx="1051560" cy="274320"/>
-          </a:xfrm>
-          <a:prstGeom prst="roundRect">
-            <a:avLst>
-              <a:gd name="adj" fmla="val 28000"/>
-            </a:avLst>
-          </a:prstGeom>
-          <a:solidFill>
-            <a:srgbClr val="7A8F54"/>
-          </a:solidFill>
-          <a:ln>
-            <a:noFill/>
-          </a:ln>
-        </p:spPr>
-        <p:style>
-          <a:lnRef idx="1">
-            <a:schemeClr val="accent1"/>
-          </a:lnRef>
-          <a:fillRef idx="3">
-            <a:schemeClr val="accent1"/>
-          </a:fillRef>
-          <a:effectRef idx="2">
-            <a:schemeClr val="accent1"/>
-          </a:effectRef>
-          <a:fontRef idx="minor">
-            <a:schemeClr val="lt1"/>
-          </a:fontRef>
-        </p:style>
-        <p:txBody>
-          <a:bodyPr rtlCol="0" anchor="ctr" wrap="none"/>
-          <a:lstStyle/>
-          <a:p>
-            <a:pPr algn="ctr"/>
-            <a:r>
-              <a:rPr sz="1200" b="1" lang="en-US" altLang="en-US">
-                <a:solidFill>
-                  <a:srgbClr val="FFFFFF"/>
-                </a:solidFill>
-                <a:latin typeface="Sarabun"/>
-                <a:ea typeface="Sarabun"/>
-                <a:cs typeface="Sarabun"/>
-              </a:rPr>
-              <a:t>You</a:t>
-            </a:r>
-          </a:p>
-        </p:txBody>
-      </p:sp>
-      <p:sp>
-        <p:nvSpPr>
-          <p:cNvPr id="19" name="TextBox 18"/>
-          <p:cNvSpPr txBox="1"/>
-          <p:nvPr/>
-        </p:nvSpPr>
-        <p:spPr>
-          <a:xfrm>
-            <a:off x="1965960" y="4178808"/>
-            <a:ext cx="8823960" cy="384048"/>
-          </a:xfrm>
-          <a:prstGeom prst="rect">
-            <a:avLst/>
-          </a:prstGeom>
-          <a:noFill/>
-        </p:spPr>
-        <p:txBody>
-          <a:bodyPr wrap="square" anchor="t">
-            <a:spAutoFit/>
-          </a:bodyPr>
-          <a:lstStyle/>
-          <a:p>
-            <a:pPr algn="l"/>
-            <a:r>
-              <a:rPr sz="2200" b="1" i="0" lang="th-TH" altLang="en-US">
-                <a:solidFill>
-                  <a:srgbClr val="24333D"/>
-                </a:solidFill>
-                <a:latin typeface="Sarabun"/>
-                <a:ea typeface="Sarabun"/>
-                <a:cs typeface="Sarabun"/>
-              </a:rPr>
-              <a:t>ผมอายุสิบปีครับ</a:t>
-            </a:r>
-            <a:r>
-              <a:rPr sz="1500" b="0" i="1" lang="en-US" altLang="en-US">
-                <a:solidFill>
-                  <a:srgbClr val="566873"/>
-                </a:solidFill>
-                <a:latin typeface="Sarabun"/>
-                <a:ea typeface="Sarabun"/>
-                <a:cs typeface="Sarabun"/>
-              </a:rPr>
-              <a:t> (phǒm aa-yú sìp bpii khráp)</a:t>
-            </a:r>
-          </a:p>
-        </p:txBody>
-      </p:sp>
-      <p:sp>
-        <p:nvSpPr>
-          <p:cNvPr id="20" name="TextBox 19"/>
-          <p:cNvSpPr txBox="1"/>
-          <p:nvPr/>
-        </p:nvSpPr>
-        <p:spPr>
-          <a:xfrm>
-            <a:off x="1965960" y="4462272"/>
-            <a:ext cx="8823960" cy="228600"/>
-          </a:xfrm>
-          <a:prstGeom prst="rect">
-            <a:avLst/>
-          </a:prstGeom>
-          <a:noFill/>
-        </p:spPr>
-        <p:txBody>
-          <a:bodyPr wrap="square" anchor="t">
-            <a:spAutoFit/>
-          </a:bodyPr>
-          <a:lstStyle/>
-          <a:p>
-            <a:pPr algn="l"/>
-            <a:r>
-              <a:rPr sz="1300" b="0" i="0" lang="en-US" altLang="en-US">
-                <a:solidFill>
-                  <a:srgbClr val="566873"/>
-                </a:solidFill>
-                <a:latin typeface="Sarabun"/>
-                <a:ea typeface="Sarabun"/>
-                <a:cs typeface="Sarabun"/>
-              </a:rPr>
-              <a:t>I am ten years old.</a:t>
-            </a:r>
-          </a:p>
-        </p:txBody>
-      </p:sp>
-      <p:sp>
-        <p:nvSpPr>
-          <p:cNvPr id="21" name="Rounded Rectangle 20"/>
-          <p:cNvSpPr/>
-          <p:nvPr/>
-        </p:nvSpPr>
-        <p:spPr>
-          <a:xfrm>
-            <a:off x="731520" y="4983480"/>
-            <a:ext cx="1051560" cy="274320"/>
-          </a:xfrm>
-          <a:prstGeom prst="roundRect">
-            <a:avLst>
-              <a:gd name="adj" fmla="val 28000"/>
-            </a:avLst>
-          </a:prstGeom>
-          <a:solidFill>
-            <a:srgbClr val="C96F4A"/>
-          </a:solidFill>
-          <a:ln>
-            <a:noFill/>
-          </a:ln>
-        </p:spPr>
-        <p:style>
-          <a:lnRef idx="1">
-            <a:schemeClr val="accent1"/>
-          </a:lnRef>
-          <a:fillRef idx="3">
-            <a:schemeClr val="accent1"/>
-          </a:fillRef>
-          <a:effectRef idx="2">
-            <a:schemeClr val="accent1"/>
-          </a:effectRef>
-          <a:fontRef idx="minor">
-            <a:schemeClr val="lt1"/>
-          </a:fontRef>
-        </p:style>
-        <p:txBody>
-          <a:bodyPr rtlCol="0" anchor="ctr" wrap="none"/>
-          <a:lstStyle/>
-          <a:p>
-            <a:pPr algn="ctr"/>
-            <a:r>
-              <a:rPr sz="1200" b="1" lang="en-US" altLang="en-US">
-                <a:solidFill>
-                  <a:srgbClr val="FFFFFF"/>
-                </a:solidFill>
-                <a:latin typeface="Sarabun"/>
-                <a:ea typeface="Sarabun"/>
-                <a:cs typeface="Sarabun"/>
-              </a:rPr>
-              <a:t>Staff</a:t>
-            </a:r>
-          </a:p>
-        </p:txBody>
-      </p:sp>
-      <p:sp>
-        <p:nvSpPr>
-          <p:cNvPr id="22" name="TextBox 21"/>
-          <p:cNvSpPr txBox="1"/>
-          <p:nvPr/>
-        </p:nvSpPr>
-        <p:spPr>
-          <a:xfrm>
-            <a:off x="1965960" y="4956048"/>
-            <a:ext cx="8823960" cy="384048"/>
-          </a:xfrm>
-          <a:prstGeom prst="rect">
-            <a:avLst/>
-          </a:prstGeom>
-          <a:noFill/>
-        </p:spPr>
-        <p:txBody>
-          <a:bodyPr wrap="square" anchor="t">
-            <a:spAutoFit/>
-          </a:bodyPr>
-          <a:lstStyle/>
-          <a:p>
-            <a:pPr algn="l"/>
-            <a:r>
-              <a:rPr sz="2200" b="1" i="0" lang="th-TH" altLang="en-US">
-                <a:solidFill>
-                  <a:srgbClr val="24333D"/>
-                </a:solidFill>
-                <a:latin typeface="Sarabun"/>
-                <a:ea typeface="Sarabun"/>
-                <a:cs typeface="Sarabun"/>
-              </a:rPr>
-              <a:t>สิบปีค่ะ ขอบคุณค่ะ</a:t>
-            </a:r>
-            <a:r>
-              <a:rPr sz="1500" b="0" i="1" lang="en-US" altLang="en-US">
-                <a:solidFill>
-                  <a:srgbClr val="566873"/>
-                </a:solidFill>
-                <a:latin typeface="Sarabun"/>
-                <a:ea typeface="Sarabun"/>
-                <a:cs typeface="Sarabun"/>
-              </a:rPr>
-              <a:t> (sìp bpii khâ khàawp-khun khâ)</a:t>
-            </a:r>
-          </a:p>
-        </p:txBody>
-      </p:sp>
-      <p:sp>
-        <p:nvSpPr>
-          <p:cNvPr id="23" name="TextBox 22"/>
-          <p:cNvSpPr txBox="1"/>
-          <p:nvPr/>
-        </p:nvSpPr>
-        <p:spPr>
-          <a:xfrm>
-            <a:off x="1965960" y="5239512"/>
-            <a:ext cx="8823960" cy="228600"/>
-          </a:xfrm>
-          <a:prstGeom prst="rect">
-            <a:avLst/>
-          </a:prstGeom>
-          <a:noFill/>
-        </p:spPr>
-        <p:txBody>
-          <a:bodyPr wrap="square" anchor="t">
-            <a:spAutoFit/>
-          </a:bodyPr>
-          <a:lstStyle/>
-          <a:p>
-            <a:pPr algn="l"/>
-            <a:r>
-              <a:rPr sz="1300" b="0" i="0" lang="en-US" altLang="en-US">
-                <a:solidFill>
-                  <a:srgbClr val="566873"/>
-                </a:solidFill>
-                <a:latin typeface="Sarabun"/>
-                <a:ea typeface="Sarabun"/>
-                <a:cs typeface="Sarabun"/>
-              </a:rPr>
-              <a:t>Ten years old. Thank you.</a:t>
+              <a:t> (sìi)</a:t>
+            </a:r>
+            <a:r>
+              <a:rPr sz="1500" b="0" i="0" lang="en-US" altLang="en-US">
+                <a:solidFill>
+                  <a:srgbClr val="24333D"/>
+                </a:solidFill>
+                <a:latin typeface="Sarabun"/>
+                <a:ea typeface="Sarabun"/>
+                <a:cs typeface="Sarabun"/>
+              </a:rPr>
+              <a:t> is low tone. Rising tone means what?</a:t>
             </a:r>
           </a:p>
         </p:txBody>
@@ -13179,7 +13185,7 @@
                 <a:ea typeface="Sarabun"/>
                 <a:cs typeface="Sarabun"/>
               </a:rPr>
-              <a:t>Recap</a:t>
+              <a:t>Closing</a:t>
             </a:r>
           </a:p>
         </p:txBody>
@@ -13216,7 +13222,7 @@
                 <a:ea typeface="Sarabun"/>
                 <a:cs typeface="Sarabun"/>
               </a:rPr>
-              <a:t>Recap</a:t>
+              <a:t>Closing</a:t>
             </a:r>
           </a:p>
         </p:txBody>
@@ -13229,8 +13235,8 @@
         </p:nvSpPr>
         <p:spPr>
           <a:xfrm>
-            <a:off x="731520" y="1417320"/>
-            <a:ext cx="7071055" cy="2331720"/>
+            <a:off x="731520" y="1600200"/>
+            <a:ext cx="7071055" cy="1289304"/>
           </a:xfrm>
           <a:prstGeom prst="roundRect">
             <a:avLst>
@@ -13276,7 +13282,7 @@
         </p:nvSpPr>
         <p:spPr>
           <a:xfrm>
-            <a:off x="932688" y="1563624"/>
+            <a:off x="932688" y="1746504"/>
             <a:ext cx="6705295" cy="228600"/>
           </a:xfrm>
           <a:prstGeom prst="rect">
@@ -13294,13 +13300,13 @@
             <a:r>
               <a:rPr sz="1500" b="1" i="0" lang="en-US" altLang="en-US">
                 <a:solidFill>
-                  <a:srgbClr val="355C7D"/>
-                </a:solidFill>
-                <a:latin typeface="Sarabun"/>
-                <a:ea typeface="Sarabun"/>
-                <a:cs typeface="Sarabun"/>
-              </a:rPr>
-              <a:t>What you can now do</a:t>
+                  <a:srgbClr val="C96F4A"/>
+                </a:solidFill>
+                <a:latin typeface="Sarabun"/>
+                <a:ea typeface="Sarabun"/>
+                <a:cs typeface="Sarabun"/>
+              </a:rPr>
+              <a:t>Next steps</a:t>
             </a:r>
           </a:p>
         </p:txBody>
@@ -13313,14 +13319,14 @@
         </p:nvSpPr>
         <p:spPr>
           <a:xfrm>
-            <a:off x="932688" y="1947672"/>
+            <a:off x="932688" y="2130552"/>
             <a:ext cx="82296" cy="82296"/>
           </a:xfrm>
           <a:prstGeom prst="ellipse">
             <a:avLst/>
           </a:prstGeom>
           <a:solidFill>
-            <a:srgbClr val="355C7D"/>
+            <a:srgbClr val="C96F4A"/>
           </a:solidFill>
           <a:ln>
             <a:noFill/>
@@ -13356,7 +13362,7 @@
         </p:nvSpPr>
         <p:spPr>
           <a:xfrm>
-            <a:off x="1078992" y="1856232"/>
+            <a:off x="1078992" y="2039112"/>
             <a:ext cx="6568135" cy="274320"/>
           </a:xfrm>
           <a:prstGeom prst="rect">
@@ -13380,370 +13386,7 @@
                 <a:ea typeface="Sarabun"/>
                 <a:cs typeface="Sarabun"/>
               </a:rPr>
-              <a:t>Look away and count from zero to ten in Thai. Say each digit aloud before looking back: </a:t>
-            </a:r>
-            <a:r>
-              <a:rPr sz="1500" b="0" i="0" lang="th-TH" altLang="en-US">
-                <a:solidFill>
-                  <a:srgbClr val="24333D"/>
-                </a:solidFill>
-                <a:latin typeface="Sarabun"/>
-                <a:ea typeface="Sarabun"/>
-                <a:cs typeface="Sarabun"/>
-              </a:rPr>
-              <a:t>ศูนย์</a:t>
-            </a:r>
-            <a:r>
-              <a:rPr sz="1500" b="0" i="1" lang="en-US" altLang="en-US">
-                <a:solidFill>
-                  <a:srgbClr val="566873"/>
-                </a:solidFill>
-                <a:latin typeface="Sarabun"/>
-                <a:ea typeface="Sarabun"/>
-                <a:cs typeface="Sarabun"/>
-              </a:rPr>
-              <a:t> (sǔun)</a:t>
-            </a:r>
-            <a:r>
-              <a:rPr sz="1500" b="0" i="0" lang="en-US" altLang="en-US">
-                <a:solidFill>
-                  <a:srgbClr val="24333D"/>
-                </a:solidFill>
-                <a:latin typeface="Sarabun"/>
-                <a:ea typeface="Sarabun"/>
-                <a:cs typeface="Sarabun"/>
-              </a:rPr>
-              <a:t>, </a:t>
-            </a:r>
-            <a:r>
-              <a:rPr sz="1500" b="0" i="0" lang="th-TH" altLang="en-US">
-                <a:solidFill>
-                  <a:srgbClr val="24333D"/>
-                </a:solidFill>
-                <a:latin typeface="Sarabun"/>
-                <a:ea typeface="Sarabun"/>
-                <a:cs typeface="Sarabun"/>
-              </a:rPr>
-              <a:t>หนึ่ง</a:t>
-            </a:r>
-            <a:r>
-              <a:rPr sz="1500" b="0" i="1" lang="en-US" altLang="en-US">
-                <a:solidFill>
-                  <a:srgbClr val="566873"/>
-                </a:solidFill>
-                <a:latin typeface="Sarabun"/>
-                <a:ea typeface="Sarabun"/>
-                <a:cs typeface="Sarabun"/>
-              </a:rPr>
-              <a:t> (nùeng)</a:t>
-            </a:r>
-            <a:r>
-              <a:rPr sz="1500" b="0" i="0" lang="en-US" altLang="en-US">
-                <a:solidFill>
-                  <a:srgbClr val="24333D"/>
-                </a:solidFill>
-                <a:latin typeface="Sarabun"/>
-                <a:ea typeface="Sarabun"/>
-                <a:cs typeface="Sarabun"/>
-              </a:rPr>
-              <a:t>, </a:t>
-            </a:r>
-            <a:r>
-              <a:rPr sz="1500" b="0" i="0" lang="th-TH" altLang="en-US">
-                <a:solidFill>
-                  <a:srgbClr val="24333D"/>
-                </a:solidFill>
-                <a:latin typeface="Sarabun"/>
-                <a:ea typeface="Sarabun"/>
-                <a:cs typeface="Sarabun"/>
-              </a:rPr>
-              <a:t>สอง</a:t>
-            </a:r>
-            <a:r>
-              <a:rPr sz="1500" b="0" i="1" lang="en-US" altLang="en-US">
-                <a:solidFill>
-                  <a:srgbClr val="566873"/>
-                </a:solidFill>
-                <a:latin typeface="Sarabun"/>
-                <a:ea typeface="Sarabun"/>
-                <a:cs typeface="Sarabun"/>
-              </a:rPr>
-              <a:t> (sǎawng)</a:t>
-            </a:r>
-            <a:r>
-              <a:rPr sz="1500" b="0" i="0" lang="en-US" altLang="en-US">
-                <a:solidFill>
-                  <a:srgbClr val="24333D"/>
-                </a:solidFill>
-                <a:latin typeface="Sarabun"/>
-                <a:ea typeface="Sarabun"/>
-                <a:cs typeface="Sarabun"/>
-              </a:rPr>
-              <a:t>, </a:t>
-            </a:r>
-            <a:r>
-              <a:rPr sz="1500" b="0" i="0" lang="th-TH" altLang="en-US">
-                <a:solidFill>
-                  <a:srgbClr val="24333D"/>
-                </a:solidFill>
-                <a:latin typeface="Sarabun"/>
-                <a:ea typeface="Sarabun"/>
-                <a:cs typeface="Sarabun"/>
-              </a:rPr>
-              <a:t>สาม</a:t>
-            </a:r>
-            <a:r>
-              <a:rPr sz="1500" b="0" i="1" lang="en-US" altLang="en-US">
-                <a:solidFill>
-                  <a:srgbClr val="566873"/>
-                </a:solidFill>
-                <a:latin typeface="Sarabun"/>
-                <a:ea typeface="Sarabun"/>
-                <a:cs typeface="Sarabun"/>
-              </a:rPr>
-              <a:t> (sǎam)</a:t>
-            </a:r>
-            <a:r>
-              <a:rPr sz="1500" b="0" i="0" lang="en-US" altLang="en-US">
-                <a:solidFill>
-                  <a:srgbClr val="24333D"/>
-                </a:solidFill>
-                <a:latin typeface="Sarabun"/>
-                <a:ea typeface="Sarabun"/>
-                <a:cs typeface="Sarabun"/>
-              </a:rPr>
-              <a:t>, </a:t>
-            </a:r>
-            <a:r>
-              <a:rPr sz="1500" b="0" i="0" lang="th-TH" altLang="en-US">
-                <a:solidFill>
-                  <a:srgbClr val="24333D"/>
-                </a:solidFill>
-                <a:latin typeface="Sarabun"/>
-                <a:ea typeface="Sarabun"/>
-                <a:cs typeface="Sarabun"/>
-              </a:rPr>
-              <a:t>สี่</a:t>
-            </a:r>
-            <a:r>
-              <a:rPr sz="1500" b="0" i="1" lang="en-US" altLang="en-US">
-                <a:solidFill>
-                  <a:srgbClr val="566873"/>
-                </a:solidFill>
-                <a:latin typeface="Sarabun"/>
-                <a:ea typeface="Sarabun"/>
-                <a:cs typeface="Sarabun"/>
-              </a:rPr>
-              <a:t> (sìi)</a:t>
-            </a:r>
-            <a:r>
-              <a:rPr sz="1500" b="0" i="0" lang="en-US" altLang="en-US">
-                <a:solidFill>
-                  <a:srgbClr val="24333D"/>
-                </a:solidFill>
-                <a:latin typeface="Sarabun"/>
-                <a:ea typeface="Sarabun"/>
-                <a:cs typeface="Sarabun"/>
-              </a:rPr>
-              <a:t>, </a:t>
-            </a:r>
-            <a:r>
-              <a:rPr sz="1500" b="0" i="0" lang="th-TH" altLang="en-US">
-                <a:solidFill>
-                  <a:srgbClr val="24333D"/>
-                </a:solidFill>
-                <a:latin typeface="Sarabun"/>
-                <a:ea typeface="Sarabun"/>
-                <a:cs typeface="Sarabun"/>
-              </a:rPr>
-              <a:t>ห้า</a:t>
-            </a:r>
-            <a:r>
-              <a:rPr sz="1500" b="0" i="1" lang="en-US" altLang="en-US">
-                <a:solidFill>
-                  <a:srgbClr val="566873"/>
-                </a:solidFill>
-                <a:latin typeface="Sarabun"/>
-                <a:ea typeface="Sarabun"/>
-                <a:cs typeface="Sarabun"/>
-              </a:rPr>
-              <a:t> (hâa)</a:t>
-            </a:r>
-            <a:r>
-              <a:rPr sz="1500" b="0" i="0" lang="en-US" altLang="en-US">
-                <a:solidFill>
-                  <a:srgbClr val="24333D"/>
-                </a:solidFill>
-                <a:latin typeface="Sarabun"/>
-                <a:ea typeface="Sarabun"/>
-                <a:cs typeface="Sarabun"/>
-              </a:rPr>
-              <a:t>, </a:t>
-            </a:r>
-            <a:r>
-              <a:rPr sz="1500" b="0" i="0" lang="th-TH" altLang="en-US">
-                <a:solidFill>
-                  <a:srgbClr val="24333D"/>
-                </a:solidFill>
-                <a:latin typeface="Sarabun"/>
-                <a:ea typeface="Sarabun"/>
-                <a:cs typeface="Sarabun"/>
-              </a:rPr>
-              <a:t>หก</a:t>
-            </a:r>
-            <a:r>
-              <a:rPr sz="1500" b="0" i="1" lang="en-US" altLang="en-US">
-                <a:solidFill>
-                  <a:srgbClr val="566873"/>
-                </a:solidFill>
-                <a:latin typeface="Sarabun"/>
-                <a:ea typeface="Sarabun"/>
-                <a:cs typeface="Sarabun"/>
-              </a:rPr>
-              <a:t> (hòk)</a:t>
-            </a:r>
-            <a:r>
-              <a:rPr sz="1500" b="0" i="0" lang="en-US" altLang="en-US">
-                <a:solidFill>
-                  <a:srgbClr val="24333D"/>
-                </a:solidFill>
-                <a:latin typeface="Sarabun"/>
-                <a:ea typeface="Sarabun"/>
-                <a:cs typeface="Sarabun"/>
-              </a:rPr>
-              <a:t>, </a:t>
-            </a:r>
-            <a:r>
-              <a:rPr sz="1500" b="0" i="0" lang="th-TH" altLang="en-US">
-                <a:solidFill>
-                  <a:srgbClr val="24333D"/>
-                </a:solidFill>
-                <a:latin typeface="Sarabun"/>
-                <a:ea typeface="Sarabun"/>
-                <a:cs typeface="Sarabun"/>
-              </a:rPr>
-              <a:t>เจ็ด</a:t>
-            </a:r>
-            <a:r>
-              <a:rPr sz="1500" b="0" i="1" lang="en-US" altLang="en-US">
-                <a:solidFill>
-                  <a:srgbClr val="566873"/>
-                </a:solidFill>
-                <a:latin typeface="Sarabun"/>
-                <a:ea typeface="Sarabun"/>
-                <a:cs typeface="Sarabun"/>
-              </a:rPr>
-              <a:t> (jèt)</a:t>
-            </a:r>
-            <a:r>
-              <a:rPr sz="1500" b="0" i="0" lang="en-US" altLang="en-US">
-                <a:solidFill>
-                  <a:srgbClr val="24333D"/>
-                </a:solidFill>
-                <a:latin typeface="Sarabun"/>
-                <a:ea typeface="Sarabun"/>
-                <a:cs typeface="Sarabun"/>
-              </a:rPr>
-              <a:t>, </a:t>
-            </a:r>
-            <a:r>
-              <a:rPr sz="1500" b="0" i="0" lang="th-TH" altLang="en-US">
-                <a:solidFill>
-                  <a:srgbClr val="24333D"/>
-                </a:solidFill>
-                <a:latin typeface="Sarabun"/>
-                <a:ea typeface="Sarabun"/>
-                <a:cs typeface="Sarabun"/>
-              </a:rPr>
-              <a:t>แปด</a:t>
-            </a:r>
-            <a:r>
-              <a:rPr sz="1500" b="0" i="1" lang="en-US" altLang="en-US">
-                <a:solidFill>
-                  <a:srgbClr val="566873"/>
-                </a:solidFill>
-                <a:latin typeface="Sarabun"/>
-                <a:ea typeface="Sarabun"/>
-                <a:cs typeface="Sarabun"/>
-              </a:rPr>
-              <a:t> (bpàet)</a:t>
-            </a:r>
-            <a:r>
-              <a:rPr sz="1500" b="0" i="0" lang="en-US" altLang="en-US">
-                <a:solidFill>
-                  <a:srgbClr val="24333D"/>
-                </a:solidFill>
-                <a:latin typeface="Sarabun"/>
-                <a:ea typeface="Sarabun"/>
-                <a:cs typeface="Sarabun"/>
-              </a:rPr>
-              <a:t>, </a:t>
-            </a:r>
-            <a:r>
-              <a:rPr sz="1500" b="0" i="0" lang="th-TH" altLang="en-US">
-                <a:solidFill>
-                  <a:srgbClr val="24333D"/>
-                </a:solidFill>
-                <a:latin typeface="Sarabun"/>
-                <a:ea typeface="Sarabun"/>
-                <a:cs typeface="Sarabun"/>
-              </a:rPr>
-              <a:t>เก้า</a:t>
-            </a:r>
-            <a:r>
-              <a:rPr sz="1500" b="0" i="1" lang="en-US" altLang="en-US">
-                <a:solidFill>
-                  <a:srgbClr val="566873"/>
-                </a:solidFill>
-                <a:latin typeface="Sarabun"/>
-                <a:ea typeface="Sarabun"/>
-                <a:cs typeface="Sarabun"/>
-              </a:rPr>
-              <a:t> (gâo)</a:t>
-            </a:r>
-            <a:r>
-              <a:rPr sz="1500" b="0" i="0" lang="en-US" altLang="en-US">
-                <a:solidFill>
-                  <a:srgbClr val="24333D"/>
-                </a:solidFill>
-                <a:latin typeface="Sarabun"/>
-                <a:ea typeface="Sarabun"/>
-                <a:cs typeface="Sarabun"/>
-              </a:rPr>
-              <a:t>, </a:t>
-            </a:r>
-            <a:r>
-              <a:rPr sz="1500" b="0" i="0" lang="th-TH" altLang="en-US">
-                <a:solidFill>
-                  <a:srgbClr val="24333D"/>
-                </a:solidFill>
-                <a:latin typeface="Sarabun"/>
-                <a:ea typeface="Sarabun"/>
-                <a:cs typeface="Sarabun"/>
-              </a:rPr>
-              <a:t>สิบ</a:t>
-            </a:r>
-            <a:r>
-              <a:rPr sz="1500" b="0" i="1" lang="en-US" altLang="en-US">
-                <a:solidFill>
-                  <a:srgbClr val="566873"/>
-                </a:solidFill>
-                <a:latin typeface="Sarabun"/>
-                <a:ea typeface="Sarabun"/>
-                <a:cs typeface="Sarabun"/>
-              </a:rPr>
-              <a:t> (sìp)</a:t>
-            </a:r>
-            <a:r>
-              <a:rPr sz="1500" b="0" i="0" lang="en-US" altLang="en-US">
-                <a:solidFill>
-                  <a:srgbClr val="24333D"/>
-                </a:solidFill>
-                <a:latin typeface="Sarabun"/>
-                <a:ea typeface="Sarabun"/>
-                <a:cs typeface="Sarabun"/>
-              </a:rPr>
-              <a:t>.</a:t>
+              <a:t>By the end, you can count 0-10, ask what number, say your age, and handle digit-by-digit codes like room numbers.</a:t>
             </a:r>
           </a:p>
         </p:txBody>
@@ -13756,14 +13399,14 @@
         </p:nvSpPr>
         <p:spPr>
           <a:xfrm>
-            <a:off x="932688" y="2258568"/>
+            <a:off x="932688" y="2441448"/>
             <a:ext cx="82296" cy="82296"/>
           </a:xfrm>
           <a:prstGeom prst="ellipse">
             <a:avLst/>
           </a:prstGeom>
           <a:solidFill>
-            <a:srgbClr val="355C7D"/>
+            <a:srgbClr val="C96F4A"/>
           </a:solidFill>
           <a:ln>
             <a:noFill/>
@@ -13799,7 +13442,7 @@
         </p:nvSpPr>
         <p:spPr>
           <a:xfrm>
-            <a:off x="1078992" y="2167128"/>
+            <a:off x="1078992" y="2350008"/>
             <a:ext cx="6568135" cy="274320"/>
           </a:xfrm>
           <a:prstGeom prst="rect">
@@ -13823,675 +13466,7 @@
                 <a:ea typeface="Sarabun"/>
                 <a:cs typeface="Sarabun"/>
               </a:rPr>
-              <a:t>How do you ask for a room number or table number? </a:t>
-            </a:r>
-            <a:r>
-              <a:rPr sz="1500" b="0" i="0" lang="th-TH" altLang="en-US">
-                <a:solidFill>
-                  <a:srgbClr val="24333D"/>
-                </a:solidFill>
-                <a:latin typeface="Sarabun"/>
-                <a:ea typeface="Sarabun"/>
-                <a:cs typeface="Sarabun"/>
-              </a:rPr>
-              <a:t>เบอร์อะไร</a:t>
-            </a:r>
-            <a:r>
-              <a:rPr sz="1500" b="0" i="1" lang="en-US" altLang="en-US">
-                <a:solidFill>
-                  <a:srgbClr val="566873"/>
-                </a:solidFill>
-                <a:latin typeface="Sarabun"/>
-                <a:ea typeface="Sarabun"/>
-                <a:cs typeface="Sarabun"/>
-              </a:rPr>
-              <a:t> (ber à-rai)</a:t>
-            </a:r>
-            <a:r>
-              <a:rPr sz="1500" b="0" i="0" lang="en-US" altLang="en-US">
-                <a:solidFill>
-                  <a:srgbClr val="24333D"/>
-                </a:solidFill>
-                <a:latin typeface="Sarabun"/>
-                <a:ea typeface="Sarabun"/>
-                <a:cs typeface="Sarabun"/>
-              </a:rPr>
-              <a:t>.</a:t>
-            </a:r>
-          </a:p>
-        </p:txBody>
-      </p:sp>
-      <p:sp>
-        <p:nvSpPr>
-          <p:cNvPr id="12" name="Oval 11"/>
-          <p:cNvSpPr/>
-          <p:nvPr/>
-        </p:nvSpPr>
-        <p:spPr>
-          <a:xfrm>
-            <a:off x="932688" y="2569464"/>
-            <a:ext cx="82296" cy="82296"/>
-          </a:xfrm>
-          <a:prstGeom prst="ellipse">
-            <a:avLst/>
-          </a:prstGeom>
-          <a:solidFill>
-            <a:srgbClr val="355C7D"/>
-          </a:solidFill>
-          <a:ln>
-            <a:noFill/>
-          </a:ln>
-        </p:spPr>
-        <p:style>
-          <a:lnRef idx="1">
-            <a:schemeClr val="accent1"/>
-          </a:lnRef>
-          <a:fillRef idx="3">
-            <a:schemeClr val="accent1"/>
-          </a:fillRef>
-          <a:effectRef idx="2">
-            <a:schemeClr val="accent1"/>
-          </a:effectRef>
-          <a:fontRef idx="minor">
-            <a:schemeClr val="lt1"/>
-          </a:fontRef>
-        </p:style>
-        <p:txBody>
-          <a:bodyPr rtlCol="0" anchor="ctr"/>
-          <a:lstStyle/>
-          <a:p>
-            <a:pPr algn="ctr"/>
-          </a:p>
-        </p:txBody>
-      </p:sp>
-      <p:sp>
-        <p:nvSpPr>
-          <p:cNvPr id="13" name="TextBox 12"/>
-          <p:cNvSpPr txBox="1"/>
-          <p:nvPr/>
-        </p:nvSpPr>
-        <p:spPr>
-          <a:xfrm>
-            <a:off x="1078992" y="2478024"/>
-            <a:ext cx="6568135" cy="274320"/>
-          </a:xfrm>
-          <a:prstGeom prst="rect">
-            <a:avLst/>
-          </a:prstGeom>
-          <a:noFill/>
-        </p:spPr>
-        <p:txBody>
-          <a:bodyPr wrap="square" anchor="t">
-            <a:spAutoFit/>
-          </a:bodyPr>
-          <a:lstStyle/>
-          <a:p>
-            <a:pPr algn="l"/>
-            <a:r>
-              <a:rPr sz="1500" b="0" i="0" lang="en-US" altLang="en-US">
-                <a:solidFill>
-                  <a:srgbClr val="24333D"/>
-                </a:solidFill>
-                <a:latin typeface="Sarabun"/>
-                <a:ea typeface="Sarabun"/>
-                <a:cs typeface="Sarabun"/>
-              </a:rPr>
-              <a:t>How do you say I am eight years old? </a:t>
-            </a:r>
-            <a:r>
-              <a:rPr sz="1500" b="0" i="0" lang="th-TH" altLang="en-US">
-                <a:solidFill>
-                  <a:srgbClr val="24333D"/>
-                </a:solidFill>
-                <a:latin typeface="Sarabun"/>
-                <a:ea typeface="Sarabun"/>
-                <a:cs typeface="Sarabun"/>
-              </a:rPr>
-              <a:t>ฉันอายุแปดปี</a:t>
-            </a:r>
-            <a:r>
-              <a:rPr sz="1500" b="0" i="1" lang="en-US" altLang="en-US">
-                <a:solidFill>
-                  <a:srgbClr val="566873"/>
-                </a:solidFill>
-                <a:latin typeface="Sarabun"/>
-                <a:ea typeface="Sarabun"/>
-                <a:cs typeface="Sarabun"/>
-              </a:rPr>
-              <a:t> (chǎn aa-yú bpàet bpii)</a:t>
-            </a:r>
-            <a:r>
-              <a:rPr sz="1500" b="0" i="0" lang="th-TH" altLang="en-US">
-                <a:solidFill>
-                  <a:srgbClr val="24333D"/>
-                </a:solidFill>
-                <a:latin typeface="Sarabun"/>
-                <a:ea typeface="Sarabun"/>
-                <a:cs typeface="Sarabun"/>
-              </a:rPr>
-              <a:t> — pronoun, then อายุ, then the number, then ปี.</a:t>
-            </a:r>
-          </a:p>
-        </p:txBody>
-      </p:sp>
-      <p:sp>
-        <p:nvSpPr>
-          <p:cNvPr id="14" name="Oval 13"/>
-          <p:cNvSpPr/>
-          <p:nvPr/>
-        </p:nvSpPr>
-        <p:spPr>
-          <a:xfrm>
-            <a:off x="932688" y="2880360"/>
-            <a:ext cx="82296" cy="82296"/>
-          </a:xfrm>
-          <a:prstGeom prst="ellipse">
-            <a:avLst/>
-          </a:prstGeom>
-          <a:solidFill>
-            <a:srgbClr val="355C7D"/>
-          </a:solidFill>
-          <a:ln>
-            <a:noFill/>
-          </a:ln>
-        </p:spPr>
-        <p:style>
-          <a:lnRef idx="1">
-            <a:schemeClr val="accent1"/>
-          </a:lnRef>
-          <a:fillRef idx="3">
-            <a:schemeClr val="accent1"/>
-          </a:fillRef>
-          <a:effectRef idx="2">
-            <a:schemeClr val="accent1"/>
-          </a:effectRef>
-          <a:fontRef idx="minor">
-            <a:schemeClr val="lt1"/>
-          </a:fontRef>
-        </p:style>
-        <p:txBody>
-          <a:bodyPr rtlCol="0" anchor="ctr"/>
-          <a:lstStyle/>
-          <a:p>
-            <a:pPr algn="ctr"/>
-          </a:p>
-        </p:txBody>
-      </p:sp>
-      <p:sp>
-        <p:nvSpPr>
-          <p:cNvPr id="15" name="TextBox 14"/>
-          <p:cNvSpPr txBox="1"/>
-          <p:nvPr/>
-        </p:nvSpPr>
-        <p:spPr>
-          <a:xfrm>
-            <a:off x="1078992" y="2788920"/>
-            <a:ext cx="6568135" cy="274320"/>
-          </a:xfrm>
-          <a:prstGeom prst="rect">
-            <a:avLst/>
-          </a:prstGeom>
-          <a:noFill/>
-        </p:spPr>
-        <p:txBody>
-          <a:bodyPr wrap="square" anchor="t">
-            <a:spAutoFit/>
-          </a:bodyPr>
-          <a:lstStyle/>
-          <a:p>
-            <a:pPr algn="l"/>
-            <a:r>
-              <a:rPr sz="1500" b="0" i="0" lang="en-US" altLang="en-US">
-                <a:solidFill>
-                  <a:srgbClr val="24333D"/>
-                </a:solidFill>
-                <a:latin typeface="Sarabun"/>
-                <a:ea typeface="Sarabun"/>
-                <a:cs typeface="Sarabun"/>
-              </a:rPr>
-              <a:t>What is the difference between </a:t>
-            </a:r>
-            <a:r>
-              <a:rPr sz="1500" b="0" i="0" lang="th-TH" altLang="en-US">
-                <a:solidFill>
-                  <a:srgbClr val="24333D"/>
-                </a:solidFill>
-                <a:latin typeface="Sarabun"/>
-                <a:ea typeface="Sarabun"/>
-                <a:cs typeface="Sarabun"/>
-              </a:rPr>
-              <a:t>สี่</a:t>
-            </a:r>
-            <a:r>
-              <a:rPr sz="1500" b="0" i="1" lang="en-US" altLang="en-US">
-                <a:solidFill>
-                  <a:srgbClr val="566873"/>
-                </a:solidFill>
-                <a:latin typeface="Sarabun"/>
-                <a:ea typeface="Sarabun"/>
-                <a:cs typeface="Sarabun"/>
-              </a:rPr>
-              <a:t> (sìi)</a:t>
-            </a:r>
-            <a:r>
-              <a:rPr sz="1500" b="0" i="0" lang="en-US" altLang="en-US">
-                <a:solidFill>
-                  <a:srgbClr val="24333D"/>
-                </a:solidFill>
-                <a:latin typeface="Sarabun"/>
-                <a:ea typeface="Sarabun"/>
-                <a:cs typeface="Sarabun"/>
-              </a:rPr>
-              <a:t> sìi and </a:t>
-            </a:r>
-            <a:r>
-              <a:rPr sz="1500" b="0" i="0" lang="th-TH" altLang="en-US">
-                <a:solidFill>
-                  <a:srgbClr val="24333D"/>
-                </a:solidFill>
-                <a:latin typeface="Sarabun"/>
-                <a:ea typeface="Sarabun"/>
-                <a:cs typeface="Sarabun"/>
-              </a:rPr>
-              <a:t>สี</a:t>
-            </a:r>
-            <a:r>
-              <a:rPr sz="1500" b="0" i="1" lang="en-US" altLang="en-US">
-                <a:solidFill>
-                  <a:srgbClr val="566873"/>
-                </a:solidFill>
-                <a:latin typeface="Sarabun"/>
-                <a:ea typeface="Sarabun"/>
-                <a:cs typeface="Sarabun"/>
-              </a:rPr>
-              <a:t> (sǐi)</a:t>
-            </a:r>
-            <a:r>
-              <a:rPr sz="1500" b="0" i="0" lang="en-US" altLang="en-US">
-                <a:solidFill>
-                  <a:srgbClr val="24333D"/>
-                </a:solidFill>
-                <a:latin typeface="Sarabun"/>
-                <a:ea typeface="Sarabun"/>
-                <a:cs typeface="Sarabun"/>
-              </a:rPr>
-              <a:t> sǐi? Low tone means four. Rising tone means colour.</a:t>
-            </a:r>
-          </a:p>
-        </p:txBody>
-      </p:sp>
-      <p:sp>
-        <p:nvSpPr>
-          <p:cNvPr id="16" name="Oval 15"/>
-          <p:cNvSpPr/>
-          <p:nvPr/>
-        </p:nvSpPr>
-        <p:spPr>
-          <a:xfrm>
-            <a:off x="932688" y="3191256"/>
-            <a:ext cx="82296" cy="82296"/>
-          </a:xfrm>
-          <a:prstGeom prst="ellipse">
-            <a:avLst/>
-          </a:prstGeom>
-          <a:solidFill>
-            <a:srgbClr val="355C7D"/>
-          </a:solidFill>
-          <a:ln>
-            <a:noFill/>
-          </a:ln>
-        </p:spPr>
-        <p:style>
-          <a:lnRef idx="1">
-            <a:schemeClr val="accent1"/>
-          </a:lnRef>
-          <a:fillRef idx="3">
-            <a:schemeClr val="accent1"/>
-          </a:fillRef>
-          <a:effectRef idx="2">
-            <a:schemeClr val="accent1"/>
-          </a:effectRef>
-          <a:fontRef idx="minor">
-            <a:schemeClr val="lt1"/>
-          </a:fontRef>
-        </p:style>
-        <p:txBody>
-          <a:bodyPr rtlCol="0" anchor="ctr"/>
-          <a:lstStyle/>
-          <a:p>
-            <a:pPr algn="ctr"/>
-          </a:p>
-        </p:txBody>
-      </p:sp>
-      <p:sp>
-        <p:nvSpPr>
-          <p:cNvPr id="17" name="TextBox 16"/>
-          <p:cNvSpPr txBox="1"/>
-          <p:nvPr/>
-        </p:nvSpPr>
-        <p:spPr>
-          <a:xfrm>
-            <a:off x="1078992" y="3099816"/>
-            <a:ext cx="6568135" cy="274320"/>
-          </a:xfrm>
-          <a:prstGeom prst="rect">
-            <a:avLst/>
-          </a:prstGeom>
-          <a:noFill/>
-        </p:spPr>
-        <p:txBody>
-          <a:bodyPr wrap="square" anchor="t">
-            <a:spAutoFit/>
-          </a:bodyPr>
-          <a:lstStyle/>
-          <a:p>
-            <a:pPr algn="l"/>
-            <a:r>
-              <a:rPr sz="1500" b="0" i="0" lang="en-US" altLang="en-US">
-                <a:solidFill>
-                  <a:srgbClr val="24333D"/>
-                </a:solidFill>
-                <a:latin typeface="Sarabun"/>
-                <a:ea typeface="Sarabun"/>
-                <a:cs typeface="Sarabun"/>
-              </a:rPr>
-              <a:t>If you miss a number, what do you say? </a:t>
-            </a:r>
-            <a:r>
-              <a:rPr sz="1500" b="0" i="0" lang="th-TH" altLang="en-US">
-                <a:solidFill>
-                  <a:srgbClr val="24333D"/>
-                </a:solidFill>
-                <a:latin typeface="Sarabun"/>
-                <a:ea typeface="Sarabun"/>
-                <a:cs typeface="Sarabun"/>
-              </a:rPr>
-              <a:t>ขอโทษ</a:t>
-            </a:r>
-            <a:r>
-              <a:rPr sz="1500" b="0" i="1" lang="en-US" altLang="en-US">
-                <a:solidFill>
-                  <a:srgbClr val="566873"/>
-                </a:solidFill>
-                <a:latin typeface="Sarabun"/>
-                <a:ea typeface="Sarabun"/>
-                <a:cs typeface="Sarabun"/>
-              </a:rPr>
-              <a:t> (khǎaw-thôot)</a:t>
-            </a:r>
-            <a:r>
-              <a:rPr sz="1500" b="0" i="0" lang="th-TH" altLang="en-US">
-                <a:solidFill>
-                  <a:srgbClr val="24333D"/>
-                </a:solidFill>
-                <a:latin typeface="Sarabun"/>
-                <a:ea typeface="Sarabun"/>
-                <a:cs typeface="Sarabun"/>
-              </a:rPr>
-              <a:t>ครับ or </a:t>
-            </a:r>
-            <a:r>
-              <a:rPr sz="1500" b="0" i="0" lang="th-TH" altLang="en-US">
-                <a:solidFill>
-                  <a:srgbClr val="24333D"/>
-                </a:solidFill>
-                <a:latin typeface="Sarabun"/>
-                <a:ea typeface="Sarabun"/>
-                <a:cs typeface="Sarabun"/>
-              </a:rPr>
-              <a:t>ขอโทษ</a:t>
-            </a:r>
-            <a:r>
-              <a:rPr sz="1500" b="0" i="1" lang="en-US" altLang="en-US">
-                <a:solidFill>
-                  <a:srgbClr val="566873"/>
-                </a:solidFill>
-                <a:latin typeface="Sarabun"/>
-                <a:ea typeface="Sarabun"/>
-                <a:cs typeface="Sarabun"/>
-              </a:rPr>
-              <a:t> (khǎaw-thôot)</a:t>
-            </a:r>
-            <a:r>
-              <a:rPr sz="1500" b="0" i="0" lang="th-TH" altLang="en-US">
-                <a:solidFill>
-                  <a:srgbClr val="24333D"/>
-                </a:solidFill>
-                <a:latin typeface="Sarabun"/>
-                <a:ea typeface="Sarabun"/>
-                <a:cs typeface="Sarabun"/>
-              </a:rPr>
-              <a:t>ค่ะ, then listen again.</a:t>
-            </a:r>
-          </a:p>
-        </p:txBody>
-      </p:sp>
-      <p:sp>
-        <p:nvSpPr>
-          <p:cNvPr id="18" name="Rounded Rectangle 17"/>
-          <p:cNvSpPr/>
-          <p:nvPr/>
-        </p:nvSpPr>
-        <p:spPr>
-          <a:xfrm>
-            <a:off x="731520" y="4160520"/>
-            <a:ext cx="10058400" cy="1289304"/>
-          </a:xfrm>
-          <a:prstGeom prst="roundRect">
-            <a:avLst>
-              <a:gd name="adj" fmla="val 6000"/>
-            </a:avLst>
-          </a:prstGeom>
-          <a:solidFill>
-            <a:srgbClr val="FFFFFF"/>
-          </a:solidFill>
-          <a:ln>
-            <a:solidFill>
-              <a:srgbClr val="D7DEE3"/>
-            </a:solidFill>
-          </a:ln>
-        </p:spPr>
-        <p:style>
-          <a:lnRef idx="1">
-            <a:schemeClr val="accent1"/>
-          </a:lnRef>
-          <a:fillRef idx="3">
-            <a:schemeClr val="accent1"/>
-          </a:fillRef>
-          <a:effectRef idx="2">
-            <a:schemeClr val="accent1"/>
-          </a:effectRef>
-          <a:fontRef idx="minor">
-            <a:schemeClr val="lt1"/>
-          </a:fontRef>
-        </p:style>
-        <p:txBody>
-          <a:bodyPr rtlCol="0" anchor="ctr"/>
-          <a:lstStyle/>
-          <a:p>
-            <a:pPr algn="ctr"/>
-          </a:p>
-        </p:txBody>
-      </p:sp>
-      <p:sp>
-        <p:nvSpPr>
-          <p:cNvPr id="19" name="TextBox 18"/>
-          <p:cNvSpPr txBox="1"/>
-          <p:nvPr/>
-        </p:nvSpPr>
-        <p:spPr>
-          <a:xfrm>
-            <a:off x="932688" y="4306824"/>
-            <a:ext cx="9692640" cy="228600"/>
-          </a:xfrm>
-          <a:prstGeom prst="rect">
-            <a:avLst/>
-          </a:prstGeom>
-          <a:noFill/>
-        </p:spPr>
-        <p:txBody>
-          <a:bodyPr wrap="square" anchor="t">
-            <a:spAutoFit/>
-          </a:bodyPr>
-          <a:lstStyle/>
-          <a:p>
-            <a:pPr algn="l"/>
-            <a:r>
-              <a:rPr sz="1500" b="1" i="0" lang="en-US" altLang="en-US">
-                <a:solidFill>
-                  <a:srgbClr val="7A8F54"/>
-                </a:solidFill>
-                <a:latin typeface="Sarabun"/>
-                <a:ea typeface="Sarabun"/>
-                <a:cs typeface="Sarabun"/>
-              </a:rPr>
-              <a:t>Remember</a:t>
-            </a:r>
-          </a:p>
-        </p:txBody>
-      </p:sp>
-      <p:sp>
-        <p:nvSpPr>
-          <p:cNvPr id="20" name="Oval 19"/>
-          <p:cNvSpPr/>
-          <p:nvPr/>
-        </p:nvSpPr>
-        <p:spPr>
-          <a:xfrm>
-            <a:off x="932688" y="4690872"/>
-            <a:ext cx="82296" cy="82296"/>
-          </a:xfrm>
-          <a:prstGeom prst="ellipse">
-            <a:avLst/>
-          </a:prstGeom>
-          <a:solidFill>
-            <a:srgbClr val="7A8F54"/>
-          </a:solidFill>
-          <a:ln>
-            <a:noFill/>
-          </a:ln>
-        </p:spPr>
-        <p:style>
-          <a:lnRef idx="1">
-            <a:schemeClr val="accent1"/>
-          </a:lnRef>
-          <a:fillRef idx="3">
-            <a:schemeClr val="accent1"/>
-          </a:fillRef>
-          <a:effectRef idx="2">
-            <a:schemeClr val="accent1"/>
-          </a:effectRef>
-          <a:fontRef idx="minor">
-            <a:schemeClr val="lt1"/>
-          </a:fontRef>
-        </p:style>
-        <p:txBody>
-          <a:bodyPr rtlCol="0" anchor="ctr"/>
-          <a:lstStyle/>
-          <a:p>
-            <a:pPr algn="ctr"/>
-          </a:p>
-        </p:txBody>
-      </p:sp>
-      <p:sp>
-        <p:nvSpPr>
-          <p:cNvPr id="21" name="TextBox 20"/>
-          <p:cNvSpPr txBox="1"/>
-          <p:nvPr/>
-        </p:nvSpPr>
-        <p:spPr>
-          <a:xfrm>
-            <a:off x="1078992" y="4599432"/>
-            <a:ext cx="9555480" cy="274320"/>
-          </a:xfrm>
-          <a:prstGeom prst="rect">
-            <a:avLst/>
-          </a:prstGeom>
-          <a:noFill/>
-        </p:spPr>
-        <p:txBody>
-          <a:bodyPr wrap="square" anchor="t">
-            <a:spAutoFit/>
-          </a:bodyPr>
-          <a:lstStyle/>
-          <a:p>
-            <a:pPr algn="l"/>
-            <a:r>
-              <a:rPr sz="1500" b="0" i="0" lang="en-US" altLang="en-US">
-                <a:solidFill>
-                  <a:srgbClr val="24333D"/>
-                </a:solidFill>
-                <a:latin typeface="Sarabun"/>
-                <a:ea typeface="Sarabun"/>
-                <a:cs typeface="Sarabun"/>
-              </a:rPr>
-              <a:t>If you miss a number, what do you say? </a:t>
-            </a:r>
-            <a:r>
-              <a:rPr sz="1500" b="0" i="0" lang="th-TH" altLang="en-US">
-                <a:solidFill>
-                  <a:srgbClr val="24333D"/>
-                </a:solidFill>
-                <a:latin typeface="Sarabun"/>
-                <a:ea typeface="Sarabun"/>
-                <a:cs typeface="Sarabun"/>
-              </a:rPr>
-              <a:t>ขอโทษ</a:t>
-            </a:r>
-            <a:r>
-              <a:rPr sz="1500" b="0" i="1" lang="en-US" altLang="en-US">
-                <a:solidFill>
-                  <a:srgbClr val="566873"/>
-                </a:solidFill>
-                <a:latin typeface="Sarabun"/>
-                <a:ea typeface="Sarabun"/>
-                <a:cs typeface="Sarabun"/>
-              </a:rPr>
-              <a:t> (khǎaw-thôot)</a:t>
-            </a:r>
-            <a:r>
-              <a:rPr sz="1500" b="0" i="0" lang="th-TH" altLang="en-US">
-                <a:solidFill>
-                  <a:srgbClr val="24333D"/>
-                </a:solidFill>
-                <a:latin typeface="Sarabun"/>
-                <a:ea typeface="Sarabun"/>
-                <a:cs typeface="Sarabun"/>
-              </a:rPr>
-              <a:t>ครับ or </a:t>
-            </a:r>
-            <a:r>
-              <a:rPr sz="1500" b="0" i="0" lang="th-TH" altLang="en-US">
-                <a:solidFill>
-                  <a:srgbClr val="24333D"/>
-                </a:solidFill>
-                <a:latin typeface="Sarabun"/>
-                <a:ea typeface="Sarabun"/>
-                <a:cs typeface="Sarabun"/>
-              </a:rPr>
-              <a:t>ขอโทษ</a:t>
-            </a:r>
-            <a:r>
-              <a:rPr sz="1500" b="0" i="1" lang="en-US" altLang="en-US">
-                <a:solidFill>
-                  <a:srgbClr val="566873"/>
-                </a:solidFill>
-                <a:latin typeface="Sarabun"/>
-                <a:ea typeface="Sarabun"/>
-                <a:cs typeface="Sarabun"/>
-              </a:rPr>
-              <a:t> (khǎaw-thôot)</a:t>
-            </a:r>
-            <a:r>
-              <a:rPr sz="1500" b="0" i="0" lang="th-TH" altLang="en-US">
-                <a:solidFill>
-                  <a:srgbClr val="24333D"/>
-                </a:solidFill>
-                <a:latin typeface="Sarabun"/>
-                <a:ea typeface="Sarabun"/>
-                <a:cs typeface="Sarabun"/>
-              </a:rPr>
-              <a:t>ค่ะ, then listen again.</a:t>
+              <a:t>Next: First Contact and Courtesy continues.</a:t>
             </a:r>
           </a:p>
         </p:txBody>
